--- a/modulo-04/04.03 - ABAP Cloud em Profundidade/04.03_ABAP_Cloud_em_profundidade.pptx
+++ b/modulo-04/04.03 - ABAP Cloud em Profundidade/04.03_ABAP_Cloud_em_profundidade.pptx
@@ -23,9 +23,10 @@
     <p:sldId id="271" r:id="rId17"/>
     <p:sldId id="272" r:id="rId18"/>
     <p:sldId id="273" r:id="rId19"/>
+    <p:sldId id="274" r:id="rId20"/>
   </p:sldIdLst>
   <p:notesMasterIdLst>
-    <p:notesMasterId r:id="rId20"/>
+    <p:notesMasterId r:id="rId21"/>
   </p:notesMasterIdLst>
   <p:sldSz cx="12192000" cy="6858000"/>
   <p:notesSz cx="6858000" cy="12192000"/>
@@ -1353,6 +1354,94 @@
 </p:notes>
 </file>
 
+<file path=ppt/notesSlides/notesSlide19.xml><?xml version="1.0" encoding="utf-8"?>
+<p:notes xmlns:a="http://schemas.openxmlformats.org/drawingml/2006/main" xmlns:r="http://schemas.openxmlformats.org/officeDocument/2006/relationships" xmlns:p="http://schemas.openxmlformats.org/presentationml/2006/main">
+  <p:cSld>
+    <p:spTree>
+      <p:nvGrpSpPr>
+        <p:cNvPr id="1" name=""/>
+        <p:cNvGrpSpPr/>
+        <p:nvPr/>
+      </p:nvGrpSpPr>
+      <p:grpSpPr>
+        <a:xfrm>
+          <a:off x="0" y="0"/>
+          <a:ext cx="0" cy="0"/>
+          <a:chOff x="0" y="0"/>
+          <a:chExt cx="0" cy="0"/>
+        </a:xfrm>
+      </p:grpSpPr>
+      <p:sp>
+        <p:nvSpPr>
+          <p:cNvPr id="2" name="Slide Image Placeholder 1"/>
+          <p:cNvSpPr>
+            <a:spLocks noGrp="1" noRot="1" noChangeAspect="1"/>
+          </p:cNvSpPr>
+          <p:nvPr>
+            <p:ph type="sldImg"/>
+          </p:nvPr>
+        </p:nvSpPr>
+        <p:spPr/>
+      </p:sp>
+      <p:sp>
+        <p:nvSpPr>
+          <p:cNvPr id="3" name="Notes Placeholder 2"/>
+          <p:cNvSpPr>
+            <a:spLocks noGrp="1"/>
+          </p:cNvSpPr>
+          <p:nvPr>
+            <p:ph type="body" idx="1"/>
+          </p:nvPr>
+        </p:nvSpPr>
+        <p:spPr/>
+        <p:txBody>
+          <a:bodyPr/>
+          <a:lstStyle/>
+          <a:p>
+            <a:r>
+              <a:rPr lang="en-US" dirty="0"/>
+              <a:t/>
+            </a:r>
+            <a:endParaRPr lang="en-US" dirty="0"/>
+          </a:p>
+        </p:txBody>
+      </p:sp>
+      <p:sp>
+        <p:nvSpPr>
+          <p:cNvPr id="4" name="Slide Number Placeholder 3"/>
+          <p:cNvSpPr>
+            <a:spLocks noGrp="1"/>
+          </p:cNvSpPr>
+          <p:nvPr>
+            <p:ph type="sldNum" sz="quarter" idx="10"/>
+          </p:nvPr>
+        </p:nvSpPr>
+        <p:spPr/>
+        <p:txBody>
+          <a:bodyPr/>
+          <a:lstStyle/>
+          <a:p>
+            <a:fld id="{F7021451-1387-4CA6-816F-3879F97B5CBC}" type="slidenum">
+              <a:rPr lang="en-US"/>
+              <a:t>19</a:t>
+            </a:fld>
+            <a:endParaRPr lang="en-US"/>
+          </a:p>
+        </p:txBody>
+      </p:sp>
+    </p:spTree>
+    <p:extLst>
+      <p:ext uri="{BB962C8B-B14F-4D97-AF65-F5344CB8AC3E}">
+        <p14:creationId xmlns:p14="http://schemas.microsoft.com/office/powerpoint/2010/main" val="1024086991"/>
+      </p:ext>
+    </p:extLst>
+  </p:cSld>
+  <p:clrMapOvr>
+    <a:masterClrMapping/>
+  </p:clrMapOvr>
+</p:notes>
+</file>
+
 <file path=ppt/notesSlides/notesSlide2.xml><?xml version="1.0" encoding="utf-8"?>
 <p:notes xmlns:a="http://schemas.openxmlformats.org/drawingml/2006/main" xmlns:r="http://schemas.openxmlformats.org/officeDocument/2006/relationships" xmlns:p="http://schemas.openxmlformats.org/presentationml/2006/main">
   <p:cSld>
@@ -2173,7 +2262,7 @@
                   <a:srgbClr val="8FA3C7"/>
                 </a:solidFill>
               </a:rPr>
-              <a:t>ABAP Moderno · Módulo 05 — Extensibilidade Clean Core  ·  Aula 3 de 5 — ABAP Cloud</a:t>
+              <a:t>ABAP Moderno · Módulo 04 — Extensibilidade Clean Core  ·  Aula 3 de 5 — ABAP Cloud</a:t>
             </a:r>
             <a:endParaRPr lang="en-US" sz="900" dirty="0"/>
           </a:p>
@@ -2319,7 +2408,7 @@
                   <a:srgbClr val="556B82"/>
                 </a:solidFill>
               </a:rPr>
-              <a:t>ABAP Moderno · Módulo 05 — Extensibilidade Clean Core  ·  Aula 3 de 5 — ABAP Cloud</a:t>
+              <a:t>ABAP Moderno · Módulo 04 — Extensibilidade Clean Core  ·  Aula 3 de 5 — ABAP Cloud</a:t>
             </a:r>
             <a:endParaRPr lang="en-US" sz="900" dirty="0"/>
           </a:p>
@@ -2750,7 +2839,7 @@
                   <a:srgbClr val="89D1FF"/>
                 </a:solidFill>
               </a:rPr>
-              <a:t>MÓDULO 05 · AULA 03 DE 05</a:t>
+              <a:t>MÓDULO 04 · AULA 03 DE 05</a:t>
             </a:r>
             <a:endParaRPr lang="en-US" sz="1400" dirty="0"/>
           </a:p>
@@ -3048,7 +3137,7 @@
                   <a:srgbClr val="8FA3C7"/>
                 </a:solidFill>
               </a:rPr>
-              <a:t>ABAP Moderno · Módulo 05 — Extensibilidade Clean Core · Design System SAP Horizon</a:t>
+              <a:t>ABAP Moderno · Módulo 04 — Extensibilidade Clean Core · Design System SAP Horizon</a:t>
             </a:r>
             <a:endParaRPr lang="en-US" sz="1100" dirty="0"/>
           </a:p>
@@ -4155,7 +4244,7 @@
                   <a:srgbClr val="89D1FF"/>
                 </a:solidFill>
               </a:rPr>
-              <a:t>AULA 05.03 · SEÇÃO 3</a:t>
+              <a:t>AULA 04.03 · SEÇÃO 3</a:t>
             </a:r>
             <a:endParaRPr lang="en-US" sz="1300" dirty="0"/>
           </a:p>
@@ -5435,7 +5524,7 @@
         </p:blipFill>
         <p:spPr>
           <a:xfrm>
-            <a:off x="4474731" y="2084832"/>
+            <a:off x="1598257" y="2084832"/>
             <a:ext cx="365760" cy="365760"/>
           </a:xfrm>
           <a:prstGeom prst="rect">
@@ -5459,7 +5548,7 @@
         </p:blipFill>
         <p:spPr>
           <a:xfrm>
-            <a:off x="1598257" y="2084832"/>
+            <a:off x="4474731" y="2084832"/>
             <a:ext cx="365760" cy="365760"/>
           </a:xfrm>
           <a:prstGeom prst="rect">
@@ -5483,7 +5572,7 @@
         </p:blipFill>
         <p:spPr>
           <a:xfrm>
-            <a:off x="10227678" y="2084832"/>
+            <a:off x="7351205" y="2084832"/>
             <a:ext cx="365760" cy="365760"/>
           </a:xfrm>
           <a:prstGeom prst="rect">
@@ -5531,7 +5620,7 @@
         </p:blipFill>
         <p:spPr>
           <a:xfrm>
-            <a:off x="7351205" y="2084832"/>
+            <a:off x="10227678" y="2084832"/>
             <a:ext cx="365760" cy="365760"/>
           </a:xfrm>
           <a:prstGeom prst="rect">
@@ -5555,7 +5644,7 @@
         </p:blipFill>
         <p:spPr>
           <a:xfrm>
-            <a:off x="4594372" y="3928994"/>
+            <a:off x="8368711" y="3928994"/>
             <a:ext cx="225308" cy="225308"/>
           </a:xfrm>
           <a:prstGeom prst="rect">
@@ -5579,7 +5668,7 @@
         </p:blipFill>
         <p:spPr>
           <a:xfrm>
-            <a:off x="8368711" y="3928994"/>
+            <a:off x="4594372" y="3928994"/>
             <a:ext cx="225308" cy="225308"/>
           </a:xfrm>
           <a:prstGeom prst="rect">
@@ -6629,36 +6718,251 @@
       </p:grpSpPr>
       <p:sp>
         <p:nvSpPr>
-          <p:cNvPr id="2" name="Shape 0"/>
+          <p:cNvPr id="2" name="Text 0"/>
           <p:cNvSpPr/>
-          <p:nvPr/>
-        </p:nvSpPr>
-        <p:spPr>
-          <a:xfrm>
-            <a:off x="731520" y="548640"/>
-            <a:ext cx="731520" cy="731520"/>
+          <p:nvPr>
+            <p:ph idx="100" type="body" hasCustomPrompt="1"/>
+          </p:nvPr>
+        </p:nvSpPr>
+        <p:spPr>
+          <a:xfrm>
+            <a:off x="548640" y="411480"/>
+            <a:ext cx="11094415" cy="274320"/>
+          </a:xfrm>
+          <a:prstGeom prst="rect">
+            <a:avLst/>
+          </a:prstGeom>
+          <a:noFill/>
+          <a:ln/>
+        </p:spPr>
+        <p:txBody>
+          <a:bodyPr wrap="square" lIns="0" tIns="0" rIns="0" bIns="0" rtlCol="0" anchor="ctr"/>
+          <a:lstStyle/>
+          <a:p>
+            <a:pPr algn="l" indent="0" marL="0">
+              <a:buNone/>
+            </a:pPr>
+            <a:r>
+              <a:rPr lang="en-US" sz="1100" b="1" spc="150" kern="0" dirty="0">
+                <a:solidFill>
+                  <a:srgbClr val="0064D9"/>
+                </a:solidFill>
+              </a:rPr>
+              <a:t>MODELOS · NO PROJETO</a:t>
+            </a:r>
+            <a:endParaRPr lang="en-US" sz="1100" dirty="0"/>
+          </a:p>
+        </p:txBody>
+      </p:sp>
+      <p:sp>
+        <p:nvSpPr>
+          <p:cNvPr id="3" name="Text 0"/>
+          <p:cNvSpPr/>
+          <p:nvPr>
+            <p:ph idx="101" type="title" hasCustomPrompt="1"/>
+          </p:nvPr>
+        </p:nvSpPr>
+        <p:spPr>
+          <a:xfrm>
+            <a:off x="548640" y="731520"/>
+            <a:ext cx="11094415" cy="640080"/>
+          </a:xfrm>
+          <a:prstGeom prst="rect">
+            <a:avLst/>
+          </a:prstGeom>
+          <a:noFill/>
+          <a:ln/>
+        </p:spPr>
+        <p:txBody>
+          <a:bodyPr wrap="square" lIns="0" tIns="0" rIns="0" bIns="0" rtlCol="0" anchor="ctr"/>
+          <a:lstStyle/>
+          <a:p>
+            <a:pPr algn="l" indent="0" marL="0">
+              <a:buNone/>
+            </a:pPr>
+            <a:r>
+              <a:rPr lang="en-US" sz="2800" b="1" dirty="0">
+                <a:solidFill>
+                  <a:srgbClr val="1D2D3E"/>
+                </a:solidFill>
+              </a:rPr>
+              <a:t>HTTP e JSON só com APIs liberadas</a:t>
+            </a:r>
+            <a:endParaRPr lang="en-US" sz="2800" dirty="0"/>
+          </a:p>
+        </p:txBody>
+      </p:sp>
+      <p:sp>
+        <p:nvSpPr>
+          <p:cNvPr id="4" name="Shape 2"/>
+          <p:cNvSpPr/>
+          <p:nvPr/>
+        </p:nvSpPr>
+        <p:spPr>
+          <a:xfrm>
+            <a:off x="548640" y="1645920"/>
+            <a:ext cx="6675120" cy="4526280"/>
           </a:xfrm>
           <a:prstGeom prst="roundRect">
             <a:avLst>
-              <a:gd name="adj" fmla="val 20000"/>
+              <a:gd name="adj" fmla="val 1616"/>
             </a:avLst>
           </a:prstGeom>
           <a:solidFill>
-            <a:srgbClr val="1B3A7A"/>
+            <a:srgbClr val="1F1F1F"/>
           </a:solidFill>
           <a:ln/>
-        </p:spPr>
-      </p:sp>
-      <p:sp>
-        <p:nvSpPr>
-          <p:cNvPr id="3" name="Text 1"/>
+          <a:effectLst>
+            <a:outerShdw sx="100000" sy="100000" kx="0" ky="0" algn="bl" rotWithShape="0" blurRad="76200" dist="25400" dir="5400000">
+              <a:srgbClr val="000000">
+                <a:alpha val="18000"/>
+              </a:srgbClr>
+            </a:outerShdw>
+          </a:effectLst>
+        </p:spPr>
+      </p:sp>
+      <p:sp>
+        <p:nvSpPr>
+          <p:cNvPr id="5" name="Shape 3"/>
+          <p:cNvSpPr/>
+          <p:nvPr/>
+        </p:nvSpPr>
+        <p:spPr>
+          <a:xfrm>
+            <a:off x="566928" y="1664208"/>
+            <a:ext cx="6638544" cy="329184"/>
+          </a:xfrm>
+          <a:prstGeom prst="rect">
+            <a:avLst/>
+          </a:prstGeom>
+          <a:solidFill>
+            <a:srgbClr val="2B2B2B"/>
+          </a:solidFill>
+          <a:ln/>
+        </p:spPr>
+      </p:sp>
+      <p:sp>
+        <p:nvSpPr>
+          <p:cNvPr id="6" name="Shape 4"/>
+          <p:cNvSpPr/>
+          <p:nvPr/>
+        </p:nvSpPr>
+        <p:spPr>
+          <a:xfrm>
+            <a:off x="640080" y="1700784"/>
+            <a:ext cx="2153412" cy="292608"/>
+          </a:xfrm>
+          <a:prstGeom prst="rect">
+            <a:avLst/>
+          </a:prstGeom>
+          <a:solidFill>
+            <a:srgbClr val="1F1F1F"/>
+          </a:solidFill>
+          <a:ln/>
+        </p:spPr>
+      </p:sp>
+      <p:sp>
+        <p:nvSpPr>
+          <p:cNvPr id="7" name="Shape 5"/>
+          <p:cNvSpPr/>
+          <p:nvPr/>
+        </p:nvSpPr>
+        <p:spPr>
+          <a:xfrm>
+            <a:off x="640080" y="1700784"/>
+            <a:ext cx="2153412" cy="27432"/>
+          </a:xfrm>
+          <a:prstGeom prst="rect">
+            <a:avLst/>
+          </a:prstGeom>
+          <a:solidFill>
+            <a:srgbClr val="0070F2"/>
+          </a:solidFill>
+          <a:ln/>
+        </p:spPr>
+      </p:sp>
+      <p:sp>
+        <p:nvSpPr>
+          <p:cNvPr id="8" name="Text 6"/>
           <p:cNvSpPr txBox="1"/>
           <p:nvPr/>
         </p:nvSpPr>
         <p:spPr>
           <a:xfrm>
-            <a:off x="731520" y="1600200"/>
-            <a:ext cx="6766560" cy="320040"/>
+            <a:off x="731520" y="1719072"/>
+            <a:ext cx="1970532" cy="274320"/>
+          </a:xfrm>
+          <a:prstGeom prst="rect">
+            <a:avLst/>
+          </a:prstGeom>
+          <a:noFill/>
+          <a:ln/>
+        </p:spPr>
+        <p:txBody>
+          <a:bodyPr wrap="square" lIns="0" tIns="0" rIns="0" bIns="0" rtlCol="0" anchor="ctr"/>
+          <a:lstStyle/>
+          <a:p>
+            <a:pPr indent="0" marL="0">
+              <a:buNone/>
+            </a:pPr>
+            <a:r>
+              <a:rPr lang="en-US" sz="950" dirty="0">
+                <a:solidFill>
+                  <a:srgbClr val="FFFFFF"/>
+                </a:solidFill>
+              </a:rPr>
+              <a:t>zcl_pc_viacep.clas.abap</a:t>
+            </a:r>
+            <a:endParaRPr lang="en-US" sz="950" dirty="0"/>
+          </a:p>
+        </p:txBody>
+      </p:sp>
+      <p:sp>
+        <p:nvSpPr>
+          <p:cNvPr id="9" name="Text 7"/>
+          <p:cNvSpPr txBox="1"/>
+          <p:nvPr/>
+        </p:nvSpPr>
+        <p:spPr>
+          <a:xfrm>
+            <a:off x="777240" y="2103120"/>
+            <a:ext cx="6217920" cy="228600"/>
+          </a:xfrm>
+          <a:prstGeom prst="rect">
+            <a:avLst/>
+          </a:prstGeom>
+          <a:noFill/>
+          <a:ln/>
+        </p:spPr>
+        <p:txBody>
+          <a:bodyPr wrap="square" lIns="0" tIns="0" rIns="0" bIns="0" rtlCol="0" anchor="ctr"/>
+          <a:lstStyle/>
+          <a:p>
+            <a:pPr indent="0" marL="0">
+              <a:buNone/>
+            </a:pPr>
+            <a:r>
+              <a:rPr lang="en-US" sz="850" dirty="0">
+                <a:solidFill>
+                  <a:srgbClr val="9DA5B4"/>
+                </a:solidFill>
+              </a:rPr>
+              <a:t>ZAVBS_PC_COMMON › ZCL_PC_VIACEP › chamar_servico (trecho)</a:t>
+            </a:r>
+            <a:endParaRPr lang="en-US" sz="850" dirty="0"/>
+          </a:p>
+        </p:txBody>
+      </p:sp>
+      <p:sp>
+        <p:nvSpPr>
+          <p:cNvPr id="10" name="Text 8"/>
+          <p:cNvSpPr txBox="1"/>
+          <p:nvPr/>
+        </p:nvSpPr>
+        <p:spPr>
+          <a:xfrm>
+            <a:off x="685800" y="2395728"/>
+            <a:ext cx="320040" cy="3685032"/>
           </a:xfrm>
           <a:prstGeom prst="rect">
             <a:avLst/>
@@ -6670,31 +6974,337 @@
           <a:bodyPr wrap="square" lIns="0" tIns="0" rIns="0" bIns="0" rtlCol="0" anchor="t"/>
           <a:lstStyle/>
           <a:p>
-            <a:pPr indent="0" marL="0">
-              <a:buNone/>
-            </a:pPr>
-            <a:r>
-              <a:rPr lang="en-US" sz="1300" b="1" spc="200" kern="0" dirty="0">
-                <a:solidFill>
-                  <a:srgbClr val="89D1FF"/>
-                </a:solidFill>
-              </a:rPr>
-              <a:t>AULA 05.03 · SEÇÃO 4</a:t>
-            </a:r>
-            <a:endParaRPr lang="en-US" sz="1300" dirty="0"/>
-          </a:p>
-        </p:txBody>
-      </p:sp>
-      <p:sp>
-        <p:nvSpPr>
-          <p:cNvPr id="4" name="Text 2"/>
+            <a:pPr algn="r" indent="0" marL="0">
+              <a:lnSpc>
+                <a:spcPct val="105000"/>
+              </a:lnSpc>
+              <a:buNone/>
+            </a:pPr>
+            <a:r>
+              <a:rPr lang="en-US" sz="900" dirty="0">
+                <a:solidFill>
+                  <a:srgbClr val="6E7681"/>
+                </a:solidFill>
+                <a:latin typeface="Courier New" pitchFamily="34" charset="0"/>
+                <a:ea typeface="Courier New" pitchFamily="34" charset="-122"/>
+                <a:cs typeface="Courier New" pitchFamily="34" charset="-120"/>
+              </a:rPr>
+              <a:t>1</a:t>
+            </a:r>
+            <a:endParaRPr lang="en-US" sz="900" dirty="0"/>
+          </a:p>
+          <a:p>
+            <a:pPr algn="r" indent="0" marL="0">
+              <a:lnSpc>
+                <a:spcPct val="105000"/>
+              </a:lnSpc>
+              <a:buNone/>
+            </a:pPr>
+            <a:r>
+              <a:rPr lang="en-US" sz="900" dirty="0">
+                <a:solidFill>
+                  <a:srgbClr val="6E7681"/>
+                </a:solidFill>
+                <a:latin typeface="Courier New" pitchFamily="34" charset="0"/>
+                <a:ea typeface="Courier New" pitchFamily="34" charset="-122"/>
+                <a:cs typeface="Courier New" pitchFamily="34" charset="-120"/>
+              </a:rPr>
+              <a:t>2</a:t>
+            </a:r>
+            <a:endParaRPr lang="en-US" sz="900" dirty="0"/>
+          </a:p>
+          <a:p>
+            <a:pPr algn="r" indent="0" marL="0">
+              <a:lnSpc>
+                <a:spcPct val="105000"/>
+              </a:lnSpc>
+              <a:buNone/>
+            </a:pPr>
+            <a:r>
+              <a:rPr lang="en-US" sz="900" dirty="0">
+                <a:solidFill>
+                  <a:srgbClr val="6E7681"/>
+                </a:solidFill>
+                <a:latin typeface="Courier New" pitchFamily="34" charset="0"/>
+                <a:ea typeface="Courier New" pitchFamily="34" charset="-122"/>
+                <a:cs typeface="Courier New" pitchFamily="34" charset="-120"/>
+              </a:rPr>
+              <a:t>3</a:t>
+            </a:r>
+            <a:endParaRPr lang="en-US" sz="900" dirty="0"/>
+          </a:p>
+          <a:p>
+            <a:pPr algn="r" indent="0" marL="0">
+              <a:lnSpc>
+                <a:spcPct val="105000"/>
+              </a:lnSpc>
+              <a:buNone/>
+            </a:pPr>
+            <a:r>
+              <a:rPr lang="en-US" sz="900" dirty="0">
+                <a:solidFill>
+                  <a:srgbClr val="6E7681"/>
+                </a:solidFill>
+                <a:latin typeface="Courier New" pitchFamily="34" charset="0"/>
+                <a:ea typeface="Courier New" pitchFamily="34" charset="-122"/>
+                <a:cs typeface="Courier New" pitchFamily="34" charset="-120"/>
+              </a:rPr>
+              <a:t>4</a:t>
+            </a:r>
+            <a:endParaRPr lang="en-US" sz="900" dirty="0"/>
+          </a:p>
+          <a:p>
+            <a:pPr algn="r" indent="0" marL="0">
+              <a:lnSpc>
+                <a:spcPct val="105000"/>
+              </a:lnSpc>
+              <a:buNone/>
+            </a:pPr>
+            <a:r>
+              <a:rPr lang="en-US" sz="900" dirty="0">
+                <a:solidFill>
+                  <a:srgbClr val="6E7681"/>
+                </a:solidFill>
+                <a:latin typeface="Courier New" pitchFamily="34" charset="0"/>
+                <a:ea typeface="Courier New" pitchFamily="34" charset="-122"/>
+                <a:cs typeface="Courier New" pitchFamily="34" charset="-120"/>
+              </a:rPr>
+              <a:t>5</a:t>
+            </a:r>
+            <a:endParaRPr lang="en-US" sz="900" dirty="0"/>
+          </a:p>
+          <a:p>
+            <a:pPr algn="r" indent="0" marL="0">
+              <a:lnSpc>
+                <a:spcPct val="105000"/>
+              </a:lnSpc>
+              <a:buNone/>
+            </a:pPr>
+            <a:r>
+              <a:rPr lang="en-US" sz="900" dirty="0">
+                <a:solidFill>
+                  <a:srgbClr val="6E7681"/>
+                </a:solidFill>
+                <a:latin typeface="Courier New" pitchFamily="34" charset="0"/>
+                <a:ea typeface="Courier New" pitchFamily="34" charset="-122"/>
+                <a:cs typeface="Courier New" pitchFamily="34" charset="-120"/>
+              </a:rPr>
+              <a:t>6</a:t>
+            </a:r>
+            <a:endParaRPr lang="en-US" sz="900" dirty="0"/>
+          </a:p>
+          <a:p>
+            <a:pPr algn="r" indent="0" marL="0">
+              <a:lnSpc>
+                <a:spcPct val="105000"/>
+              </a:lnSpc>
+              <a:buNone/>
+            </a:pPr>
+            <a:r>
+              <a:rPr lang="en-US" sz="900" dirty="0">
+                <a:solidFill>
+                  <a:srgbClr val="6E7681"/>
+                </a:solidFill>
+                <a:latin typeface="Courier New" pitchFamily="34" charset="0"/>
+                <a:ea typeface="Courier New" pitchFamily="34" charset="-122"/>
+                <a:cs typeface="Courier New" pitchFamily="34" charset="-120"/>
+              </a:rPr>
+              <a:t>7</a:t>
+            </a:r>
+            <a:endParaRPr lang="en-US" sz="900" dirty="0"/>
+          </a:p>
+          <a:p>
+            <a:pPr algn="r" indent="0" marL="0">
+              <a:lnSpc>
+                <a:spcPct val="105000"/>
+              </a:lnSpc>
+              <a:buNone/>
+            </a:pPr>
+            <a:r>
+              <a:rPr lang="en-US" sz="900" dirty="0">
+                <a:solidFill>
+                  <a:srgbClr val="6E7681"/>
+                </a:solidFill>
+                <a:latin typeface="Courier New" pitchFamily="34" charset="0"/>
+                <a:ea typeface="Courier New" pitchFamily="34" charset="-122"/>
+                <a:cs typeface="Courier New" pitchFamily="34" charset="-120"/>
+              </a:rPr>
+              <a:t>8</a:t>
+            </a:r>
+            <a:endParaRPr lang="en-US" sz="900" dirty="0"/>
+          </a:p>
+          <a:p>
+            <a:pPr algn="r" indent="0" marL="0">
+              <a:lnSpc>
+                <a:spcPct val="105000"/>
+              </a:lnSpc>
+              <a:buNone/>
+            </a:pPr>
+            <a:r>
+              <a:rPr lang="en-US" sz="900" dirty="0">
+                <a:solidFill>
+                  <a:srgbClr val="6E7681"/>
+                </a:solidFill>
+                <a:latin typeface="Courier New" pitchFamily="34" charset="0"/>
+                <a:ea typeface="Courier New" pitchFamily="34" charset="-122"/>
+                <a:cs typeface="Courier New" pitchFamily="34" charset="-120"/>
+              </a:rPr>
+              <a:t>9</a:t>
+            </a:r>
+            <a:endParaRPr lang="en-US" sz="900" dirty="0"/>
+          </a:p>
+          <a:p>
+            <a:pPr algn="r" indent="0" marL="0">
+              <a:lnSpc>
+                <a:spcPct val="105000"/>
+              </a:lnSpc>
+              <a:buNone/>
+            </a:pPr>
+            <a:r>
+              <a:rPr lang="en-US" sz="900" dirty="0">
+                <a:solidFill>
+                  <a:srgbClr val="6E7681"/>
+                </a:solidFill>
+                <a:latin typeface="Courier New" pitchFamily="34" charset="0"/>
+                <a:ea typeface="Courier New" pitchFamily="34" charset="-122"/>
+                <a:cs typeface="Courier New" pitchFamily="34" charset="-120"/>
+              </a:rPr>
+              <a:t>10</a:t>
+            </a:r>
+            <a:endParaRPr lang="en-US" sz="900" dirty="0"/>
+          </a:p>
+          <a:p>
+            <a:pPr algn="r" indent="0" marL="0">
+              <a:lnSpc>
+                <a:spcPct val="105000"/>
+              </a:lnSpc>
+              <a:buNone/>
+            </a:pPr>
+            <a:r>
+              <a:rPr lang="en-US" sz="900" dirty="0">
+                <a:solidFill>
+                  <a:srgbClr val="6E7681"/>
+                </a:solidFill>
+                <a:latin typeface="Courier New" pitchFamily="34" charset="0"/>
+                <a:ea typeface="Courier New" pitchFamily="34" charset="-122"/>
+                <a:cs typeface="Courier New" pitchFamily="34" charset="-120"/>
+              </a:rPr>
+              <a:t>11</a:t>
+            </a:r>
+            <a:endParaRPr lang="en-US" sz="900" dirty="0"/>
+          </a:p>
+          <a:p>
+            <a:pPr algn="r" indent="0" marL="0">
+              <a:lnSpc>
+                <a:spcPct val="105000"/>
+              </a:lnSpc>
+              <a:buNone/>
+            </a:pPr>
+            <a:r>
+              <a:rPr lang="en-US" sz="900" dirty="0">
+                <a:solidFill>
+                  <a:srgbClr val="6E7681"/>
+                </a:solidFill>
+                <a:latin typeface="Courier New" pitchFamily="34" charset="0"/>
+                <a:ea typeface="Courier New" pitchFamily="34" charset="-122"/>
+                <a:cs typeface="Courier New" pitchFamily="34" charset="-120"/>
+              </a:rPr>
+              <a:t>12</a:t>
+            </a:r>
+            <a:endParaRPr lang="en-US" sz="900" dirty="0"/>
+          </a:p>
+          <a:p>
+            <a:pPr algn="r" indent="0" marL="0">
+              <a:lnSpc>
+                <a:spcPct val="105000"/>
+              </a:lnSpc>
+              <a:buNone/>
+            </a:pPr>
+            <a:r>
+              <a:rPr lang="en-US" sz="900" dirty="0">
+                <a:solidFill>
+                  <a:srgbClr val="6E7681"/>
+                </a:solidFill>
+                <a:latin typeface="Courier New" pitchFamily="34" charset="0"/>
+                <a:ea typeface="Courier New" pitchFamily="34" charset="-122"/>
+                <a:cs typeface="Courier New" pitchFamily="34" charset="-120"/>
+              </a:rPr>
+              <a:t>13</a:t>
+            </a:r>
+            <a:endParaRPr lang="en-US" sz="900" dirty="0"/>
+          </a:p>
+          <a:p>
+            <a:pPr algn="r" indent="0" marL="0">
+              <a:lnSpc>
+                <a:spcPct val="105000"/>
+              </a:lnSpc>
+              <a:buNone/>
+            </a:pPr>
+            <a:r>
+              <a:rPr lang="en-US" sz="900" dirty="0">
+                <a:solidFill>
+                  <a:srgbClr val="6E7681"/>
+                </a:solidFill>
+                <a:latin typeface="Courier New" pitchFamily="34" charset="0"/>
+                <a:ea typeface="Courier New" pitchFamily="34" charset="-122"/>
+                <a:cs typeface="Courier New" pitchFamily="34" charset="-120"/>
+              </a:rPr>
+              <a:t>14</a:t>
+            </a:r>
+            <a:endParaRPr lang="en-US" sz="900" dirty="0"/>
+          </a:p>
+          <a:p>
+            <a:pPr algn="r" indent="0" marL="0">
+              <a:lnSpc>
+                <a:spcPct val="105000"/>
+              </a:lnSpc>
+              <a:buNone/>
+            </a:pPr>
+            <a:r>
+              <a:rPr lang="en-US" sz="900" dirty="0">
+                <a:solidFill>
+                  <a:srgbClr val="6E7681"/>
+                </a:solidFill>
+                <a:latin typeface="Courier New" pitchFamily="34" charset="0"/>
+                <a:ea typeface="Courier New" pitchFamily="34" charset="-122"/>
+                <a:cs typeface="Courier New" pitchFamily="34" charset="-120"/>
+              </a:rPr>
+              <a:t>15</a:t>
+            </a:r>
+            <a:endParaRPr lang="en-US" sz="900" dirty="0"/>
+          </a:p>
+          <a:p>
+            <a:pPr algn="r" indent="0" marL="0">
+              <a:lnSpc>
+                <a:spcPct val="105000"/>
+              </a:lnSpc>
+              <a:buNone/>
+            </a:pPr>
+            <a:r>
+              <a:rPr lang="en-US" sz="900" dirty="0">
+                <a:solidFill>
+                  <a:srgbClr val="6E7681"/>
+                </a:solidFill>
+                <a:latin typeface="Courier New" pitchFamily="34" charset="0"/>
+                <a:ea typeface="Courier New" pitchFamily="34" charset="-122"/>
+                <a:cs typeface="Courier New" pitchFamily="34" charset="-120"/>
+              </a:rPr>
+              <a:t>16</a:t>
+            </a:r>
+            <a:endParaRPr lang="en-US" sz="900" dirty="0"/>
+          </a:p>
+        </p:txBody>
+      </p:sp>
+      <p:sp>
+        <p:nvSpPr>
+          <p:cNvPr id="11" name="Text 9"/>
           <p:cNvSpPr txBox="1"/>
           <p:nvPr/>
         </p:nvSpPr>
         <p:spPr>
           <a:xfrm>
-            <a:off x="731520" y="1965960"/>
-            <a:ext cx="6766560" cy="1600200"/>
+            <a:off x="1051560" y="2395728"/>
+            <a:ext cx="6035040" cy="3685032"/>
           </a:xfrm>
           <a:prstGeom prst="rect">
             <a:avLst/>
@@ -6707,30 +7317,1361 @@
           <a:lstStyle/>
           <a:p>
             <a:pPr indent="0" marL="0">
-              <a:buNone/>
-            </a:pPr>
-            <a:r>
-              <a:rPr lang="en-US" sz="3400" b="1" dirty="0">
-                <a:solidFill>
-                  <a:srgbClr val="FFFFFF"/>
-                </a:solidFill>
-              </a:rPr>
-              <a:t>Released APIs e serviços de reuso</a:t>
-            </a:r>
-            <a:endParaRPr lang="en-US" sz="3400" dirty="0"/>
-          </a:p>
-        </p:txBody>
-      </p:sp>
-      <p:sp>
-        <p:nvSpPr>
-          <p:cNvPr id="5" name="Text 3"/>
+              <a:lnSpc>
+                <a:spcPct val="105000"/>
+              </a:lnSpc>
+              <a:buNone/>
+            </a:pPr>
+            <a:r>
+              <a:rPr lang="en-US" sz="900" dirty="0">
+                <a:solidFill>
+                  <a:srgbClr val="569CD6"/>
+                </a:solidFill>
+                <a:latin typeface="Courier New" pitchFamily="34" charset="0"/>
+                <a:ea typeface="Courier New" pitchFamily="34" charset="-122"/>
+                <a:cs typeface="Courier New" pitchFamily="34" charset="-120"/>
+              </a:rPr>
+              <a:t>TRY</a:t>
+            </a:r>
+            <a:r>
+              <a:rPr lang="en-US" sz="900" dirty="0">
+                <a:solidFill>
+                  <a:srgbClr val="CCCCCC"/>
+                </a:solidFill>
+                <a:latin typeface="Courier New" pitchFamily="34" charset="0"/>
+                <a:ea typeface="Courier New" pitchFamily="34" charset="-122"/>
+                <a:cs typeface="Courier New" pitchFamily="34" charset="-120"/>
+              </a:rPr>
+              <a:t>.</a:t>
+            </a:r>
+            <a:endParaRPr lang="en-US" sz="900" dirty="0"/>
+          </a:p>
+          <a:p>
+            <a:pPr indent="0" marL="0">
+              <a:lnSpc>
+                <a:spcPct val="105000"/>
+              </a:lnSpc>
+              <a:buNone/>
+            </a:pPr>
+            <a:r>
+              <a:rPr lang="en-US" sz="900" dirty="0">
+                <a:solidFill>
+                  <a:srgbClr val="CCCCCC"/>
+                </a:solidFill>
+                <a:latin typeface="Courier New" pitchFamily="34" charset="0"/>
+                <a:ea typeface="Courier New" pitchFamily="34" charset="-122"/>
+                <a:cs typeface="Courier New" pitchFamily="34" charset="-120"/>
+              </a:rPr>
+              <a:t>    </a:t>
+            </a:r>
+            <a:r>
+              <a:rPr lang="en-US" sz="900" dirty="0">
+                <a:solidFill>
+                  <a:srgbClr val="569CD6"/>
+                </a:solidFill>
+                <a:latin typeface="Courier New" pitchFamily="34" charset="0"/>
+                <a:ea typeface="Courier New" pitchFamily="34" charset="-122"/>
+                <a:cs typeface="Courier New" pitchFamily="34" charset="-120"/>
+              </a:rPr>
+              <a:t>DATA</a:t>
+            </a:r>
+            <a:r>
+              <a:rPr lang="en-US" sz="900" dirty="0">
+                <a:solidFill>
+                  <a:srgbClr val="CCCCCC"/>
+                </a:solidFill>
+                <a:latin typeface="Courier New" pitchFamily="34" charset="0"/>
+                <a:ea typeface="Courier New" pitchFamily="34" charset="-122"/>
+                <a:cs typeface="Courier New" pitchFamily="34" charset="-120"/>
+              </a:rPr>
+              <a:t>(</a:t>
+            </a:r>
+            <a:r>
+              <a:rPr lang="en-US" sz="900" dirty="0">
+                <a:solidFill>
+                  <a:srgbClr val="CCCCCC"/>
+                </a:solidFill>
+                <a:latin typeface="Courier New" pitchFamily="34" charset="0"/>
+                <a:ea typeface="Courier New" pitchFamily="34" charset="-122"/>
+                <a:cs typeface="Courier New" pitchFamily="34" charset="-120"/>
+              </a:rPr>
+              <a:t>lo_destino</a:t>
+            </a:r>
+            <a:r>
+              <a:rPr lang="en-US" sz="900" dirty="0">
+                <a:solidFill>
+                  <a:srgbClr val="CCCCCC"/>
+                </a:solidFill>
+                <a:latin typeface="Courier New" pitchFamily="34" charset="0"/>
+                <a:ea typeface="Courier New" pitchFamily="34" charset="-122"/>
+                <a:cs typeface="Courier New" pitchFamily="34" charset="-120"/>
+              </a:rPr>
+              <a:t>)</a:t>
+            </a:r>
+            <a:r>
+              <a:rPr lang="en-US" sz="900" dirty="0">
+                <a:solidFill>
+                  <a:srgbClr val="CCCCCC"/>
+                </a:solidFill>
+                <a:latin typeface="Courier New" pitchFamily="34" charset="0"/>
+                <a:ea typeface="Courier New" pitchFamily="34" charset="-122"/>
+                <a:cs typeface="Courier New" pitchFamily="34" charset="-120"/>
+              </a:rPr>
+              <a:t> </a:t>
+            </a:r>
+            <a:r>
+              <a:rPr lang="en-US" sz="900" dirty="0">
+                <a:solidFill>
+                  <a:srgbClr val="CCCCCC"/>
+                </a:solidFill>
+                <a:latin typeface="Courier New" pitchFamily="34" charset="0"/>
+                <a:ea typeface="Courier New" pitchFamily="34" charset="-122"/>
+                <a:cs typeface="Courier New" pitchFamily="34" charset="-120"/>
+              </a:rPr>
+              <a:t>=</a:t>
+            </a:r>
+            <a:r>
+              <a:rPr lang="en-US" sz="900" dirty="0">
+                <a:solidFill>
+                  <a:srgbClr val="CCCCCC"/>
+                </a:solidFill>
+                <a:latin typeface="Courier New" pitchFamily="34" charset="0"/>
+                <a:ea typeface="Courier New" pitchFamily="34" charset="-122"/>
+                <a:cs typeface="Courier New" pitchFamily="34" charset="-120"/>
+              </a:rPr>
+              <a:t> </a:t>
+            </a:r>
+            <a:r>
+              <a:rPr lang="en-US" sz="900" dirty="0">
+                <a:solidFill>
+                  <a:srgbClr val="4EC9B0"/>
+                </a:solidFill>
+                <a:latin typeface="Courier New" pitchFamily="34" charset="0"/>
+                <a:ea typeface="Courier New" pitchFamily="34" charset="-122"/>
+                <a:cs typeface="Courier New" pitchFamily="34" charset="-120"/>
+              </a:rPr>
+              <a:t>cl_http_destination_provider=&gt;</a:t>
+            </a:r>
+            <a:r>
+              <a:rPr lang="en-US" sz="900" dirty="0">
+                <a:solidFill>
+                  <a:srgbClr val="CCCCCC"/>
+                </a:solidFill>
+                <a:latin typeface="Courier New" pitchFamily="34" charset="0"/>
+                <a:ea typeface="Courier New" pitchFamily="34" charset="-122"/>
+                <a:cs typeface="Courier New" pitchFamily="34" charset="-120"/>
+              </a:rPr>
+              <a:t>create_by_url</a:t>
+            </a:r>
+            <a:r>
+              <a:rPr lang="en-US" sz="900" dirty="0">
+                <a:solidFill>
+                  <a:srgbClr val="CCCCCC"/>
+                </a:solidFill>
+                <a:latin typeface="Courier New" pitchFamily="34" charset="0"/>
+                <a:ea typeface="Courier New" pitchFamily="34" charset="-122"/>
+                <a:cs typeface="Courier New" pitchFamily="34" charset="-120"/>
+              </a:rPr>
+              <a:t>(</a:t>
+            </a:r>
+            <a:endParaRPr lang="en-US" sz="900" dirty="0"/>
+          </a:p>
+          <a:p>
+            <a:pPr indent="0" marL="0">
+              <a:lnSpc>
+                <a:spcPct val="105000"/>
+              </a:lnSpc>
+              <a:buNone/>
+            </a:pPr>
+            <a:r>
+              <a:rPr lang="en-US" sz="900" dirty="0">
+                <a:solidFill>
+                  <a:srgbClr val="CCCCCC"/>
+                </a:solidFill>
+                <a:latin typeface="Courier New" pitchFamily="34" charset="0"/>
+                <a:ea typeface="Courier New" pitchFamily="34" charset="-122"/>
+                <a:cs typeface="Courier New" pitchFamily="34" charset="-120"/>
+              </a:rPr>
+              <a:t>                         </a:t>
+            </a:r>
+            <a:r>
+              <a:rPr lang="en-US" sz="900" dirty="0">
+                <a:solidFill>
+                  <a:srgbClr val="CCCCCC"/>
+                </a:solidFill>
+                <a:latin typeface="Courier New" pitchFamily="34" charset="0"/>
+                <a:ea typeface="Courier New" pitchFamily="34" charset="-122"/>
+                <a:cs typeface="Courier New" pitchFamily="34" charset="-120"/>
+              </a:rPr>
+              <a:t>i_url</a:t>
+            </a:r>
+            <a:r>
+              <a:rPr lang="en-US" sz="900" dirty="0">
+                <a:solidFill>
+                  <a:srgbClr val="CCCCCC"/>
+                </a:solidFill>
+                <a:latin typeface="Courier New" pitchFamily="34" charset="0"/>
+                <a:ea typeface="Courier New" pitchFamily="34" charset="-122"/>
+                <a:cs typeface="Courier New" pitchFamily="34" charset="-120"/>
+              </a:rPr>
+              <a:t> </a:t>
+            </a:r>
+            <a:r>
+              <a:rPr lang="en-US" sz="900" dirty="0">
+                <a:solidFill>
+                  <a:srgbClr val="CCCCCC"/>
+                </a:solidFill>
+                <a:latin typeface="Courier New" pitchFamily="34" charset="0"/>
+                <a:ea typeface="Courier New" pitchFamily="34" charset="-122"/>
+                <a:cs typeface="Courier New" pitchFamily="34" charset="-120"/>
+              </a:rPr>
+              <a:t>=</a:t>
+            </a:r>
+            <a:r>
+              <a:rPr lang="en-US" sz="900" dirty="0">
+                <a:solidFill>
+                  <a:srgbClr val="CCCCCC"/>
+                </a:solidFill>
+                <a:latin typeface="Courier New" pitchFamily="34" charset="0"/>
+                <a:ea typeface="Courier New" pitchFamily="34" charset="-122"/>
+                <a:cs typeface="Courier New" pitchFamily="34" charset="-120"/>
+              </a:rPr>
+              <a:t> </a:t>
+            </a:r>
+            <a:r>
+              <a:rPr lang="en-US" sz="900" dirty="0">
+                <a:solidFill>
+                  <a:srgbClr val="CE9178"/>
+                </a:solidFill>
+                <a:latin typeface="Courier New" pitchFamily="34" charset="0"/>
+                <a:ea typeface="Courier New" pitchFamily="34" charset="-122"/>
+                <a:cs typeface="Courier New" pitchFamily="34" charset="-120"/>
+              </a:rPr>
+              <a:t>|{ c_url_base }{ iv_cep }/json/|</a:t>
+            </a:r>
+            <a:r>
+              <a:rPr lang="en-US" sz="900" dirty="0">
+                <a:solidFill>
+                  <a:srgbClr val="CCCCCC"/>
+                </a:solidFill>
+                <a:latin typeface="Courier New" pitchFamily="34" charset="0"/>
+                <a:ea typeface="Courier New" pitchFamily="34" charset="-122"/>
+                <a:cs typeface="Courier New" pitchFamily="34" charset="-120"/>
+              </a:rPr>
+              <a:t> </a:t>
+            </a:r>
+            <a:r>
+              <a:rPr lang="en-US" sz="900" dirty="0">
+                <a:solidFill>
+                  <a:srgbClr val="CCCCCC"/>
+                </a:solidFill>
+                <a:latin typeface="Courier New" pitchFamily="34" charset="0"/>
+                <a:ea typeface="Courier New" pitchFamily="34" charset="-122"/>
+                <a:cs typeface="Courier New" pitchFamily="34" charset="-120"/>
+              </a:rPr>
+              <a:t>)</a:t>
+            </a:r>
+            <a:r>
+              <a:rPr lang="en-US" sz="900" dirty="0">
+                <a:solidFill>
+                  <a:srgbClr val="CCCCCC"/>
+                </a:solidFill>
+                <a:latin typeface="Courier New" pitchFamily="34" charset="0"/>
+                <a:ea typeface="Courier New" pitchFamily="34" charset="-122"/>
+                <a:cs typeface="Courier New" pitchFamily="34" charset="-120"/>
+              </a:rPr>
+              <a:t>.</a:t>
+            </a:r>
+            <a:endParaRPr lang="en-US" sz="900" dirty="0"/>
+          </a:p>
+          <a:p>
+            <a:pPr indent="0" marL="0">
+              <a:lnSpc>
+                <a:spcPct val="105000"/>
+              </a:lnSpc>
+              <a:buNone/>
+            </a:pPr>
+            <a:r>
+              <a:rPr lang="en-US" sz="900" dirty="0">
+                <a:solidFill>
+                  <a:srgbClr val="CCCCCC"/>
+                </a:solidFill>
+                <a:latin typeface="Courier New" pitchFamily="34" charset="0"/>
+                <a:ea typeface="Courier New" pitchFamily="34" charset="-122"/>
+                <a:cs typeface="Courier New" pitchFamily="34" charset="-120"/>
+              </a:rPr>
+              <a:t>    </a:t>
+            </a:r>
+            <a:r>
+              <a:rPr lang="en-US" sz="900" dirty="0">
+                <a:solidFill>
+                  <a:srgbClr val="CCCCCC"/>
+                </a:solidFill>
+                <a:latin typeface="Courier New" pitchFamily="34" charset="0"/>
+                <a:ea typeface="Courier New" pitchFamily="34" charset="-122"/>
+                <a:cs typeface="Courier New" pitchFamily="34" charset="-120"/>
+              </a:rPr>
+              <a:t>lo_cliente</a:t>
+            </a:r>
+            <a:r>
+              <a:rPr lang="en-US" sz="900" dirty="0">
+                <a:solidFill>
+                  <a:srgbClr val="CCCCCC"/>
+                </a:solidFill>
+                <a:latin typeface="Courier New" pitchFamily="34" charset="0"/>
+                <a:ea typeface="Courier New" pitchFamily="34" charset="-122"/>
+                <a:cs typeface="Courier New" pitchFamily="34" charset="-120"/>
+              </a:rPr>
+              <a:t> </a:t>
+            </a:r>
+            <a:r>
+              <a:rPr lang="en-US" sz="900" dirty="0">
+                <a:solidFill>
+                  <a:srgbClr val="CCCCCC"/>
+                </a:solidFill>
+                <a:latin typeface="Courier New" pitchFamily="34" charset="0"/>
+                <a:ea typeface="Courier New" pitchFamily="34" charset="-122"/>
+                <a:cs typeface="Courier New" pitchFamily="34" charset="-120"/>
+              </a:rPr>
+              <a:t>=</a:t>
+            </a:r>
+            <a:r>
+              <a:rPr lang="en-US" sz="900" dirty="0">
+                <a:solidFill>
+                  <a:srgbClr val="CCCCCC"/>
+                </a:solidFill>
+                <a:latin typeface="Courier New" pitchFamily="34" charset="0"/>
+                <a:ea typeface="Courier New" pitchFamily="34" charset="-122"/>
+                <a:cs typeface="Courier New" pitchFamily="34" charset="-120"/>
+              </a:rPr>
+              <a:t> </a:t>
+            </a:r>
+            <a:r>
+              <a:rPr lang="en-US" sz="900" dirty="0">
+                <a:solidFill>
+                  <a:srgbClr val="4EC9B0"/>
+                </a:solidFill>
+                <a:latin typeface="Courier New" pitchFamily="34" charset="0"/>
+                <a:ea typeface="Courier New" pitchFamily="34" charset="-122"/>
+                <a:cs typeface="Courier New" pitchFamily="34" charset="-120"/>
+              </a:rPr>
+              <a:t>cl_web_http_client_manager=&gt;</a:t>
+            </a:r>
+            <a:r>
+              <a:rPr lang="en-US" sz="900" dirty="0">
+                <a:solidFill>
+                  <a:srgbClr val="CCCCCC"/>
+                </a:solidFill>
+                <a:latin typeface="Courier New" pitchFamily="34" charset="0"/>
+                <a:ea typeface="Courier New" pitchFamily="34" charset="-122"/>
+                <a:cs typeface="Courier New" pitchFamily="34" charset="-120"/>
+              </a:rPr>
+              <a:t>create_by_http_destination</a:t>
+            </a:r>
+            <a:r>
+              <a:rPr lang="en-US" sz="900" dirty="0">
+                <a:solidFill>
+                  <a:srgbClr val="CCCCCC"/>
+                </a:solidFill>
+                <a:latin typeface="Courier New" pitchFamily="34" charset="0"/>
+                <a:ea typeface="Courier New" pitchFamily="34" charset="-122"/>
+                <a:cs typeface="Courier New" pitchFamily="34" charset="-120"/>
+              </a:rPr>
+              <a:t>(</a:t>
+            </a:r>
+            <a:endParaRPr lang="en-US" sz="900" dirty="0"/>
+          </a:p>
+          <a:p>
+            <a:pPr indent="0" marL="0">
+              <a:lnSpc>
+                <a:spcPct val="105000"/>
+              </a:lnSpc>
+              <a:buNone/>
+            </a:pPr>
+            <a:r>
+              <a:rPr lang="en-US" sz="900" dirty="0">
+                <a:solidFill>
+                  <a:srgbClr val="CCCCCC"/>
+                </a:solidFill>
+                <a:latin typeface="Courier New" pitchFamily="34" charset="0"/>
+                <a:ea typeface="Courier New" pitchFamily="34" charset="-122"/>
+                <a:cs typeface="Courier New" pitchFamily="34" charset="-120"/>
+              </a:rPr>
+              <a:t>                   </a:t>
+            </a:r>
+            <a:r>
+              <a:rPr lang="en-US" sz="900" dirty="0">
+                <a:solidFill>
+                  <a:srgbClr val="CCCCCC"/>
+                </a:solidFill>
+                <a:latin typeface="Courier New" pitchFamily="34" charset="0"/>
+                <a:ea typeface="Courier New" pitchFamily="34" charset="-122"/>
+                <a:cs typeface="Courier New" pitchFamily="34" charset="-120"/>
+              </a:rPr>
+              <a:t>lo_destino</a:t>
+            </a:r>
+            <a:r>
+              <a:rPr lang="en-US" sz="900" dirty="0">
+                <a:solidFill>
+                  <a:srgbClr val="CCCCCC"/>
+                </a:solidFill>
+                <a:latin typeface="Courier New" pitchFamily="34" charset="0"/>
+                <a:ea typeface="Courier New" pitchFamily="34" charset="-122"/>
+                <a:cs typeface="Courier New" pitchFamily="34" charset="-120"/>
+              </a:rPr>
+              <a:t> </a:t>
+            </a:r>
+            <a:r>
+              <a:rPr lang="en-US" sz="900" dirty="0">
+                <a:solidFill>
+                  <a:srgbClr val="CCCCCC"/>
+                </a:solidFill>
+                <a:latin typeface="Courier New" pitchFamily="34" charset="0"/>
+                <a:ea typeface="Courier New" pitchFamily="34" charset="-122"/>
+                <a:cs typeface="Courier New" pitchFamily="34" charset="-120"/>
+              </a:rPr>
+              <a:t>)</a:t>
+            </a:r>
+            <a:r>
+              <a:rPr lang="en-US" sz="900" dirty="0">
+                <a:solidFill>
+                  <a:srgbClr val="CCCCCC"/>
+                </a:solidFill>
+                <a:latin typeface="Courier New" pitchFamily="34" charset="0"/>
+                <a:ea typeface="Courier New" pitchFamily="34" charset="-122"/>
+                <a:cs typeface="Courier New" pitchFamily="34" charset="-120"/>
+              </a:rPr>
+              <a:t>.</a:t>
+            </a:r>
+            <a:endParaRPr lang="en-US" sz="900" dirty="0"/>
+          </a:p>
+          <a:p>
+            <a:pPr indent="0" marL="0">
+              <a:lnSpc>
+                <a:spcPct val="105000"/>
+              </a:lnSpc>
+              <a:buNone/>
+            </a:pPr>
+            <a:r>
+              <a:rPr lang="en-US" sz="900" dirty="0">
+                <a:solidFill>
+                  <a:srgbClr val="CCCCCC"/>
+                </a:solidFill>
+                <a:latin typeface="Courier New" pitchFamily="34" charset="0"/>
+                <a:ea typeface="Courier New" pitchFamily="34" charset="-122"/>
+                <a:cs typeface="Courier New" pitchFamily="34" charset="-120"/>
+              </a:rPr>
+              <a:t>    </a:t>
+            </a:r>
+            <a:r>
+              <a:rPr lang="en-US" sz="900" dirty="0">
+                <a:solidFill>
+                  <a:srgbClr val="569CD6"/>
+                </a:solidFill>
+                <a:latin typeface="Courier New" pitchFamily="34" charset="0"/>
+                <a:ea typeface="Courier New" pitchFamily="34" charset="-122"/>
+                <a:cs typeface="Courier New" pitchFamily="34" charset="-120"/>
+              </a:rPr>
+              <a:t>DATA</a:t>
+            </a:r>
+            <a:r>
+              <a:rPr lang="en-US" sz="900" dirty="0">
+                <a:solidFill>
+                  <a:srgbClr val="CCCCCC"/>
+                </a:solidFill>
+                <a:latin typeface="Courier New" pitchFamily="34" charset="0"/>
+                <a:ea typeface="Courier New" pitchFamily="34" charset="-122"/>
+                <a:cs typeface="Courier New" pitchFamily="34" charset="-120"/>
+              </a:rPr>
+              <a:t>(</a:t>
+            </a:r>
+            <a:r>
+              <a:rPr lang="en-US" sz="900" dirty="0">
+                <a:solidFill>
+                  <a:srgbClr val="CCCCCC"/>
+                </a:solidFill>
+                <a:latin typeface="Courier New" pitchFamily="34" charset="0"/>
+                <a:ea typeface="Courier New" pitchFamily="34" charset="-122"/>
+                <a:cs typeface="Courier New" pitchFamily="34" charset="-120"/>
+              </a:rPr>
+              <a:t>lo_resposta</a:t>
+            </a:r>
+            <a:r>
+              <a:rPr lang="en-US" sz="900" dirty="0">
+                <a:solidFill>
+                  <a:srgbClr val="CCCCCC"/>
+                </a:solidFill>
+                <a:latin typeface="Courier New" pitchFamily="34" charset="0"/>
+                <a:ea typeface="Courier New" pitchFamily="34" charset="-122"/>
+                <a:cs typeface="Courier New" pitchFamily="34" charset="-120"/>
+              </a:rPr>
+              <a:t>)</a:t>
+            </a:r>
+            <a:r>
+              <a:rPr lang="en-US" sz="900" dirty="0">
+                <a:solidFill>
+                  <a:srgbClr val="CCCCCC"/>
+                </a:solidFill>
+                <a:latin typeface="Courier New" pitchFamily="34" charset="0"/>
+                <a:ea typeface="Courier New" pitchFamily="34" charset="-122"/>
+                <a:cs typeface="Courier New" pitchFamily="34" charset="-120"/>
+              </a:rPr>
+              <a:t> </a:t>
+            </a:r>
+            <a:r>
+              <a:rPr lang="en-US" sz="900" dirty="0">
+                <a:solidFill>
+                  <a:srgbClr val="CCCCCC"/>
+                </a:solidFill>
+                <a:latin typeface="Courier New" pitchFamily="34" charset="0"/>
+                <a:ea typeface="Courier New" pitchFamily="34" charset="-122"/>
+                <a:cs typeface="Courier New" pitchFamily="34" charset="-120"/>
+              </a:rPr>
+              <a:t>=</a:t>
+            </a:r>
+            <a:r>
+              <a:rPr lang="en-US" sz="900" dirty="0">
+                <a:solidFill>
+                  <a:srgbClr val="CCCCCC"/>
+                </a:solidFill>
+                <a:latin typeface="Courier New" pitchFamily="34" charset="0"/>
+                <a:ea typeface="Courier New" pitchFamily="34" charset="-122"/>
+                <a:cs typeface="Courier New" pitchFamily="34" charset="-120"/>
+              </a:rPr>
+              <a:t> </a:t>
+            </a:r>
+            <a:r>
+              <a:rPr lang="en-US" sz="900" dirty="0">
+                <a:solidFill>
+                  <a:srgbClr val="CCCCCC"/>
+                </a:solidFill>
+                <a:latin typeface="Courier New" pitchFamily="34" charset="0"/>
+                <a:ea typeface="Courier New" pitchFamily="34" charset="-122"/>
+                <a:cs typeface="Courier New" pitchFamily="34" charset="-120"/>
+              </a:rPr>
+              <a:t>lo_cliente-</a:t>
+            </a:r>
+            <a:r>
+              <a:rPr lang="en-US" sz="900" dirty="0">
+                <a:solidFill>
+                  <a:srgbClr val="CCCCCC"/>
+                </a:solidFill>
+                <a:latin typeface="Courier New" pitchFamily="34" charset="0"/>
+                <a:ea typeface="Courier New" pitchFamily="34" charset="-122"/>
+                <a:cs typeface="Courier New" pitchFamily="34" charset="-120"/>
+              </a:rPr>
+              <a:t>&gt;</a:t>
+            </a:r>
+            <a:r>
+              <a:rPr lang="en-US" sz="900" dirty="0">
+                <a:solidFill>
+                  <a:srgbClr val="CCCCCC"/>
+                </a:solidFill>
+                <a:latin typeface="Courier New" pitchFamily="34" charset="0"/>
+                <a:ea typeface="Courier New" pitchFamily="34" charset="-122"/>
+                <a:cs typeface="Courier New" pitchFamily="34" charset="-120"/>
+              </a:rPr>
+              <a:t>execute</a:t>
+            </a:r>
+            <a:r>
+              <a:rPr lang="en-US" sz="900" dirty="0">
+                <a:solidFill>
+                  <a:srgbClr val="CCCCCC"/>
+                </a:solidFill>
+                <a:latin typeface="Courier New" pitchFamily="34" charset="0"/>
+                <a:ea typeface="Courier New" pitchFamily="34" charset="-122"/>
+                <a:cs typeface="Courier New" pitchFamily="34" charset="-120"/>
+              </a:rPr>
+              <a:t>(</a:t>
+            </a:r>
+            <a:r>
+              <a:rPr lang="en-US" sz="900" dirty="0">
+                <a:solidFill>
+                  <a:srgbClr val="CCCCCC"/>
+                </a:solidFill>
+                <a:latin typeface="Courier New" pitchFamily="34" charset="0"/>
+                <a:ea typeface="Courier New" pitchFamily="34" charset="-122"/>
+                <a:cs typeface="Courier New" pitchFamily="34" charset="-120"/>
+              </a:rPr>
+              <a:t> </a:t>
+            </a:r>
+            <a:r>
+              <a:rPr lang="en-US" sz="900" dirty="0">
+                <a:solidFill>
+                  <a:srgbClr val="4EC9B0"/>
+                </a:solidFill>
+                <a:latin typeface="Courier New" pitchFamily="34" charset="0"/>
+                <a:ea typeface="Courier New" pitchFamily="34" charset="-122"/>
+                <a:cs typeface="Courier New" pitchFamily="34" charset="-120"/>
+              </a:rPr>
+              <a:t>if_web_http_client=&gt;</a:t>
+            </a:r>
+            <a:r>
+              <a:rPr lang="en-US" sz="900" dirty="0">
+                <a:solidFill>
+                  <a:srgbClr val="CCCCCC"/>
+                </a:solidFill>
+                <a:latin typeface="Courier New" pitchFamily="34" charset="0"/>
+                <a:ea typeface="Courier New" pitchFamily="34" charset="-122"/>
+                <a:cs typeface="Courier New" pitchFamily="34" charset="-120"/>
+              </a:rPr>
+              <a:t>get</a:t>
+            </a:r>
+            <a:r>
+              <a:rPr lang="en-US" sz="900" dirty="0">
+                <a:solidFill>
+                  <a:srgbClr val="CCCCCC"/>
+                </a:solidFill>
+                <a:latin typeface="Courier New" pitchFamily="34" charset="0"/>
+                <a:ea typeface="Courier New" pitchFamily="34" charset="-122"/>
+                <a:cs typeface="Courier New" pitchFamily="34" charset="-120"/>
+              </a:rPr>
+              <a:t> </a:t>
+            </a:r>
+            <a:r>
+              <a:rPr lang="en-US" sz="900" dirty="0">
+                <a:solidFill>
+                  <a:srgbClr val="CCCCCC"/>
+                </a:solidFill>
+                <a:latin typeface="Courier New" pitchFamily="34" charset="0"/>
+                <a:ea typeface="Courier New" pitchFamily="34" charset="-122"/>
+                <a:cs typeface="Courier New" pitchFamily="34" charset="-120"/>
+              </a:rPr>
+              <a:t>)</a:t>
+            </a:r>
+            <a:r>
+              <a:rPr lang="en-US" sz="900" dirty="0">
+                <a:solidFill>
+                  <a:srgbClr val="CCCCCC"/>
+                </a:solidFill>
+                <a:latin typeface="Courier New" pitchFamily="34" charset="0"/>
+                <a:ea typeface="Courier New" pitchFamily="34" charset="-122"/>
+                <a:cs typeface="Courier New" pitchFamily="34" charset="-120"/>
+              </a:rPr>
+              <a:t>.</a:t>
+            </a:r>
+            <a:endParaRPr lang="en-US" sz="900" dirty="0"/>
+          </a:p>
+          <a:p>
+            <a:pPr indent="0" marL="0">
+              <a:lnSpc>
+                <a:spcPct val="105000"/>
+              </a:lnSpc>
+              <a:buNone/>
+            </a:pPr>
+            <a:r>
+              <a:rPr lang="en-US" sz="900" dirty="0">
+                <a:solidFill>
+                  <a:srgbClr val="CCCCCC"/>
+                </a:solidFill>
+                <a:latin typeface="Courier New" pitchFamily="34" charset="0"/>
+                <a:ea typeface="Courier New" pitchFamily="34" charset="-122"/>
+                <a:cs typeface="Courier New" pitchFamily="34" charset="-120"/>
+              </a:rPr>
+              <a:t>    </a:t>
+            </a:r>
+            <a:r>
+              <a:rPr lang="en-US" sz="900" dirty="0">
+                <a:solidFill>
+                  <a:srgbClr val="CCCCCC"/>
+                </a:solidFill>
+                <a:latin typeface="Courier New" pitchFamily="34" charset="0"/>
+                <a:ea typeface="Courier New" pitchFamily="34" charset="-122"/>
+                <a:cs typeface="Courier New" pitchFamily="34" charset="-120"/>
+              </a:rPr>
+              <a:t>lv_status</a:t>
+            </a:r>
+            <a:r>
+              <a:rPr lang="en-US" sz="900" dirty="0">
+                <a:solidFill>
+                  <a:srgbClr val="CCCCCC"/>
+                </a:solidFill>
+                <a:latin typeface="Courier New" pitchFamily="34" charset="0"/>
+                <a:ea typeface="Courier New" pitchFamily="34" charset="-122"/>
+                <a:cs typeface="Courier New" pitchFamily="34" charset="-120"/>
+              </a:rPr>
+              <a:t> </a:t>
+            </a:r>
+            <a:r>
+              <a:rPr lang="en-US" sz="900" dirty="0">
+                <a:solidFill>
+                  <a:srgbClr val="CCCCCC"/>
+                </a:solidFill>
+                <a:latin typeface="Courier New" pitchFamily="34" charset="0"/>
+                <a:ea typeface="Courier New" pitchFamily="34" charset="-122"/>
+                <a:cs typeface="Courier New" pitchFamily="34" charset="-120"/>
+              </a:rPr>
+              <a:t>=</a:t>
+            </a:r>
+            <a:r>
+              <a:rPr lang="en-US" sz="900" dirty="0">
+                <a:solidFill>
+                  <a:srgbClr val="CCCCCC"/>
+                </a:solidFill>
+                <a:latin typeface="Courier New" pitchFamily="34" charset="0"/>
+                <a:ea typeface="Courier New" pitchFamily="34" charset="-122"/>
+                <a:cs typeface="Courier New" pitchFamily="34" charset="-120"/>
+              </a:rPr>
+              <a:t> </a:t>
+            </a:r>
+            <a:r>
+              <a:rPr lang="en-US" sz="900" dirty="0">
+                <a:solidFill>
+                  <a:srgbClr val="CCCCCC"/>
+                </a:solidFill>
+                <a:latin typeface="Courier New" pitchFamily="34" charset="0"/>
+                <a:ea typeface="Courier New" pitchFamily="34" charset="-122"/>
+                <a:cs typeface="Courier New" pitchFamily="34" charset="-120"/>
+              </a:rPr>
+              <a:t>lo_resposta-</a:t>
+            </a:r>
+            <a:r>
+              <a:rPr lang="en-US" sz="900" dirty="0">
+                <a:solidFill>
+                  <a:srgbClr val="CCCCCC"/>
+                </a:solidFill>
+                <a:latin typeface="Courier New" pitchFamily="34" charset="0"/>
+                <a:ea typeface="Courier New" pitchFamily="34" charset="-122"/>
+                <a:cs typeface="Courier New" pitchFamily="34" charset="-120"/>
+              </a:rPr>
+              <a:t>&gt;</a:t>
+            </a:r>
+            <a:r>
+              <a:rPr lang="en-US" sz="900" dirty="0">
+                <a:solidFill>
+                  <a:srgbClr val="CCCCCC"/>
+                </a:solidFill>
+                <a:latin typeface="Courier New" pitchFamily="34" charset="0"/>
+                <a:ea typeface="Courier New" pitchFamily="34" charset="-122"/>
+                <a:cs typeface="Courier New" pitchFamily="34" charset="-120"/>
+              </a:rPr>
+              <a:t>get_status</a:t>
+            </a:r>
+            <a:r>
+              <a:rPr lang="en-US" sz="900" dirty="0">
+                <a:solidFill>
+                  <a:srgbClr val="CCCCCC"/>
+                </a:solidFill>
+                <a:latin typeface="Courier New" pitchFamily="34" charset="0"/>
+                <a:ea typeface="Courier New" pitchFamily="34" charset="-122"/>
+                <a:cs typeface="Courier New" pitchFamily="34" charset="-120"/>
+              </a:rPr>
+              <a:t>(</a:t>
+            </a:r>
+            <a:r>
+              <a:rPr lang="en-US" sz="900" dirty="0">
+                <a:solidFill>
+                  <a:srgbClr val="CCCCCC"/>
+                </a:solidFill>
+                <a:latin typeface="Courier New" pitchFamily="34" charset="0"/>
+                <a:ea typeface="Courier New" pitchFamily="34" charset="-122"/>
+                <a:cs typeface="Courier New" pitchFamily="34" charset="-120"/>
+              </a:rPr>
+              <a:t> </a:t>
+            </a:r>
+            <a:r>
+              <a:rPr lang="en-US" sz="900" dirty="0">
+                <a:solidFill>
+                  <a:srgbClr val="CCCCCC"/>
+                </a:solidFill>
+                <a:latin typeface="Courier New" pitchFamily="34" charset="0"/>
+                <a:ea typeface="Courier New" pitchFamily="34" charset="-122"/>
+                <a:cs typeface="Courier New" pitchFamily="34" charset="-120"/>
+              </a:rPr>
+              <a:t>)</a:t>
+            </a:r>
+            <a:r>
+              <a:rPr lang="en-US" sz="900" dirty="0">
+                <a:solidFill>
+                  <a:srgbClr val="CCCCCC"/>
+                </a:solidFill>
+                <a:latin typeface="Courier New" pitchFamily="34" charset="0"/>
+                <a:ea typeface="Courier New" pitchFamily="34" charset="-122"/>
+                <a:cs typeface="Courier New" pitchFamily="34" charset="-120"/>
+              </a:rPr>
+              <a:t>-</a:t>
+            </a:r>
+            <a:r>
+              <a:rPr lang="en-US" sz="900" dirty="0">
+                <a:solidFill>
+                  <a:srgbClr val="CCCCCC"/>
+                </a:solidFill>
+                <a:latin typeface="Courier New" pitchFamily="34" charset="0"/>
+                <a:ea typeface="Courier New" pitchFamily="34" charset="-122"/>
+                <a:cs typeface="Courier New" pitchFamily="34" charset="-120"/>
+              </a:rPr>
+              <a:t>code</a:t>
+            </a:r>
+            <a:r>
+              <a:rPr lang="en-US" sz="900" dirty="0">
+                <a:solidFill>
+                  <a:srgbClr val="CCCCCC"/>
+                </a:solidFill>
+                <a:latin typeface="Courier New" pitchFamily="34" charset="0"/>
+                <a:ea typeface="Courier New" pitchFamily="34" charset="-122"/>
+                <a:cs typeface="Courier New" pitchFamily="34" charset="-120"/>
+              </a:rPr>
+              <a:t>.</a:t>
+            </a:r>
+            <a:endParaRPr lang="en-US" sz="900" dirty="0"/>
+          </a:p>
+          <a:p>
+            <a:pPr indent="0" marL="0">
+              <a:lnSpc>
+                <a:spcPct val="105000"/>
+              </a:lnSpc>
+              <a:buNone/>
+            </a:pPr>
+            <a:r>
+              <a:rPr lang="en-US" sz="900" dirty="0">
+                <a:solidFill>
+                  <a:srgbClr val="CCCCCC"/>
+                </a:solidFill>
+                <a:latin typeface="Courier New" pitchFamily="34" charset="0"/>
+                <a:ea typeface="Courier New" pitchFamily="34" charset="-122"/>
+                <a:cs typeface="Courier New" pitchFamily="34" charset="-120"/>
+              </a:rPr>
+              <a:t>    </a:t>
+            </a:r>
+            <a:r>
+              <a:rPr lang="en-US" sz="900" dirty="0">
+                <a:solidFill>
+                  <a:srgbClr val="CCCCCC"/>
+                </a:solidFill>
+                <a:latin typeface="Courier New" pitchFamily="34" charset="0"/>
+                <a:ea typeface="Courier New" pitchFamily="34" charset="-122"/>
+                <a:cs typeface="Courier New" pitchFamily="34" charset="-120"/>
+              </a:rPr>
+              <a:t>lv_json</a:t>
+            </a:r>
+            <a:r>
+              <a:rPr lang="en-US" sz="900" dirty="0">
+                <a:solidFill>
+                  <a:srgbClr val="CCCCCC"/>
+                </a:solidFill>
+                <a:latin typeface="Courier New" pitchFamily="34" charset="0"/>
+                <a:ea typeface="Courier New" pitchFamily="34" charset="-122"/>
+                <a:cs typeface="Courier New" pitchFamily="34" charset="-120"/>
+              </a:rPr>
+              <a:t>   </a:t>
+            </a:r>
+            <a:r>
+              <a:rPr lang="en-US" sz="900" dirty="0">
+                <a:solidFill>
+                  <a:srgbClr val="CCCCCC"/>
+                </a:solidFill>
+                <a:latin typeface="Courier New" pitchFamily="34" charset="0"/>
+                <a:ea typeface="Courier New" pitchFamily="34" charset="-122"/>
+                <a:cs typeface="Courier New" pitchFamily="34" charset="-120"/>
+              </a:rPr>
+              <a:t>=</a:t>
+            </a:r>
+            <a:r>
+              <a:rPr lang="en-US" sz="900" dirty="0">
+                <a:solidFill>
+                  <a:srgbClr val="CCCCCC"/>
+                </a:solidFill>
+                <a:latin typeface="Courier New" pitchFamily="34" charset="0"/>
+                <a:ea typeface="Courier New" pitchFamily="34" charset="-122"/>
+                <a:cs typeface="Courier New" pitchFamily="34" charset="-120"/>
+              </a:rPr>
+              <a:t> </a:t>
+            </a:r>
+            <a:r>
+              <a:rPr lang="en-US" sz="900" dirty="0">
+                <a:solidFill>
+                  <a:srgbClr val="CCCCCC"/>
+                </a:solidFill>
+                <a:latin typeface="Courier New" pitchFamily="34" charset="0"/>
+                <a:ea typeface="Courier New" pitchFamily="34" charset="-122"/>
+                <a:cs typeface="Courier New" pitchFamily="34" charset="-120"/>
+              </a:rPr>
+              <a:t>lo_resposta-</a:t>
+            </a:r>
+            <a:r>
+              <a:rPr lang="en-US" sz="900" dirty="0">
+                <a:solidFill>
+                  <a:srgbClr val="CCCCCC"/>
+                </a:solidFill>
+                <a:latin typeface="Courier New" pitchFamily="34" charset="0"/>
+                <a:ea typeface="Courier New" pitchFamily="34" charset="-122"/>
+                <a:cs typeface="Courier New" pitchFamily="34" charset="-120"/>
+              </a:rPr>
+              <a:t>&gt;</a:t>
+            </a:r>
+            <a:r>
+              <a:rPr lang="en-US" sz="900" dirty="0">
+                <a:solidFill>
+                  <a:srgbClr val="CCCCCC"/>
+                </a:solidFill>
+                <a:latin typeface="Courier New" pitchFamily="34" charset="0"/>
+                <a:ea typeface="Courier New" pitchFamily="34" charset="-122"/>
+                <a:cs typeface="Courier New" pitchFamily="34" charset="-120"/>
+              </a:rPr>
+              <a:t>get_text</a:t>
+            </a:r>
+            <a:r>
+              <a:rPr lang="en-US" sz="900" dirty="0">
+                <a:solidFill>
+                  <a:srgbClr val="CCCCCC"/>
+                </a:solidFill>
+                <a:latin typeface="Courier New" pitchFamily="34" charset="0"/>
+                <a:ea typeface="Courier New" pitchFamily="34" charset="-122"/>
+                <a:cs typeface="Courier New" pitchFamily="34" charset="-120"/>
+              </a:rPr>
+              <a:t>(</a:t>
+            </a:r>
+            <a:r>
+              <a:rPr lang="en-US" sz="900" dirty="0">
+                <a:solidFill>
+                  <a:srgbClr val="CCCCCC"/>
+                </a:solidFill>
+                <a:latin typeface="Courier New" pitchFamily="34" charset="0"/>
+                <a:ea typeface="Courier New" pitchFamily="34" charset="-122"/>
+                <a:cs typeface="Courier New" pitchFamily="34" charset="-120"/>
+              </a:rPr>
+              <a:t> </a:t>
+            </a:r>
+            <a:r>
+              <a:rPr lang="en-US" sz="900" dirty="0">
+                <a:solidFill>
+                  <a:srgbClr val="CCCCCC"/>
+                </a:solidFill>
+                <a:latin typeface="Courier New" pitchFamily="34" charset="0"/>
+                <a:ea typeface="Courier New" pitchFamily="34" charset="-122"/>
+                <a:cs typeface="Courier New" pitchFamily="34" charset="-120"/>
+              </a:rPr>
+              <a:t>)</a:t>
+            </a:r>
+            <a:r>
+              <a:rPr lang="en-US" sz="900" dirty="0">
+                <a:solidFill>
+                  <a:srgbClr val="CCCCCC"/>
+                </a:solidFill>
+                <a:latin typeface="Courier New" pitchFamily="34" charset="0"/>
+                <a:ea typeface="Courier New" pitchFamily="34" charset="-122"/>
+                <a:cs typeface="Courier New" pitchFamily="34" charset="-120"/>
+              </a:rPr>
+              <a:t>.</a:t>
+            </a:r>
+            <a:endParaRPr lang="en-US" sz="900" dirty="0"/>
+          </a:p>
+          <a:p>
+            <a:pPr indent="0" marL="0">
+              <a:lnSpc>
+                <a:spcPct val="105000"/>
+              </a:lnSpc>
+              <a:buNone/>
+            </a:pPr>
+            <a:r>
+              <a:rPr lang="en-US" sz="900" dirty="0">
+                <a:solidFill>
+                  <a:srgbClr val="CCCCCC"/>
+                </a:solidFill>
+                <a:latin typeface="Courier New" pitchFamily="34" charset="0"/>
+                <a:ea typeface="Courier New" pitchFamily="34" charset="-122"/>
+                <a:cs typeface="Courier New" pitchFamily="34" charset="-120"/>
+              </a:rPr>
+              <a:t>  </a:t>
+            </a:r>
+            <a:r>
+              <a:rPr lang="en-US" sz="900" dirty="0">
+                <a:solidFill>
+                  <a:srgbClr val="569CD6"/>
+                </a:solidFill>
+                <a:latin typeface="Courier New" pitchFamily="34" charset="0"/>
+                <a:ea typeface="Courier New" pitchFamily="34" charset="-122"/>
+                <a:cs typeface="Courier New" pitchFamily="34" charset="-120"/>
+              </a:rPr>
+              <a:t>CATCH</a:t>
+            </a:r>
+            <a:r>
+              <a:rPr lang="en-US" sz="900" dirty="0">
+                <a:solidFill>
+                  <a:srgbClr val="CCCCCC"/>
+                </a:solidFill>
+                <a:latin typeface="Courier New" pitchFamily="34" charset="0"/>
+                <a:ea typeface="Courier New" pitchFamily="34" charset="-122"/>
+                <a:cs typeface="Courier New" pitchFamily="34" charset="-120"/>
+              </a:rPr>
+              <a:t> </a:t>
+            </a:r>
+            <a:r>
+              <a:rPr lang="en-US" sz="900" dirty="0">
+                <a:solidFill>
+                  <a:srgbClr val="4EC9B0"/>
+                </a:solidFill>
+                <a:latin typeface="Courier New" pitchFamily="34" charset="0"/>
+                <a:ea typeface="Courier New" pitchFamily="34" charset="-122"/>
+                <a:cs typeface="Courier New" pitchFamily="34" charset="-120"/>
+              </a:rPr>
+              <a:t>cx_http_dest_provider_error</a:t>
+            </a:r>
+            <a:r>
+              <a:rPr lang="en-US" sz="900" dirty="0">
+                <a:solidFill>
+                  <a:srgbClr val="CCCCCC"/>
+                </a:solidFill>
+                <a:latin typeface="Courier New" pitchFamily="34" charset="0"/>
+                <a:ea typeface="Courier New" pitchFamily="34" charset="-122"/>
+                <a:cs typeface="Courier New" pitchFamily="34" charset="-120"/>
+              </a:rPr>
+              <a:t> </a:t>
+            </a:r>
+            <a:r>
+              <a:rPr lang="en-US" sz="900" dirty="0">
+                <a:solidFill>
+                  <a:srgbClr val="4EC9B0"/>
+                </a:solidFill>
+                <a:latin typeface="Courier New" pitchFamily="34" charset="0"/>
+                <a:ea typeface="Courier New" pitchFamily="34" charset="-122"/>
+                <a:cs typeface="Courier New" pitchFamily="34" charset="-120"/>
+              </a:rPr>
+              <a:t>cx_web_http_client_error</a:t>
+            </a:r>
+            <a:endParaRPr lang="en-US" sz="900" dirty="0"/>
+          </a:p>
+          <a:p>
+            <a:pPr indent="0" marL="0">
+              <a:lnSpc>
+                <a:spcPct val="105000"/>
+              </a:lnSpc>
+              <a:buNone/>
+            </a:pPr>
+            <a:r>
+              <a:rPr lang="en-US" sz="900" dirty="0">
+                <a:solidFill>
+                  <a:srgbClr val="CCCCCC"/>
+                </a:solidFill>
+                <a:latin typeface="Courier New" pitchFamily="34" charset="0"/>
+                <a:ea typeface="Courier New" pitchFamily="34" charset="-122"/>
+                <a:cs typeface="Courier New" pitchFamily="34" charset="-120"/>
+              </a:rPr>
+              <a:t>        </a:t>
+            </a:r>
+            <a:r>
+              <a:rPr lang="en-US" sz="900" dirty="0">
+                <a:solidFill>
+                  <a:srgbClr val="4EC9B0"/>
+                </a:solidFill>
+                <a:latin typeface="Courier New" pitchFamily="34" charset="0"/>
+                <a:ea typeface="Courier New" pitchFamily="34" charset="-122"/>
+                <a:cs typeface="Courier New" pitchFamily="34" charset="-120"/>
+              </a:rPr>
+              <a:t>cx_web_message_error</a:t>
+            </a:r>
+            <a:r>
+              <a:rPr lang="en-US" sz="900" dirty="0">
+                <a:solidFill>
+                  <a:srgbClr val="CCCCCC"/>
+                </a:solidFill>
+                <a:latin typeface="Courier New" pitchFamily="34" charset="0"/>
+                <a:ea typeface="Courier New" pitchFamily="34" charset="-122"/>
+                <a:cs typeface="Courier New" pitchFamily="34" charset="-120"/>
+              </a:rPr>
+              <a:t>.</a:t>
+            </a:r>
+            <a:endParaRPr lang="en-US" sz="900" dirty="0"/>
+          </a:p>
+          <a:p>
+            <a:pPr indent="0" marL="0">
+              <a:lnSpc>
+                <a:spcPct val="105000"/>
+              </a:lnSpc>
+              <a:buNone/>
+            </a:pPr>
+            <a:r>
+              <a:rPr lang="en-US" sz="900" dirty="0">
+                <a:solidFill>
+                  <a:srgbClr val="CCCCCC"/>
+                </a:solidFill>
+                <a:latin typeface="Courier New" pitchFamily="34" charset="0"/>
+                <a:ea typeface="Courier New" pitchFamily="34" charset="-122"/>
+                <a:cs typeface="Courier New" pitchFamily="34" charset="-120"/>
+              </a:rPr>
+              <a:t>    </a:t>
+            </a:r>
+            <a:r>
+              <a:rPr lang="en-US" sz="900" dirty="0">
+                <a:solidFill>
+                  <a:srgbClr val="CCCCCC"/>
+                </a:solidFill>
+                <a:latin typeface="Courier New" pitchFamily="34" charset="0"/>
+                <a:ea typeface="Courier New" pitchFamily="34" charset="-122"/>
+                <a:cs typeface="Courier New" pitchFamily="34" charset="-120"/>
+              </a:rPr>
+              <a:t>rs_resultado-indisponivel</a:t>
+            </a:r>
+            <a:r>
+              <a:rPr lang="en-US" sz="900" dirty="0">
+                <a:solidFill>
+                  <a:srgbClr val="CCCCCC"/>
+                </a:solidFill>
+                <a:latin typeface="Courier New" pitchFamily="34" charset="0"/>
+                <a:ea typeface="Courier New" pitchFamily="34" charset="-122"/>
+                <a:cs typeface="Courier New" pitchFamily="34" charset="-120"/>
+              </a:rPr>
+              <a:t> </a:t>
+            </a:r>
+            <a:r>
+              <a:rPr lang="en-US" sz="900" dirty="0">
+                <a:solidFill>
+                  <a:srgbClr val="CCCCCC"/>
+                </a:solidFill>
+                <a:latin typeface="Courier New" pitchFamily="34" charset="0"/>
+                <a:ea typeface="Courier New" pitchFamily="34" charset="-122"/>
+                <a:cs typeface="Courier New" pitchFamily="34" charset="-120"/>
+              </a:rPr>
+              <a:t>=</a:t>
+            </a:r>
+            <a:r>
+              <a:rPr lang="en-US" sz="900" dirty="0">
+                <a:solidFill>
+                  <a:srgbClr val="CCCCCC"/>
+                </a:solidFill>
+                <a:latin typeface="Courier New" pitchFamily="34" charset="0"/>
+                <a:ea typeface="Courier New" pitchFamily="34" charset="-122"/>
+                <a:cs typeface="Courier New" pitchFamily="34" charset="-120"/>
+              </a:rPr>
+              <a:t> </a:t>
+            </a:r>
+            <a:r>
+              <a:rPr lang="en-US" sz="900" dirty="0">
+                <a:solidFill>
+                  <a:srgbClr val="CCCCCC"/>
+                </a:solidFill>
+                <a:latin typeface="Courier New" pitchFamily="34" charset="0"/>
+                <a:ea typeface="Courier New" pitchFamily="34" charset="-122"/>
+                <a:cs typeface="Courier New" pitchFamily="34" charset="-120"/>
+              </a:rPr>
+              <a:t>abap_true</a:t>
+            </a:r>
+            <a:r>
+              <a:rPr lang="en-US" sz="900" dirty="0">
+                <a:solidFill>
+                  <a:srgbClr val="CCCCCC"/>
+                </a:solidFill>
+                <a:latin typeface="Courier New" pitchFamily="34" charset="0"/>
+                <a:ea typeface="Courier New" pitchFamily="34" charset="-122"/>
+                <a:cs typeface="Courier New" pitchFamily="34" charset="-120"/>
+              </a:rPr>
+              <a:t>.</a:t>
+            </a:r>
+            <a:endParaRPr lang="en-US" sz="900" dirty="0"/>
+          </a:p>
+          <a:p>
+            <a:pPr indent="0" marL="0">
+              <a:lnSpc>
+                <a:spcPct val="105000"/>
+              </a:lnSpc>
+              <a:buNone/>
+            </a:pPr>
+            <a:r>
+              <a:rPr lang="en-US" sz="900" dirty="0">
+                <a:solidFill>
+                  <a:srgbClr val="569CD6"/>
+                </a:solidFill>
+                <a:latin typeface="Courier New" pitchFamily="34" charset="0"/>
+                <a:ea typeface="Courier New" pitchFamily="34" charset="-122"/>
+                <a:cs typeface="Courier New" pitchFamily="34" charset="-120"/>
+              </a:rPr>
+              <a:t>ENDTRY</a:t>
+            </a:r>
+            <a:r>
+              <a:rPr lang="en-US" sz="900" dirty="0">
+                <a:solidFill>
+                  <a:srgbClr val="CCCCCC"/>
+                </a:solidFill>
+                <a:latin typeface="Courier New" pitchFamily="34" charset="0"/>
+                <a:ea typeface="Courier New" pitchFamily="34" charset="-122"/>
+                <a:cs typeface="Courier New" pitchFamily="34" charset="-120"/>
+              </a:rPr>
+              <a:t>.</a:t>
+            </a:r>
+            <a:endParaRPr lang="en-US" sz="900" dirty="0"/>
+          </a:p>
+          <a:p>
+            <a:pPr indent="0" marL="0">
+              <a:lnSpc>
+                <a:spcPct val="105000"/>
+              </a:lnSpc>
+              <a:buNone/>
+            </a:pPr>
+            <a:r>
+              <a:rPr lang="en-US" sz="900" dirty="0">
+                <a:solidFill>
+                  <a:srgbClr val="000000"/>
+                </a:solidFill>
+                <a:latin typeface="Courier New" pitchFamily="34" charset="0"/>
+                <a:ea typeface="Courier New" pitchFamily="34" charset="-122"/>
+                <a:cs typeface="Courier New" pitchFamily="34" charset="-120"/>
+              </a:rPr>
+              <a:t> </a:t>
+            </a:r>
+            <a:endParaRPr lang="en-US" sz="900" dirty="0"/>
+          </a:p>
+          <a:p>
+            <a:pPr indent="0" marL="0">
+              <a:lnSpc>
+                <a:spcPct val="105000"/>
+              </a:lnSpc>
+              <a:buNone/>
+            </a:pPr>
+            <a:r>
+              <a:rPr lang="en-US" sz="900" i="1" dirty="0">
+                <a:solidFill>
+                  <a:srgbClr val="6A9955"/>
+                </a:solidFill>
+                <a:latin typeface="Courier New" pitchFamily="34" charset="0"/>
+                <a:ea typeface="Courier New" pitchFamily="34" charset="-122"/>
+                <a:cs typeface="Courier New" pitchFamily="34" charset="-120"/>
+              </a:rPr>
+              <a:t>" /UI2/CL_JSON não tem contrato C1: o JSON plano é lido com PCRE.</a:t>
+            </a:r>
+            <a:endParaRPr lang="en-US" sz="900" dirty="0"/>
+          </a:p>
+          <a:p>
+            <a:pPr indent="0" marL="0">
+              <a:lnSpc>
+                <a:spcPct val="105000"/>
+              </a:lnSpc>
+              <a:buNone/>
+            </a:pPr>
+            <a:r>
+              <a:rPr lang="en-US" sz="900" i="1" dirty="0">
+                <a:solidFill>
+                  <a:srgbClr val="6A9955"/>
+                </a:solidFill>
+                <a:latin typeface="Courier New" pitchFamily="34" charset="0"/>
+                <a:ea typeface="Courier New" pitchFamily="34" charset="-122"/>
+                <a:cs typeface="Courier New" pitchFamily="34" charset="-120"/>
+              </a:rPr>
+              <a:t>" Alternativa liberada, se existir no release:</a:t>
+            </a:r>
+            <a:endParaRPr lang="en-US" sz="900" dirty="0"/>
+          </a:p>
+          <a:p>
+            <a:pPr indent="0" marL="0">
+              <a:lnSpc>
+                <a:spcPct val="105000"/>
+              </a:lnSpc>
+              <a:buNone/>
+            </a:pPr>
+            <a:r>
+              <a:rPr lang="en-US" sz="900" i="1" dirty="0">
+                <a:solidFill>
+                  <a:srgbClr val="6A9955"/>
+                </a:solidFill>
+                <a:latin typeface="Courier New" pitchFamily="34" charset="0"/>
+                <a:ea typeface="Courier New" pitchFamily="34" charset="-122"/>
+                <a:cs typeface="Courier New" pitchFamily="34" charset="-120"/>
+              </a:rPr>
+              <a:t>" xco_cp_json=&gt;data-&gt;from_string( lv_json )-&gt;write_to( REF #( ls_end ) ).</a:t>
+            </a:r>
+            <a:endParaRPr lang="en-US" sz="900" dirty="0"/>
+          </a:p>
+        </p:txBody>
+      </p:sp>
+      <p:sp>
+        <p:nvSpPr>
+          <p:cNvPr id="12" name="Shape 10"/>
+          <p:cNvSpPr/>
+          <p:nvPr/>
+        </p:nvSpPr>
+        <p:spPr>
+          <a:xfrm>
+            <a:off x="7452360" y="1645920"/>
+            <a:ext cx="4190695" cy="4526280"/>
+          </a:xfrm>
+          <a:prstGeom prst="roundRect">
+            <a:avLst>
+              <a:gd name="adj" fmla="val 2182"/>
+            </a:avLst>
+          </a:prstGeom>
+          <a:solidFill>
+            <a:srgbClr val="FFFFFF"/>
+          </a:solidFill>
+          <a:ln w="9525">
+            <a:solidFill>
+              <a:srgbClr val="E5E5E5"/>
+            </a:solidFill>
+            <a:prstDash val="solid"/>
+          </a:ln>
+          <a:effectLst>
+            <a:outerShdw sx="100000" sy="100000" kx="0" ky="0" algn="bl" rotWithShape="0" blurRad="63500" dist="12700" dir="5400000">
+              <a:srgbClr val="1D2D3E">
+                <a:alpha val="8000"/>
+              </a:srgbClr>
+            </a:outerShdw>
+          </a:effectLst>
+        </p:spPr>
+      </p:sp>
+      <p:sp>
+        <p:nvSpPr>
+          <p:cNvPr id="13" name="Shape 11"/>
+          <p:cNvSpPr/>
+          <p:nvPr/>
+        </p:nvSpPr>
+        <p:spPr>
+          <a:xfrm>
+            <a:off x="7653528" y="1874520"/>
+            <a:ext cx="310896" cy="310896"/>
+          </a:xfrm>
+          <a:prstGeom prst="ellipse">
+            <a:avLst/>
+          </a:prstGeom>
+          <a:solidFill>
+            <a:srgbClr val="E1F4FF"/>
+          </a:solidFill>
+          <a:ln/>
+        </p:spPr>
+      </p:sp>
+      <p:sp>
+        <p:nvSpPr>
+          <p:cNvPr id="14" name="Text 12"/>
           <p:cNvSpPr txBox="1"/>
           <p:nvPr/>
         </p:nvSpPr>
         <p:spPr>
           <a:xfrm>
-            <a:off x="731520" y="3703320"/>
-            <a:ext cx="6583680" cy="1463040"/>
+            <a:off x="7653528" y="1874520"/>
+            <a:ext cx="310896" cy="310896"/>
+          </a:xfrm>
+          <a:prstGeom prst="rect">
+            <a:avLst/>
+          </a:prstGeom>
+          <a:noFill/>
+          <a:ln/>
+        </p:spPr>
+        <p:txBody>
+          <a:bodyPr wrap="square" lIns="0" tIns="0" rIns="0" bIns="0" rtlCol="0" anchor="ctr"/>
+          <a:lstStyle/>
+          <a:p>
+            <a:pPr algn="ctr" indent="0" marL="0">
+              <a:buNone/>
+            </a:pPr>
+            <a:r>
+              <a:rPr lang="en-US" sz="1020" b="1" dirty="0">
+                <a:solidFill>
+                  <a:srgbClr val="0064D9"/>
+                </a:solidFill>
+              </a:rPr>
+              <a:t>1</a:t>
+            </a:r>
+            <a:endParaRPr lang="en-US" sz="1020" dirty="0"/>
+          </a:p>
+        </p:txBody>
+      </p:sp>
+      <p:sp>
+        <p:nvSpPr>
+          <p:cNvPr id="15" name="Text 13"/>
+          <p:cNvSpPr txBox="1"/>
+          <p:nvPr/>
+        </p:nvSpPr>
+        <p:spPr>
+          <a:xfrm>
+            <a:off x="8092440" y="1856232"/>
+            <a:ext cx="3367735" cy="994410"/>
           </a:xfrm>
           <a:prstGeom prst="rect">
             <a:avLst/>
@@ -6743,68 +8684,114 @@
           <a:lstStyle/>
           <a:p>
             <a:pPr indent="0" marL="0">
-              <a:buNone/>
-            </a:pPr>
-            <a:r>
-              <a:rPr lang="en-US" sz="1600" dirty="0">
-                <a:solidFill>
-                  <a:srgbClr val="D1EFFF"/>
-                </a:solidFill>
-              </a:rPr>
-              <a:t>A SAP garante a estabilidade das </a:t>
-            </a:r>
-            <a:r>
-              <a:rPr lang="en-US" sz="1600" b="1" dirty="0">
-                <a:solidFill>
-                  <a:srgbClr val="D1EFFF"/>
-                </a:solidFill>
-              </a:rPr>
-              <a:t>interfaces públicas liberadas</a:t>
-            </a:r>
-            <a:r>
-              <a:rPr lang="en-US" sz="1600" dirty="0">
-                <a:solidFill>
-                  <a:srgbClr val="D1EFFF"/>
-                </a:solidFill>
-              </a:rPr>
-              <a:t>; o cliente se compromete a usar só elas. Syntax check e ATC fazem a regra valer.</a:t>
+              <a:spcAft>
+                <a:spcPts val="300"/>
+              </a:spcAft>
+              <a:buNone/>
+            </a:pPr>
+            <a:r>
+              <a:rPr lang="en-US" sz="1250" b="1" dirty="0">
+                <a:solidFill>
+                  <a:srgbClr val="1D2D3E"/>
+                </a:solidFill>
+              </a:rPr>
+              <a:t>Destino liberado</a:t>
             </a:r>
             <a:endParaRPr lang="en-US" sz="1400" dirty="0"/>
           </a:p>
-        </p:txBody>
-      </p:sp>
-      <p:sp>
-        <p:nvSpPr>
-          <p:cNvPr id="6" name="Shape 4"/>
+          <a:p>
+            <a:pPr indent="0" marL="0">
+              <a:buNone/>
+            </a:pPr>
+            <a:r>
+              <a:rPr lang="en-US" sz="1050" dirty="0">
+                <a:solidFill>
+                  <a:srgbClr val="0064D9"/>
+                </a:solidFill>
+                <a:latin typeface="Courier New" pitchFamily="34" charset="0"/>
+                <a:ea typeface="Courier New" pitchFamily="34" charset="-122"/>
+                <a:cs typeface="Courier New" pitchFamily="34" charset="-120"/>
+              </a:rPr>
+              <a:t>cl_http_destination_provider</a:t>
+            </a:r>
+            <a:r>
+              <a:rPr lang="en-US" sz="1050" dirty="0">
+                <a:solidFill>
+                  <a:srgbClr val="556B82"/>
+                </a:solidFill>
+              </a:rPr>
+              <a:t> cria o destino; no Trial, direto pela URL pública.</a:t>
+            </a:r>
+            <a:endParaRPr lang="en-US" sz="1400" dirty="0"/>
+          </a:p>
+        </p:txBody>
+      </p:sp>
+      <p:sp>
+        <p:nvSpPr>
+          <p:cNvPr id="16" name="Shape 14"/>
           <p:cNvSpPr/>
           <p:nvPr/>
         </p:nvSpPr>
         <p:spPr>
           <a:xfrm>
-            <a:off x="8001000" y="1463040"/>
-            <a:ext cx="3611880" cy="2221992"/>
-          </a:xfrm>
-          <a:prstGeom prst="roundRect">
-            <a:avLst>
-              <a:gd name="adj" fmla="val 4115"/>
-            </a:avLst>
+            <a:off x="7653528" y="2914650"/>
+            <a:ext cx="310896" cy="310896"/>
+          </a:xfrm>
+          <a:prstGeom prst="ellipse">
+            <a:avLst/>
           </a:prstGeom>
           <a:solidFill>
-            <a:srgbClr val="1B3A7A"/>
+            <a:srgbClr val="E1F4FF"/>
           </a:solidFill>
           <a:ln/>
         </p:spPr>
       </p:sp>
       <p:sp>
         <p:nvSpPr>
-          <p:cNvPr id="7" name="Text 5"/>
+          <p:cNvPr id="17" name="Text 15"/>
           <p:cNvSpPr txBox="1"/>
           <p:nvPr/>
         </p:nvSpPr>
         <p:spPr>
           <a:xfrm>
-            <a:off x="8229600" y="1645920"/>
-            <a:ext cx="3200400" cy="274320"/>
+            <a:off x="7653528" y="2914650"/>
+            <a:ext cx="310896" cy="310896"/>
+          </a:xfrm>
+          <a:prstGeom prst="rect">
+            <a:avLst/>
+          </a:prstGeom>
+          <a:noFill/>
+          <a:ln/>
+        </p:spPr>
+        <p:txBody>
+          <a:bodyPr wrap="square" lIns="0" tIns="0" rIns="0" bIns="0" rtlCol="0" anchor="ctr"/>
+          <a:lstStyle/>
+          <a:p>
+            <a:pPr algn="ctr" indent="0" marL="0">
+              <a:buNone/>
+            </a:pPr>
+            <a:r>
+              <a:rPr lang="en-US" sz="1020" b="1" dirty="0">
+                <a:solidFill>
+                  <a:srgbClr val="0064D9"/>
+                </a:solidFill>
+              </a:rPr>
+              <a:t>2</a:t>
+            </a:r>
+            <a:endParaRPr lang="en-US" sz="1020" dirty="0"/>
+          </a:p>
+        </p:txBody>
+      </p:sp>
+      <p:sp>
+        <p:nvSpPr>
+          <p:cNvPr id="18" name="Text 16"/>
+          <p:cNvSpPr txBox="1"/>
+          <p:nvPr/>
+        </p:nvSpPr>
+        <p:spPr>
+          <a:xfrm>
+            <a:off x="8092440" y="2896362"/>
+            <a:ext cx="3367735" cy="994410"/>
           </a:xfrm>
           <a:prstGeom prst="rect">
             <a:avLst/>
@@ -6817,30 +8804,78 @@
           <a:lstStyle/>
           <a:p>
             <a:pPr indent="0" marL="0">
-              <a:buNone/>
-            </a:pPr>
-            <a:r>
-              <a:rPr lang="en-US" sz="1050" b="1" spc="150" kern="0" dirty="0">
-                <a:solidFill>
-                  <a:srgbClr val="89D1FF"/>
-                </a:solidFill>
-              </a:rPr>
-              <a:t>NESTA SEÇÃO</a:t>
-            </a:r>
-            <a:endParaRPr lang="en-US" sz="1050" dirty="0"/>
-          </a:p>
-        </p:txBody>
-      </p:sp>
-      <p:sp>
-        <p:nvSpPr>
-          <p:cNvPr id="8" name="Text 6"/>
+              <a:spcAft>
+                <a:spcPts val="300"/>
+              </a:spcAft>
+              <a:buNone/>
+            </a:pPr>
+            <a:r>
+              <a:rPr lang="en-US" sz="1250" b="1" dirty="0">
+                <a:solidFill>
+                  <a:srgbClr val="1D2D3E"/>
+                </a:solidFill>
+              </a:rPr>
+              <a:t>Produção</a:t>
+            </a:r>
+            <a:endParaRPr lang="en-US" sz="1400" dirty="0"/>
+          </a:p>
+          <a:p>
+            <a:pPr indent="0" marL="0">
+              <a:buNone/>
+            </a:pPr>
+            <a:r>
+              <a:rPr lang="en-US" sz="1050" dirty="0">
+                <a:solidFill>
+                  <a:srgbClr val="0064D9"/>
+                </a:solidFill>
+                <a:latin typeface="Courier New" pitchFamily="34" charset="0"/>
+                <a:ea typeface="Courier New" pitchFamily="34" charset="-122"/>
+                <a:cs typeface="Courier New" pitchFamily="34" charset="-120"/>
+              </a:rPr>
+              <a:t>create_by_comm_arrangement</a:t>
+            </a:r>
+            <a:r>
+              <a:rPr lang="en-US" sz="1050" dirty="0">
+                <a:solidFill>
+                  <a:srgbClr val="556B82"/>
+                </a:solidFill>
+              </a:rPr>
+              <a:t>: Communication Scenario, Outbound Service e Arrangement.</a:t>
+            </a:r>
+            <a:endParaRPr lang="en-US" sz="1400" dirty="0"/>
+          </a:p>
+        </p:txBody>
+      </p:sp>
+      <p:sp>
+        <p:nvSpPr>
+          <p:cNvPr id="19" name="Shape 17"/>
+          <p:cNvSpPr/>
+          <p:nvPr/>
+        </p:nvSpPr>
+        <p:spPr>
+          <a:xfrm>
+            <a:off x="7653528" y="3954780"/>
+            <a:ext cx="310896" cy="310896"/>
+          </a:xfrm>
+          <a:prstGeom prst="ellipse">
+            <a:avLst/>
+          </a:prstGeom>
+          <a:solidFill>
+            <a:srgbClr val="E1F4FF"/>
+          </a:solidFill>
+          <a:ln/>
+        </p:spPr>
+      </p:sp>
+      <p:sp>
+        <p:nvSpPr>
+          <p:cNvPr id="20" name="Text 18"/>
           <p:cNvSpPr txBox="1"/>
           <p:nvPr/>
         </p:nvSpPr>
         <p:spPr>
           <a:xfrm>
-            <a:off x="8229600" y="2029968"/>
-            <a:ext cx="3246120" cy="329184"/>
+            <a:off x="7653528" y="3954780"/>
+            <a:ext cx="310896" cy="310896"/>
           </a:xfrm>
           <a:prstGeom prst="rect">
             <a:avLst/>
@@ -6852,42 +8887,134 @@
           <a:bodyPr wrap="square" lIns="0" tIns="0" rIns="0" bIns="0" rtlCol="0" anchor="ctr"/>
           <a:lstStyle/>
           <a:p>
+            <a:pPr algn="ctr" indent="0" marL="0">
+              <a:buNone/>
+            </a:pPr>
+            <a:r>
+              <a:rPr lang="en-US" sz="1020" b="1" dirty="0">
+                <a:solidFill>
+                  <a:srgbClr val="0064D9"/>
+                </a:solidFill>
+              </a:rPr>
+              <a:t>3</a:t>
+            </a:r>
+            <a:endParaRPr lang="en-US" sz="1020" dirty="0"/>
+          </a:p>
+        </p:txBody>
+      </p:sp>
+      <p:sp>
+        <p:nvSpPr>
+          <p:cNvPr id="21" name="Text 19"/>
+          <p:cNvSpPr txBox="1"/>
+          <p:nvPr/>
+        </p:nvSpPr>
+        <p:spPr>
+          <a:xfrm>
+            <a:off x="8092440" y="3936492"/>
+            <a:ext cx="3367735" cy="994410"/>
+          </a:xfrm>
+          <a:prstGeom prst="rect">
+            <a:avLst/>
+          </a:prstGeom>
+          <a:noFill/>
+          <a:ln/>
+        </p:spPr>
+        <p:txBody>
+          <a:bodyPr wrap="square" lIns="0" tIns="0" rIns="0" bIns="0" rtlCol="0" anchor="t"/>
+          <a:lstStyle/>
+          <a:p>
             <a:pPr indent="0" marL="0">
-              <a:buNone/>
-            </a:pPr>
-            <a:r>
-              <a:rPr lang="en-US" sz="1000" b="1" dirty="0">
-                <a:solidFill>
-                  <a:srgbClr val="FFFFFF"/>
-                </a:solidFill>
-                <a:latin typeface="Courier New" pitchFamily="34" charset="0"/>
-                <a:ea typeface="Courier New" pitchFamily="34" charset="-122"/>
-                <a:cs typeface="Courier New" pitchFamily="34" charset="-120"/>
-              </a:rPr>
-              <a:t>Local APIs</a:t>
-            </a:r>
-            <a:r>
-              <a:rPr lang="en-US" sz="1000" dirty="0">
-                <a:solidFill>
-                  <a:srgbClr val="D1EFFF"/>
-                </a:solidFill>
-              </a:rPr>
-              <a:t>  classes · CDS</a:t>
+              <a:spcAft>
+                <a:spcPts val="300"/>
+              </a:spcAft>
+              <a:buNone/>
+            </a:pPr>
+            <a:r>
+              <a:rPr lang="en-US" sz="1250" b="1" dirty="0">
+                <a:solidFill>
+                  <a:srgbClr val="1D2D3E"/>
+                </a:solidFill>
+              </a:rPr>
+              <a:t>Cliente HTTP</a:t>
             </a:r>
             <a:endParaRPr lang="en-US" sz="1400" dirty="0"/>
           </a:p>
-        </p:txBody>
-      </p:sp>
-      <p:sp>
-        <p:nvSpPr>
-          <p:cNvPr id="9" name="Text 7"/>
+          <a:p>
+            <a:pPr indent="0" marL="0">
+              <a:buNone/>
+            </a:pPr>
+            <a:r>
+              <a:rPr lang="en-US" sz="1050" dirty="0">
+                <a:solidFill>
+                  <a:srgbClr val="0064D9"/>
+                </a:solidFill>
+                <a:latin typeface="Courier New" pitchFamily="34" charset="0"/>
+                <a:ea typeface="Courier New" pitchFamily="34" charset="-122"/>
+                <a:cs typeface="Courier New" pitchFamily="34" charset="-120"/>
+              </a:rPr>
+              <a:t>cl_web_http_client_manager</a:t>
+            </a:r>
+            <a:r>
+              <a:rPr lang="en-US" sz="1050" dirty="0">
+                <a:solidFill>
+                  <a:srgbClr val="556B82"/>
+                </a:solidFill>
+              </a:rPr>
+              <a:t> e </a:t>
+            </a:r>
+            <a:r>
+              <a:rPr lang="en-US" sz="1050" dirty="0">
+                <a:solidFill>
+                  <a:srgbClr val="0064D9"/>
+                </a:solidFill>
+                <a:latin typeface="Courier New" pitchFamily="34" charset="0"/>
+                <a:ea typeface="Courier New" pitchFamily="34" charset="-122"/>
+                <a:cs typeface="Courier New" pitchFamily="34" charset="-120"/>
+              </a:rPr>
+              <a:t>if_web_http_client</a:t>
+            </a:r>
+            <a:r>
+              <a:rPr lang="en-US" sz="1050" dirty="0">
+                <a:solidFill>
+                  <a:srgbClr val="556B82"/>
+                </a:solidFill>
+              </a:rPr>
+              <a:t> são APIs liberadas para a nuvem.</a:t>
+            </a:r>
+            <a:endParaRPr lang="en-US" sz="1400" dirty="0"/>
+          </a:p>
+        </p:txBody>
+      </p:sp>
+      <p:sp>
+        <p:nvSpPr>
+          <p:cNvPr id="22" name="Shape 20"/>
+          <p:cNvSpPr/>
+          <p:nvPr/>
+        </p:nvSpPr>
+        <p:spPr>
+          <a:xfrm>
+            <a:off x="7653528" y="4994910"/>
+            <a:ext cx="310896" cy="310896"/>
+          </a:xfrm>
+          <a:prstGeom prst="ellipse">
+            <a:avLst/>
+          </a:prstGeom>
+          <a:solidFill>
+            <a:srgbClr val="E1F4FF"/>
+          </a:solidFill>
+          <a:ln/>
+        </p:spPr>
+      </p:sp>
+      <p:sp>
+        <p:nvSpPr>
+          <p:cNvPr id="23" name="Text 21"/>
           <p:cNvSpPr txBox="1"/>
           <p:nvPr/>
         </p:nvSpPr>
         <p:spPr>
           <a:xfrm>
-            <a:off x="8229600" y="2414016"/>
-            <a:ext cx="3246120" cy="329184"/>
+            <a:off x="7653528" y="4994910"/>
+            <a:ext cx="310896" cy="310896"/>
           </a:xfrm>
           <a:prstGeom prst="rect">
             <a:avLst/>
@@ -6899,74 +9026,88 @@
           <a:bodyPr wrap="square" lIns="0" tIns="0" rIns="0" bIns="0" rtlCol="0" anchor="ctr"/>
           <a:lstStyle/>
           <a:p>
+            <a:pPr algn="ctr" indent="0" marL="0">
+              <a:buNone/>
+            </a:pPr>
+            <a:r>
+              <a:rPr lang="en-US" sz="1020" b="1" dirty="0">
+                <a:solidFill>
+                  <a:srgbClr val="0064D9"/>
+                </a:solidFill>
+              </a:rPr>
+              <a:t>4</a:t>
+            </a:r>
+            <a:endParaRPr lang="en-US" sz="1020" dirty="0"/>
+          </a:p>
+        </p:txBody>
+      </p:sp>
+      <p:sp>
+        <p:nvSpPr>
+          <p:cNvPr id="24" name="Text 22"/>
+          <p:cNvSpPr txBox="1"/>
+          <p:nvPr/>
+        </p:nvSpPr>
+        <p:spPr>
+          <a:xfrm>
+            <a:off x="8092440" y="4976622"/>
+            <a:ext cx="3367735" cy="994410"/>
+          </a:xfrm>
+          <a:prstGeom prst="rect">
+            <a:avLst/>
+          </a:prstGeom>
+          <a:noFill/>
+          <a:ln/>
+        </p:spPr>
+        <p:txBody>
+          <a:bodyPr wrap="square" lIns="0" tIns="0" rIns="0" bIns="0" rtlCol="0" anchor="t"/>
+          <a:lstStyle/>
+          <a:p>
             <a:pPr indent="0" marL="0">
-              <a:buNone/>
-            </a:pPr>
-            <a:r>
-              <a:rPr lang="en-US" sz="1000" b="1" dirty="0">
-                <a:solidFill>
-                  <a:srgbClr val="FFFFFF"/>
-                </a:solidFill>
-                <a:latin typeface="Courier New" pitchFamily="34" charset="0"/>
-                <a:ea typeface="Courier New" pitchFamily="34" charset="-122"/>
-                <a:cs typeface="Courier New" pitchFamily="34" charset="-120"/>
-              </a:rPr>
-              <a:t>Remote APIs</a:t>
-            </a:r>
-            <a:r>
-              <a:rPr lang="en-US" sz="1000" dirty="0">
-                <a:solidFill>
-                  <a:srgbClr val="D1EFFF"/>
-                </a:solidFill>
-              </a:rPr>
-              <a:t>  OData · SOAP</a:t>
+              <a:spcAft>
+                <a:spcPts val="300"/>
+              </a:spcAft>
+              <a:buNone/>
+            </a:pPr>
+            <a:r>
+              <a:rPr lang="en-US" sz="1250" b="1" dirty="0">
+                <a:solidFill>
+                  <a:srgbClr val="1D2D3E"/>
+                </a:solidFill>
+              </a:rPr>
+              <a:t>Sem atalhos</a:t>
             </a:r>
             <a:endParaRPr lang="en-US" sz="1400" dirty="0"/>
           </a:p>
-        </p:txBody>
-      </p:sp>
-      <p:sp>
-        <p:nvSpPr>
-          <p:cNvPr id="10" name="Text 8"/>
-          <p:cNvSpPr txBox="1"/>
-          <p:nvPr/>
-        </p:nvSpPr>
-        <p:spPr>
-          <a:xfrm>
-            <a:off x="8229600" y="2798064"/>
-            <a:ext cx="3246120" cy="329184"/>
-          </a:xfrm>
-          <a:prstGeom prst="rect">
-            <a:avLst/>
-          </a:prstGeom>
-          <a:noFill/>
-          <a:ln/>
-        </p:spPr>
-        <p:txBody>
-          <a:bodyPr wrap="square" lIns="0" tIns="0" rIns="0" bIns="0" rtlCol="0" anchor="ctr"/>
-          <a:lstStyle/>
           <a:p>
             <a:pPr indent="0" marL="0">
               <a:buNone/>
             </a:pPr>
             <a:r>
-              <a:rPr lang="en-US" sz="1000" b="1" dirty="0">
-                <a:solidFill>
-                  <a:srgbClr val="FFFFFF"/>
-                </a:solidFill>
-                <a:latin typeface="Courier New" pitchFamily="34" charset="0"/>
-                <a:ea typeface="Courier New" pitchFamily="34" charset="-122"/>
-                <a:cs typeface="Courier New" pitchFamily="34" charset="-120"/>
-              </a:rPr>
-              <a:t>Extension points</a:t>
-            </a:r>
-            <a:r>
-              <a:rPr lang="en-US" sz="1000" dirty="0">
-                <a:solidFill>
-                  <a:srgbClr val="D1EFFF"/>
-                </a:solidFill>
-              </a:rPr>
-              <a:t>  BAdIs · RAP</a:t>
+              <a:rPr lang="en-US" sz="1050" dirty="0">
+                <a:solidFill>
+                  <a:srgbClr val="556B82"/>
+                </a:solidFill>
+              </a:rPr>
+              <a:t>O compilador barra </a:t>
+            </a:r>
+            <a:r>
+              <a:rPr lang="en-US" sz="1050" dirty="0">
+                <a:solidFill>
+                  <a:srgbClr val="0064D9"/>
+                </a:solidFill>
+                <a:latin typeface="Courier New" pitchFamily="34" charset="0"/>
+                <a:ea typeface="Courier New" pitchFamily="34" charset="-122"/>
+                <a:cs typeface="Courier New" pitchFamily="34" charset="-120"/>
+              </a:rPr>
+              <a:t>/UI2/CL_JSON</a:t>
+            </a:r>
+            <a:r>
+              <a:rPr lang="en-US" sz="1050" dirty="0">
+                <a:solidFill>
+                  <a:srgbClr val="556B82"/>
+                </a:solidFill>
+              </a:rPr>
+              <a:t>: a classe usa regex ou XCO.</a:t>
             </a:r>
             <a:endParaRPr lang="en-US" sz="1400" dirty="0"/>
           </a:p>
@@ -6974,75 +9115,49 @@
       </p:sp>
       <p:sp>
         <p:nvSpPr>
-          <p:cNvPr id="11" name="Text 9"/>
-          <p:cNvSpPr txBox="1"/>
-          <p:nvPr/>
-        </p:nvSpPr>
-        <p:spPr>
-          <a:xfrm>
-            <a:off x="8229600" y="3182112"/>
-            <a:ext cx="3246120" cy="329184"/>
-          </a:xfrm>
-          <a:prstGeom prst="rect">
-            <a:avLst/>
-          </a:prstGeom>
-          <a:noFill/>
-          <a:ln/>
-        </p:spPr>
-        <p:txBody>
-          <a:bodyPr wrap="square" lIns="0" tIns="0" rIns="0" bIns="0" rtlCol="0" anchor="ctr"/>
-          <a:lstStyle/>
-          <a:p>
-            <a:pPr indent="0" marL="0">
-              <a:buNone/>
-            </a:pPr>
-            <a:r>
-              <a:rPr lang="en-US" sz="1000" b="1" dirty="0">
-                <a:solidFill>
-                  <a:srgbClr val="FFFFFF"/>
-                </a:solidFill>
-                <a:latin typeface="Courier New" pitchFamily="34" charset="0"/>
-                <a:ea typeface="Courier New" pitchFamily="34" charset="-122"/>
-                <a:cs typeface="Courier New" pitchFamily="34" charset="-120"/>
-              </a:rPr>
-              <a:t>Business Accelerator Hub</a:t>
-            </a:r>
-            <a:r>
-              <a:rPr lang="en-US" sz="1000" dirty="0">
-                <a:solidFill>
-                  <a:srgbClr val="D1EFFF"/>
-                </a:solidFill>
-              </a:rPr>
-              <a:t>  descoberta</a:t>
-            </a:r>
-            <a:endParaRPr lang="en-US" sz="1400" dirty="0"/>
-          </a:p>
-        </p:txBody>
-      </p:sp>
-      <p:pic>
-        <p:nvPicPr>
-          <p:cNvPr id="12" name="Image 0" descr="preencoded.png">    </p:cNvPr>
-          <p:cNvPicPr>
-            <a:picLocks noChangeAspect="1"/>
-          </p:cNvPicPr>
-          <p:nvPr/>
-        </p:nvPicPr>
-        <p:blipFill>
-          <a:blip r:embed="rId1"/>
-          <a:stretch>
-            <a:fillRect/>
-          </a:stretch>
-        </p:blipFill>
-        <p:spPr>
-          <a:xfrm>
-            <a:off x="896112" y="713232"/>
-            <a:ext cx="402336" cy="402336"/>
-          </a:xfrm>
-          <a:prstGeom prst="rect">
-            <a:avLst/>
-          </a:prstGeom>
-        </p:spPr>
-      </p:pic>
+          <p:cNvPr id="25" name="Slide Number Placeholder 0"/>
+          <p:cNvSpPr>
+            <a:spLocks noGrp="1"/>
+          </p:cNvSpPr>
+          <p:nvPr>
+            <p:ph type="sldNum" sz="quarter" idx="4294967295"/>
+          </p:nvPr>
+        </p:nvSpPr>
+        <p:spPr>
+          <a:xfrm>
+            <a:off x="11094415" y="6473952"/>
+            <a:ext cx="548640" cy="228600"/>
+          </a:xfrm>
+          <a:prstGeom prst="rect">
+            <a:avLst/>
+          </a:prstGeom>
+          <a:extLst>
+            <a:ext uri="{C572A759-6A51-4108-AA02-DFA0A04FC94B}">
+              <ma14:wrappingTextBoxFlag xmlns:ma14="http://schemas.microsoft.com/office/mac/drawingml/2011/main" val="0"/>
+            </a:ext>
+          </a:extLst>
+        </p:spPr>
+        <p:txBody>
+          <a:bodyPr lIns="0" tIns="0" rIns="0" bIns="0"/>
+          <a:lstStyle>
+            <a:lvl1pPr>
+              <a:defRPr sz="900">
+                <a:solidFill>
+                  <a:srgbClr val="556B82"/>
+                </a:solidFill>
+              </a:defRPr>
+            </a:lvl1pPr>
+          </a:lstStyle>
+          <a:p>
+            <a:pPr algn="r"/>
+            <a:fld id="{F7021451-1387-4CA6-816F-3879F97B5CBC}" type="slidenum">
+              <a:rPr b="0" lang="en-US"/>
+              <a:t>14</a:t>
+            </a:fld>
+            <a:endParaRPr lang="en-US"/>
+          </a:p>
+        </p:txBody>
+      </p:sp>
     </p:spTree>
   </p:cSld>
   <p:clrMapOvr>
@@ -7070,16 +9185,218 @@
       </p:grpSpPr>
       <p:sp>
         <p:nvSpPr>
-          <p:cNvPr id="2" name="Text 0"/>
+          <p:cNvPr id="2" name="Shape 0"/>
           <p:cNvSpPr/>
-          <p:nvPr>
-            <p:ph idx="100" type="body" hasCustomPrompt="1"/>
-          </p:nvPr>
-        </p:nvSpPr>
-        <p:spPr>
-          <a:xfrm>
-            <a:off x="548640" y="411480"/>
-            <a:ext cx="11094415" cy="274320"/>
+          <p:nvPr/>
+        </p:nvSpPr>
+        <p:spPr>
+          <a:xfrm>
+            <a:off x="731520" y="548640"/>
+            <a:ext cx="731520" cy="731520"/>
+          </a:xfrm>
+          <a:prstGeom prst="roundRect">
+            <a:avLst>
+              <a:gd name="adj" fmla="val 20000"/>
+            </a:avLst>
+          </a:prstGeom>
+          <a:solidFill>
+            <a:srgbClr val="1B3A7A"/>
+          </a:solidFill>
+          <a:ln/>
+        </p:spPr>
+      </p:sp>
+      <p:sp>
+        <p:nvSpPr>
+          <p:cNvPr id="3" name="Text 1"/>
+          <p:cNvSpPr txBox="1"/>
+          <p:nvPr/>
+        </p:nvSpPr>
+        <p:spPr>
+          <a:xfrm>
+            <a:off x="731520" y="1600200"/>
+            <a:ext cx="6766560" cy="320040"/>
+          </a:xfrm>
+          <a:prstGeom prst="rect">
+            <a:avLst/>
+          </a:prstGeom>
+          <a:noFill/>
+          <a:ln/>
+        </p:spPr>
+        <p:txBody>
+          <a:bodyPr wrap="square" lIns="0" tIns="0" rIns="0" bIns="0" rtlCol="0" anchor="t"/>
+          <a:lstStyle/>
+          <a:p>
+            <a:pPr indent="0" marL="0">
+              <a:buNone/>
+            </a:pPr>
+            <a:r>
+              <a:rPr lang="en-US" sz="1300" b="1" spc="200" kern="0" dirty="0">
+                <a:solidFill>
+                  <a:srgbClr val="89D1FF"/>
+                </a:solidFill>
+              </a:rPr>
+              <a:t>AULA 04.03 · SEÇÃO 4</a:t>
+            </a:r>
+            <a:endParaRPr lang="en-US" sz="1300" dirty="0"/>
+          </a:p>
+        </p:txBody>
+      </p:sp>
+      <p:sp>
+        <p:nvSpPr>
+          <p:cNvPr id="4" name="Text 2"/>
+          <p:cNvSpPr txBox="1"/>
+          <p:nvPr/>
+        </p:nvSpPr>
+        <p:spPr>
+          <a:xfrm>
+            <a:off x="731520" y="1965960"/>
+            <a:ext cx="6766560" cy="1600200"/>
+          </a:xfrm>
+          <a:prstGeom prst="rect">
+            <a:avLst/>
+          </a:prstGeom>
+          <a:noFill/>
+          <a:ln/>
+        </p:spPr>
+        <p:txBody>
+          <a:bodyPr wrap="square" lIns="0" tIns="0" rIns="0" bIns="0" rtlCol="0" anchor="t"/>
+          <a:lstStyle/>
+          <a:p>
+            <a:pPr indent="0" marL="0">
+              <a:buNone/>
+            </a:pPr>
+            <a:r>
+              <a:rPr lang="en-US" sz="3400" b="1" dirty="0">
+                <a:solidFill>
+                  <a:srgbClr val="FFFFFF"/>
+                </a:solidFill>
+              </a:rPr>
+              <a:t>Released APIs e serviços de reuso</a:t>
+            </a:r>
+            <a:endParaRPr lang="en-US" sz="3400" dirty="0"/>
+          </a:p>
+        </p:txBody>
+      </p:sp>
+      <p:sp>
+        <p:nvSpPr>
+          <p:cNvPr id="5" name="Text 3"/>
+          <p:cNvSpPr txBox="1"/>
+          <p:nvPr/>
+        </p:nvSpPr>
+        <p:spPr>
+          <a:xfrm>
+            <a:off x="731520" y="3703320"/>
+            <a:ext cx="6583680" cy="1463040"/>
+          </a:xfrm>
+          <a:prstGeom prst="rect">
+            <a:avLst/>
+          </a:prstGeom>
+          <a:noFill/>
+          <a:ln/>
+        </p:spPr>
+        <p:txBody>
+          <a:bodyPr wrap="square" lIns="0" tIns="0" rIns="0" bIns="0" rtlCol="0" anchor="t"/>
+          <a:lstStyle/>
+          <a:p>
+            <a:pPr indent="0" marL="0">
+              <a:buNone/>
+            </a:pPr>
+            <a:r>
+              <a:rPr lang="en-US" sz="1600" dirty="0">
+                <a:solidFill>
+                  <a:srgbClr val="D1EFFF"/>
+                </a:solidFill>
+              </a:rPr>
+              <a:t>A SAP garante a estabilidade das </a:t>
+            </a:r>
+            <a:r>
+              <a:rPr lang="en-US" sz="1600" b="1" dirty="0">
+                <a:solidFill>
+                  <a:srgbClr val="D1EFFF"/>
+                </a:solidFill>
+              </a:rPr>
+              <a:t>interfaces públicas liberadas</a:t>
+            </a:r>
+            <a:r>
+              <a:rPr lang="en-US" sz="1600" dirty="0">
+                <a:solidFill>
+                  <a:srgbClr val="D1EFFF"/>
+                </a:solidFill>
+              </a:rPr>
+              <a:t>; o cliente se compromete a usar só elas. Syntax check e ATC fazem a regra valer.</a:t>
+            </a:r>
+            <a:endParaRPr lang="en-US" sz="1400" dirty="0"/>
+          </a:p>
+        </p:txBody>
+      </p:sp>
+      <p:sp>
+        <p:nvSpPr>
+          <p:cNvPr id="6" name="Shape 4"/>
+          <p:cNvSpPr/>
+          <p:nvPr/>
+        </p:nvSpPr>
+        <p:spPr>
+          <a:xfrm>
+            <a:off x="8001000" y="1463040"/>
+            <a:ext cx="3611880" cy="2221992"/>
+          </a:xfrm>
+          <a:prstGeom prst="roundRect">
+            <a:avLst>
+              <a:gd name="adj" fmla="val 4115"/>
+            </a:avLst>
+          </a:prstGeom>
+          <a:solidFill>
+            <a:srgbClr val="1B3A7A"/>
+          </a:solidFill>
+          <a:ln/>
+        </p:spPr>
+      </p:sp>
+      <p:sp>
+        <p:nvSpPr>
+          <p:cNvPr id="7" name="Text 5"/>
+          <p:cNvSpPr txBox="1"/>
+          <p:nvPr/>
+        </p:nvSpPr>
+        <p:spPr>
+          <a:xfrm>
+            <a:off x="8229600" y="1645920"/>
+            <a:ext cx="3200400" cy="274320"/>
+          </a:xfrm>
+          <a:prstGeom prst="rect">
+            <a:avLst/>
+          </a:prstGeom>
+          <a:noFill/>
+          <a:ln/>
+        </p:spPr>
+        <p:txBody>
+          <a:bodyPr wrap="square" lIns="0" tIns="0" rIns="0" bIns="0" rtlCol="0" anchor="t"/>
+          <a:lstStyle/>
+          <a:p>
+            <a:pPr indent="0" marL="0">
+              <a:buNone/>
+            </a:pPr>
+            <a:r>
+              <a:rPr lang="en-US" sz="1050" b="1" spc="150" kern="0" dirty="0">
+                <a:solidFill>
+                  <a:srgbClr val="89D1FF"/>
+                </a:solidFill>
+              </a:rPr>
+              <a:t>NESTA SEÇÃO</a:t>
+            </a:r>
+            <a:endParaRPr lang="en-US" sz="1050" dirty="0"/>
+          </a:p>
+        </p:txBody>
+      </p:sp>
+      <p:sp>
+        <p:nvSpPr>
+          <p:cNvPr id="8" name="Text 6"/>
+          <p:cNvSpPr txBox="1"/>
+          <p:nvPr/>
+        </p:nvSpPr>
+        <p:spPr>
+          <a:xfrm>
+            <a:off x="8229600" y="2029968"/>
+            <a:ext cx="3246120" cy="329184"/>
           </a:xfrm>
           <a:prstGeom prst="rect">
             <a:avLst/>
@@ -7091,33 +9408,42 @@
           <a:bodyPr wrap="square" lIns="0" tIns="0" rIns="0" bIns="0" rtlCol="0" anchor="ctr"/>
           <a:lstStyle/>
           <a:p>
-            <a:pPr algn="l" indent="0" marL="0">
-              <a:buNone/>
-            </a:pPr>
-            <a:r>
-              <a:rPr lang="en-US" sz="1100" b="1" spc="150" kern="0" dirty="0">
-                <a:solidFill>
-                  <a:srgbClr val="0064D9"/>
-                </a:solidFill>
-              </a:rPr>
-              <a:t>APIS · TIPOS DE INTERFACE</a:t>
-            </a:r>
-            <a:endParaRPr lang="en-US" sz="1100" dirty="0"/>
-          </a:p>
-        </p:txBody>
-      </p:sp>
-      <p:sp>
-        <p:nvSpPr>
-          <p:cNvPr id="3" name="Text 0"/>
-          <p:cNvSpPr/>
-          <p:nvPr>
-            <p:ph idx="101" type="title" hasCustomPrompt="1"/>
-          </p:nvPr>
-        </p:nvSpPr>
-        <p:spPr>
-          <a:xfrm>
-            <a:off x="548640" y="731520"/>
-            <a:ext cx="11094415" cy="640080"/>
+            <a:pPr indent="0" marL="0">
+              <a:buNone/>
+            </a:pPr>
+            <a:r>
+              <a:rPr lang="en-US" sz="1000" b="1" dirty="0">
+                <a:solidFill>
+                  <a:srgbClr val="FFFFFF"/>
+                </a:solidFill>
+                <a:latin typeface="Courier New" pitchFamily="34" charset="0"/>
+                <a:ea typeface="Courier New" pitchFamily="34" charset="-122"/>
+                <a:cs typeface="Courier New" pitchFamily="34" charset="-120"/>
+              </a:rPr>
+              <a:t>Local APIs</a:t>
+            </a:r>
+            <a:r>
+              <a:rPr lang="en-US" sz="1000" dirty="0">
+                <a:solidFill>
+                  <a:srgbClr val="D1EFFF"/>
+                </a:solidFill>
+              </a:rPr>
+              <a:t>  classes · CDS</a:t>
+            </a:r>
+            <a:endParaRPr lang="en-US" sz="1400" dirty="0"/>
+          </a:p>
+        </p:txBody>
+      </p:sp>
+      <p:sp>
+        <p:nvSpPr>
+          <p:cNvPr id="9" name="Text 7"/>
+          <p:cNvSpPr txBox="1"/>
+          <p:nvPr/>
+        </p:nvSpPr>
+        <p:spPr>
+          <a:xfrm>
+            <a:off x="8229600" y="2414016"/>
+            <a:ext cx="3246120" cy="329184"/>
           </a:xfrm>
           <a:prstGeom prst="rect">
             <a:avLst/>
@@ -7129,415 +9455,42 @@
           <a:bodyPr wrap="square" lIns="0" tIns="0" rIns="0" bIns="0" rtlCol="0" anchor="ctr"/>
           <a:lstStyle/>
           <a:p>
-            <a:pPr algn="l" indent="0" marL="0">
-              <a:buNone/>
-            </a:pPr>
-            <a:r>
-              <a:rPr lang="en-US" sz="2800" b="1" dirty="0">
-                <a:solidFill>
-                  <a:srgbClr val="1D2D3E"/>
-                </a:solidFill>
-              </a:rPr>
-              <a:t>Três propósitos para as APIs liberadas</a:t>
-            </a:r>
-            <a:endParaRPr lang="en-US" sz="2800" dirty="0"/>
-          </a:p>
-        </p:txBody>
-      </p:sp>
-      <p:sp>
-        <p:nvSpPr>
-          <p:cNvPr id="4" name="Shape 2"/>
-          <p:cNvSpPr/>
-          <p:nvPr/>
-        </p:nvSpPr>
-        <p:spPr>
-          <a:xfrm>
-            <a:off x="548640" y="2466975"/>
-            <a:ext cx="3545738" cy="2134362"/>
-          </a:xfrm>
-          <a:prstGeom prst="roundRect">
-            <a:avLst>
-              <a:gd name="adj" fmla="val 4284"/>
-            </a:avLst>
-          </a:prstGeom>
-          <a:solidFill>
-            <a:srgbClr val="FFFFFF"/>
-          </a:solidFill>
-          <a:ln w="9525">
-            <a:solidFill>
-              <a:srgbClr val="E5E5E5"/>
-            </a:solidFill>
-            <a:prstDash val="solid"/>
-          </a:ln>
-          <a:effectLst>
-            <a:outerShdw sx="100000" sy="100000" kx="0" ky="0" algn="bl" rotWithShape="0" blurRad="63500" dist="12700" dir="5400000">
-              <a:srgbClr val="1D2D3E">
-                <a:alpha val="8000"/>
-              </a:srgbClr>
-            </a:outerShdw>
-          </a:effectLst>
-        </p:spPr>
-      </p:sp>
-      <p:sp>
-        <p:nvSpPr>
-          <p:cNvPr id="5" name="Shape 3"/>
-          <p:cNvSpPr/>
-          <p:nvPr/>
-        </p:nvSpPr>
-        <p:spPr>
-          <a:xfrm>
-            <a:off x="749808" y="2668143"/>
-            <a:ext cx="457200" cy="457200"/>
-          </a:xfrm>
-          <a:prstGeom prst="roundRect">
-            <a:avLst>
-              <a:gd name="adj" fmla="val 22000"/>
-            </a:avLst>
-          </a:prstGeom>
-          <a:solidFill>
-            <a:srgbClr val="E1F4FF"/>
-          </a:solidFill>
-          <a:ln/>
-        </p:spPr>
-      </p:sp>
-      <p:sp>
-        <p:nvSpPr>
-          <p:cNvPr id="6" name="Text 4"/>
+            <a:pPr indent="0" marL="0">
+              <a:buNone/>
+            </a:pPr>
+            <a:r>
+              <a:rPr lang="en-US" sz="1000" b="1" dirty="0">
+                <a:solidFill>
+                  <a:srgbClr val="FFFFFF"/>
+                </a:solidFill>
+                <a:latin typeface="Courier New" pitchFamily="34" charset="0"/>
+                <a:ea typeface="Courier New" pitchFamily="34" charset="-122"/>
+                <a:cs typeface="Courier New" pitchFamily="34" charset="-120"/>
+              </a:rPr>
+              <a:t>Remote APIs</a:t>
+            </a:r>
+            <a:r>
+              <a:rPr lang="en-US" sz="1000" dirty="0">
+                <a:solidFill>
+                  <a:srgbClr val="D1EFFF"/>
+                </a:solidFill>
+              </a:rPr>
+              <a:t>  OData · SOAP</a:t>
+            </a:r>
+            <a:endParaRPr lang="en-US" sz="1400" dirty="0"/>
+          </a:p>
+        </p:txBody>
+      </p:sp>
+      <p:sp>
+        <p:nvSpPr>
+          <p:cNvPr id="10" name="Text 8"/>
           <p:cNvSpPr txBox="1"/>
           <p:nvPr/>
         </p:nvSpPr>
         <p:spPr>
           <a:xfrm>
-            <a:off x="749808" y="3271647"/>
-            <a:ext cx="3143402" cy="1219962"/>
-          </a:xfrm>
-          <a:prstGeom prst="rect">
-            <a:avLst/>
-          </a:prstGeom>
-          <a:noFill/>
-          <a:ln/>
-        </p:spPr>
-        <p:txBody>
-          <a:bodyPr wrap="square" lIns="0" tIns="0" rIns="0" bIns="0" rtlCol="0" anchor="t"/>
-          <a:lstStyle/>
-          <a:p>
-            <a:pPr indent="0" marL="0">
-              <a:spcAft>
-                <a:spcPts val="500"/>
-              </a:spcAft>
-              <a:buNone/>
-            </a:pPr>
-            <a:r>
-              <a:rPr lang="en-US" sz="1500" b="1" dirty="0">
-                <a:solidFill>
-                  <a:srgbClr val="1D2D3E"/>
-                </a:solidFill>
-              </a:rPr>
-              <a:t>Local APIs</a:t>
-            </a:r>
-            <a:endParaRPr lang="en-US" sz="1400" dirty="0"/>
-          </a:p>
-          <a:p>
-            <a:pPr indent="0" marL="0">
-              <a:buNone/>
-            </a:pPr>
-            <a:r>
-              <a:rPr lang="en-US" sz="1300" dirty="0">
-                <a:solidFill>
-                  <a:srgbClr val="556B82"/>
-                </a:solidFill>
-              </a:rPr>
-              <a:t>Classes e CDS views usadas </a:t>
-            </a:r>
-            <a:r>
-              <a:rPr lang="en-US" sz="1300" b="1" dirty="0">
-                <a:solidFill>
-                  <a:srgbClr val="556B82"/>
-                </a:solidFill>
-              </a:rPr>
-              <a:t>dentro</a:t>
-            </a:r>
-            <a:r>
-              <a:rPr lang="en-US" sz="1300" dirty="0">
-                <a:solidFill>
-                  <a:srgbClr val="556B82"/>
-                </a:solidFill>
-              </a:rPr>
-              <a:t> do S/4HANA, como </a:t>
-            </a:r>
-            <a:r>
-              <a:rPr lang="en-US" sz="1300" dirty="0">
-                <a:solidFill>
-                  <a:srgbClr val="0064D9"/>
-                </a:solidFill>
-                <a:latin typeface="Courier New" pitchFamily="34" charset="0"/>
-                <a:ea typeface="Courier New" pitchFamily="34" charset="-122"/>
-                <a:cs typeface="Courier New" pitchFamily="34" charset="-120"/>
-              </a:rPr>
-              <a:t>I_Country</a:t>
-            </a:r>
-            <a:r>
-              <a:rPr lang="en-US" sz="1300" dirty="0">
-                <a:solidFill>
-                  <a:srgbClr val="556B82"/>
-                </a:solidFill>
-              </a:rPr>
-              <a:t>, em apps RAP ou BAdIs.</a:t>
-            </a:r>
-            <a:endParaRPr lang="en-US" sz="1400" dirty="0"/>
-          </a:p>
-        </p:txBody>
-      </p:sp>
-      <p:sp>
-        <p:nvSpPr>
-          <p:cNvPr id="7" name="Shape 5"/>
-          <p:cNvSpPr/>
-          <p:nvPr/>
-        </p:nvSpPr>
-        <p:spPr>
-          <a:xfrm>
-            <a:off x="4322978" y="2466975"/>
-            <a:ext cx="3545738" cy="2134362"/>
-          </a:xfrm>
-          <a:prstGeom prst="roundRect">
-            <a:avLst>
-              <a:gd name="adj" fmla="val 4284"/>
-            </a:avLst>
-          </a:prstGeom>
-          <a:solidFill>
-            <a:srgbClr val="FFFFFF"/>
-          </a:solidFill>
-          <a:ln w="9525">
-            <a:solidFill>
-              <a:srgbClr val="E5E5E5"/>
-            </a:solidFill>
-            <a:prstDash val="solid"/>
-          </a:ln>
-          <a:effectLst>
-            <a:outerShdw sx="100000" sy="100000" kx="0" ky="0" algn="bl" rotWithShape="0" blurRad="63500" dist="12700" dir="5400000">
-              <a:srgbClr val="1D2D3E">
-                <a:alpha val="8000"/>
-              </a:srgbClr>
-            </a:outerShdw>
-          </a:effectLst>
-        </p:spPr>
-      </p:sp>
-      <p:sp>
-        <p:nvSpPr>
-          <p:cNvPr id="8" name="Shape 6"/>
-          <p:cNvSpPr/>
-          <p:nvPr/>
-        </p:nvSpPr>
-        <p:spPr>
-          <a:xfrm>
-            <a:off x="4524146" y="2668143"/>
-            <a:ext cx="457200" cy="457200"/>
-          </a:xfrm>
-          <a:prstGeom prst="roundRect">
-            <a:avLst>
-              <a:gd name="adj" fmla="val 22000"/>
-            </a:avLst>
-          </a:prstGeom>
-          <a:solidFill>
-            <a:srgbClr val="E1F4FF"/>
-          </a:solidFill>
-          <a:ln/>
-        </p:spPr>
-      </p:sp>
-      <p:sp>
-        <p:nvSpPr>
-          <p:cNvPr id="9" name="Text 7"/>
-          <p:cNvSpPr txBox="1"/>
-          <p:nvPr/>
-        </p:nvSpPr>
-        <p:spPr>
-          <a:xfrm>
-            <a:off x="4524146" y="3271647"/>
-            <a:ext cx="3143402" cy="1219962"/>
-          </a:xfrm>
-          <a:prstGeom prst="rect">
-            <a:avLst/>
-          </a:prstGeom>
-          <a:noFill/>
-          <a:ln/>
-        </p:spPr>
-        <p:txBody>
-          <a:bodyPr wrap="square" lIns="0" tIns="0" rIns="0" bIns="0" rtlCol="0" anchor="t"/>
-          <a:lstStyle/>
-          <a:p>
-            <a:pPr indent="0" marL="0">
-              <a:spcAft>
-                <a:spcPts val="500"/>
-              </a:spcAft>
-              <a:buNone/>
-            </a:pPr>
-            <a:r>
-              <a:rPr lang="en-US" sz="1500" b="1" dirty="0">
-                <a:solidFill>
-                  <a:srgbClr val="1D2D3E"/>
-                </a:solidFill>
-              </a:rPr>
-              <a:t>Remote APIs</a:t>
-            </a:r>
-            <a:endParaRPr lang="en-US" sz="1400" dirty="0"/>
-          </a:p>
-          <a:p>
-            <a:pPr indent="0" marL="0">
-              <a:buNone/>
-            </a:pPr>
-            <a:r>
-              <a:rPr lang="en-US" sz="1300" dirty="0">
-                <a:solidFill>
-                  <a:srgbClr val="556B82"/>
-                </a:solidFill>
-              </a:rPr>
-              <a:t>OData e SOAP para apps no BTP, Cloud Integration (assíncrono) e eventos.</a:t>
-            </a:r>
-            <a:endParaRPr lang="en-US" sz="1400" dirty="0"/>
-          </a:p>
-        </p:txBody>
-      </p:sp>
-      <p:sp>
-        <p:nvSpPr>
-          <p:cNvPr id="10" name="Shape 8"/>
-          <p:cNvSpPr/>
-          <p:nvPr/>
-        </p:nvSpPr>
-        <p:spPr>
-          <a:xfrm>
-            <a:off x="8097317" y="2466975"/>
-            <a:ext cx="3545738" cy="2134362"/>
-          </a:xfrm>
-          <a:prstGeom prst="roundRect">
-            <a:avLst>
-              <a:gd name="adj" fmla="val 4284"/>
-            </a:avLst>
-          </a:prstGeom>
-          <a:solidFill>
-            <a:srgbClr val="FFFFFF"/>
-          </a:solidFill>
-          <a:ln w="9525">
-            <a:solidFill>
-              <a:srgbClr val="E5E5E5"/>
-            </a:solidFill>
-            <a:prstDash val="solid"/>
-          </a:ln>
-          <a:effectLst>
-            <a:outerShdw sx="100000" sy="100000" kx="0" ky="0" algn="bl" rotWithShape="0" blurRad="63500" dist="12700" dir="5400000">
-              <a:srgbClr val="1D2D3E">
-                <a:alpha val="8000"/>
-              </a:srgbClr>
-            </a:outerShdw>
-          </a:effectLst>
-        </p:spPr>
-      </p:sp>
-      <p:sp>
-        <p:nvSpPr>
-          <p:cNvPr id="11" name="Shape 9"/>
-          <p:cNvSpPr/>
-          <p:nvPr/>
-        </p:nvSpPr>
-        <p:spPr>
-          <a:xfrm>
-            <a:off x="8298485" y="2668143"/>
-            <a:ext cx="457200" cy="457200"/>
-          </a:xfrm>
-          <a:prstGeom prst="roundRect">
-            <a:avLst>
-              <a:gd name="adj" fmla="val 22000"/>
-            </a:avLst>
-          </a:prstGeom>
-          <a:solidFill>
-            <a:srgbClr val="E1F4FF"/>
-          </a:solidFill>
-          <a:ln/>
-        </p:spPr>
-      </p:sp>
-      <p:sp>
-        <p:nvSpPr>
-          <p:cNvPr id="12" name="Text 10"/>
-          <p:cNvSpPr txBox="1"/>
-          <p:nvPr/>
-        </p:nvSpPr>
-        <p:spPr>
-          <a:xfrm>
-            <a:off x="8298485" y="3271647"/>
-            <a:ext cx="3143402" cy="1219962"/>
-          </a:xfrm>
-          <a:prstGeom prst="rect">
-            <a:avLst/>
-          </a:prstGeom>
-          <a:noFill/>
-          <a:ln/>
-        </p:spPr>
-        <p:txBody>
-          <a:bodyPr wrap="square" lIns="0" tIns="0" rIns="0" bIns="0" rtlCol="0" anchor="t"/>
-          <a:lstStyle/>
-          <a:p>
-            <a:pPr indent="0" marL="0">
-              <a:spcAft>
-                <a:spcPts val="500"/>
-              </a:spcAft>
-              <a:buNone/>
-            </a:pPr>
-            <a:r>
-              <a:rPr lang="en-US" sz="1500" b="1" dirty="0">
-                <a:solidFill>
-                  <a:srgbClr val="1D2D3E"/>
-                </a:solidFill>
-              </a:rPr>
-              <a:t>Extension points</a:t>
-            </a:r>
-            <a:endParaRPr lang="en-US" sz="1400" dirty="0"/>
-          </a:p>
-          <a:p>
-            <a:pPr indent="0" marL="0">
-              <a:buNone/>
-            </a:pPr>
-            <a:r>
-              <a:rPr lang="en-US" sz="1300" dirty="0">
-                <a:solidFill>
-                  <a:srgbClr val="556B82"/>
-                </a:solidFill>
-              </a:rPr>
-              <a:t>BAdIs e extensibilidade de BOs RAP, implementados no próprio sistema.</a:t>
-            </a:r>
-            <a:endParaRPr lang="en-US" sz="1400" dirty="0"/>
-          </a:p>
-        </p:txBody>
-      </p:sp>
-      <p:sp>
-        <p:nvSpPr>
-          <p:cNvPr id="13" name="Shape 11"/>
-          <p:cNvSpPr/>
-          <p:nvPr/>
-        </p:nvSpPr>
-        <p:spPr>
-          <a:xfrm>
-            <a:off x="548640" y="4784217"/>
-            <a:ext cx="11094415" cy="566928"/>
-          </a:xfrm>
-          <a:prstGeom prst="roundRect">
-            <a:avLst>
-              <a:gd name="adj" fmla="val 12903"/>
-            </a:avLst>
-          </a:prstGeom>
-          <a:solidFill>
-            <a:srgbClr val="E1F4FF"/>
-          </a:solidFill>
-          <a:ln/>
-        </p:spPr>
-      </p:sp>
-      <p:sp>
-        <p:nvSpPr>
-          <p:cNvPr id="14" name="Text 12"/>
-          <p:cNvSpPr txBox="1"/>
-          <p:nvPr/>
-        </p:nvSpPr>
-        <p:spPr>
-          <a:xfrm>
-            <a:off x="1207008" y="4784217"/>
-            <a:ext cx="10225735" cy="566928"/>
+            <a:off x="8229600" y="2798064"/>
+            <a:ext cx="3246120" cy="329184"/>
           </a:xfrm>
           <a:prstGeom prst="rect">
             <a:avLst/>
@@ -7553,52 +9506,70 @@
               <a:buNone/>
             </a:pPr>
             <a:r>
-              <a:rPr lang="en-US" sz="1200" b="1" dirty="0">
-                <a:solidFill>
-                  <a:srgbClr val="0064D9"/>
-                </a:solidFill>
-              </a:rPr>
-              <a:t>Descoberta  </a:t>
-            </a:r>
-            <a:r>
-              <a:rPr lang="en-US" sz="1200" dirty="0">
-                <a:solidFill>
-                  <a:srgbClr val="1D2D3E"/>
-                </a:solidFill>
-              </a:rPr>
-              <a:t>o </a:t>
-            </a:r>
-            <a:r>
-              <a:rPr lang="en-US" sz="1200" b="1" dirty="0">
-                <a:solidFill>
-                  <a:srgbClr val="1D2D3E"/>
-                </a:solidFill>
-              </a:rPr>
-              <a:t>SAP Business Accelerator Hub</a:t>
-            </a:r>
-            <a:r>
-              <a:rPr lang="en-US" sz="1200" dirty="0">
-                <a:solidFill>
-                  <a:srgbClr val="1D2D3E"/>
-                </a:solidFill>
-              </a:rPr>
-              <a:t> lista APIs, eventos e BAdIs; a view </a:t>
-            </a:r>
-            <a:r>
-              <a:rPr lang="en-US" sz="1200" b="1" dirty="0">
-                <a:solidFill>
-                  <a:srgbClr val="1D2D3E"/>
-                </a:solidFill>
-              </a:rPr>
-              <a:t>Released Objects</a:t>
-            </a:r>
-            <a:r>
-              <a:rPr lang="en-US" sz="1200" dirty="0">
-                <a:solidFill>
-                  <a:srgbClr val="1D2D3E"/>
-                </a:solidFill>
-              </a:rPr>
-              <a:t> do ADT também mostra elementos de dados, objetos de autorização e mais.</a:t>
+              <a:rPr lang="en-US" sz="1000" b="1" dirty="0">
+                <a:solidFill>
+                  <a:srgbClr val="FFFFFF"/>
+                </a:solidFill>
+                <a:latin typeface="Courier New" pitchFamily="34" charset="0"/>
+                <a:ea typeface="Courier New" pitchFamily="34" charset="-122"/>
+                <a:cs typeface="Courier New" pitchFamily="34" charset="-120"/>
+              </a:rPr>
+              <a:t>Extension points</a:t>
+            </a:r>
+            <a:r>
+              <a:rPr lang="en-US" sz="1000" dirty="0">
+                <a:solidFill>
+                  <a:srgbClr val="D1EFFF"/>
+                </a:solidFill>
+              </a:rPr>
+              <a:t>  BAdIs · RAP</a:t>
+            </a:r>
+            <a:endParaRPr lang="en-US" sz="1400" dirty="0"/>
+          </a:p>
+        </p:txBody>
+      </p:sp>
+      <p:sp>
+        <p:nvSpPr>
+          <p:cNvPr id="11" name="Text 9"/>
+          <p:cNvSpPr txBox="1"/>
+          <p:nvPr/>
+        </p:nvSpPr>
+        <p:spPr>
+          <a:xfrm>
+            <a:off x="8229600" y="3182112"/>
+            <a:ext cx="3246120" cy="329184"/>
+          </a:xfrm>
+          <a:prstGeom prst="rect">
+            <a:avLst/>
+          </a:prstGeom>
+          <a:noFill/>
+          <a:ln/>
+        </p:spPr>
+        <p:txBody>
+          <a:bodyPr wrap="square" lIns="0" tIns="0" rIns="0" bIns="0" rtlCol="0" anchor="ctr"/>
+          <a:lstStyle/>
+          <a:p>
+            <a:pPr indent="0" marL="0">
+              <a:buNone/>
+            </a:pPr>
+            <a:r>
+              <a:rPr lang="en-US" sz="1000" b="1" dirty="0">
+                <a:solidFill>
+                  <a:srgbClr val="FFFFFF"/>
+                </a:solidFill>
+                <a:latin typeface="Courier New" pitchFamily="34" charset="0"/>
+                <a:ea typeface="Courier New" pitchFamily="34" charset="-122"/>
+                <a:cs typeface="Courier New" pitchFamily="34" charset="-120"/>
+              </a:rPr>
+              <a:t>Business Accelerator Hub</a:t>
+            </a:r>
+            <a:r>
+              <a:rPr lang="en-US" sz="1000" dirty="0">
+                <a:solidFill>
+                  <a:srgbClr val="D1EFFF"/>
+                </a:solidFill>
+              </a:rPr>
+              <a:t>  descoberta</a:t>
             </a:r>
             <a:endParaRPr lang="en-US" sz="1400" dirty="0"/>
           </a:p>
@@ -7606,7 +9577,7 @@
       </p:sp>
       <p:pic>
         <p:nvPicPr>
-          <p:cNvPr id="15" name="Image 0" descr="preencoded.png">    </p:cNvPr>
+          <p:cNvPr id="12" name="Image 0" descr="preencoded.png">    </p:cNvPr>
           <p:cNvPicPr>
             <a:picLocks noChangeAspect="1"/>
           </p:cNvPicPr>
@@ -7620,131 +9591,14 @@
         </p:blipFill>
         <p:spPr>
           <a:xfrm>
-            <a:off x="850392" y="2768727"/>
-            <a:ext cx="256032" cy="256032"/>
+            <a:off x="896112" y="713232"/>
+            <a:ext cx="402336" cy="402336"/>
           </a:xfrm>
           <a:prstGeom prst="rect">
             <a:avLst/>
           </a:prstGeom>
         </p:spPr>
       </p:pic>
-      <p:pic>
-        <p:nvPicPr>
-          <p:cNvPr id="16" name="Image 1" descr="preencoded.png">    </p:cNvPr>
-          <p:cNvPicPr>
-            <a:picLocks noChangeAspect="1"/>
-          </p:cNvPicPr>
-          <p:nvPr/>
-        </p:nvPicPr>
-        <p:blipFill>
-          <a:blip r:embed="rId2"/>
-          <a:stretch>
-            <a:fillRect/>
-          </a:stretch>
-        </p:blipFill>
-        <p:spPr>
-          <a:xfrm>
-            <a:off x="4624730" y="2768727"/>
-            <a:ext cx="256032" cy="256032"/>
-          </a:xfrm>
-          <a:prstGeom prst="rect">
-            <a:avLst/>
-          </a:prstGeom>
-        </p:spPr>
-      </p:pic>
-      <p:pic>
-        <p:nvPicPr>
-          <p:cNvPr id="17" name="Image 2" descr="preencoded.png">    </p:cNvPr>
-          <p:cNvPicPr>
-            <a:picLocks noChangeAspect="1"/>
-          </p:cNvPicPr>
-          <p:nvPr/>
-        </p:nvPicPr>
-        <p:blipFill>
-          <a:blip r:embed="rId3"/>
-          <a:stretch>
-            <a:fillRect/>
-          </a:stretch>
-        </p:blipFill>
-        <p:spPr>
-          <a:xfrm>
-            <a:off x="8399069" y="2768727"/>
-            <a:ext cx="256032" cy="256032"/>
-          </a:xfrm>
-          <a:prstGeom prst="rect">
-            <a:avLst/>
-          </a:prstGeom>
-        </p:spPr>
-      </p:pic>
-      <p:pic>
-        <p:nvPicPr>
-          <p:cNvPr id="18" name="Image 3" descr="preencoded.png">    </p:cNvPr>
-          <p:cNvPicPr>
-            <a:picLocks noChangeAspect="1"/>
-          </p:cNvPicPr>
-          <p:nvPr/>
-        </p:nvPicPr>
-        <p:blipFill>
-          <a:blip r:embed="rId4"/>
-          <a:stretch>
-            <a:fillRect/>
-          </a:stretch>
-        </p:blipFill>
-        <p:spPr>
-          <a:xfrm>
-            <a:off x="749808" y="4912233"/>
-            <a:ext cx="310896" cy="310896"/>
-          </a:xfrm>
-          <a:prstGeom prst="rect">
-            <a:avLst/>
-          </a:prstGeom>
-        </p:spPr>
-      </p:pic>
-      <p:sp>
-        <p:nvSpPr>
-          <p:cNvPr id="25" name="Slide Number Placeholder 0"/>
-          <p:cNvSpPr>
-            <a:spLocks noGrp="1"/>
-          </p:cNvSpPr>
-          <p:nvPr>
-            <p:ph type="sldNum" sz="quarter" idx="4294967295"/>
-          </p:nvPr>
-        </p:nvSpPr>
-        <p:spPr>
-          <a:xfrm>
-            <a:off x="11094415" y="6473952"/>
-            <a:ext cx="548640" cy="228600"/>
-          </a:xfrm>
-          <a:prstGeom prst="rect">
-            <a:avLst/>
-          </a:prstGeom>
-          <a:extLst>
-            <a:ext uri="{C572A759-6A51-4108-AA02-DFA0A04FC94B}">
-              <ma14:wrappingTextBoxFlag xmlns:ma14="http://schemas.microsoft.com/office/mac/drawingml/2011/main" val="0"/>
-            </a:ext>
-          </a:extLst>
-        </p:spPr>
-        <p:txBody>
-          <a:bodyPr lIns="0" tIns="0" rIns="0" bIns="0"/>
-          <a:lstStyle>
-            <a:lvl1pPr>
-              <a:defRPr sz="900">
-                <a:solidFill>
-                  <a:srgbClr val="556B82"/>
-                </a:solidFill>
-              </a:defRPr>
-            </a:lvl1pPr>
-          </a:lstStyle>
-          <a:p>
-            <a:pPr algn="r"/>
-            <a:fld id="{F7021451-1387-4CA6-816F-3879F97B5CBC}" type="slidenum">
-              <a:rPr b="0" lang="en-US"/>
-              <a:t>15</a:t>
-            </a:fld>
-            <a:endParaRPr lang="en-US"/>
-          </a:p>
-        </p:txBody>
-      </p:sp>
     </p:spTree>
   </p:cSld>
   <p:clrMapOvr>
@@ -7802,7 +9656,7 @@
                   <a:srgbClr val="0064D9"/>
                 </a:solidFill>
               </a:rPr>
-              <a:t>APIS · QUEM VÊ O QUÊ</a:t>
+              <a:t>APIS · TIPOS DE INTERFACE</a:t>
             </a:r>
             <a:endParaRPr lang="en-US" sz="1100" dirty="0"/>
           </a:p>
@@ -7840,7 +9694,7 @@
                   <a:srgbClr val="1D2D3E"/>
                 </a:solidFill>
               </a:rPr>
-              <a:t>Local APIs só existem dentro do S/4HANA</a:t>
+              <a:t>Três propósitos para as APIs liberadas</a:t>
             </a:r>
             <a:endParaRPr lang="en-US" sz="2800" dirty="0"/>
           </a:p>
@@ -7854,12 +9708,12 @@
         </p:nvSpPr>
         <p:spPr>
           <a:xfrm>
-            <a:off x="548640" y="2782919"/>
-            <a:ext cx="5410048" cy="2252282"/>
+            <a:off x="548640" y="2466975"/>
+            <a:ext cx="3545738" cy="2134362"/>
           </a:xfrm>
           <a:prstGeom prst="roundRect">
             <a:avLst>
-              <a:gd name="adj" fmla="val 4060"/>
+              <a:gd name="adj" fmla="val 4284"/>
             </a:avLst>
           </a:prstGeom>
           <a:solidFill>
@@ -7888,27 +9742,7 @@
         </p:nvSpPr>
         <p:spPr>
           <a:xfrm>
-            <a:off x="548640" y="2782919"/>
-            <a:ext cx="5410048" cy="73152"/>
-          </a:xfrm>
-          <a:prstGeom prst="rect">
-            <a:avLst/>
-          </a:prstGeom>
-          <a:solidFill>
-            <a:srgbClr val="556B82"/>
-          </a:solidFill>
-          <a:ln/>
-        </p:spPr>
-      </p:sp>
-      <p:sp>
-        <p:nvSpPr>
-          <p:cNvPr id="6" name="Shape 4"/>
-          <p:cNvSpPr/>
-          <p:nvPr/>
-        </p:nvSpPr>
-        <p:spPr>
-          <a:xfrm>
-            <a:off x="777240" y="3057239"/>
+            <a:off x="749808" y="2668143"/>
             <a:ext cx="457200" cy="457200"/>
           </a:xfrm>
           <a:prstGeom prst="roundRect">
@@ -7917,57 +9751,21 @@
             </a:avLst>
           </a:prstGeom>
           <a:solidFill>
-            <a:srgbClr val="EFF1F2"/>
+            <a:srgbClr val="E1F4FF"/>
           </a:solidFill>
           <a:ln/>
         </p:spPr>
       </p:sp>
       <p:sp>
         <p:nvSpPr>
-          <p:cNvPr id="7" name="Text 5"/>
+          <p:cNvPr id="6" name="Text 4"/>
           <p:cNvSpPr txBox="1"/>
           <p:nvPr/>
         </p:nvSpPr>
         <p:spPr>
           <a:xfrm>
-            <a:off x="1371600" y="3057239"/>
-            <a:ext cx="4404208" cy="457200"/>
-          </a:xfrm>
-          <a:prstGeom prst="rect">
-            <a:avLst/>
-          </a:prstGeom>
-          <a:noFill/>
-          <a:ln/>
-        </p:spPr>
-        <p:txBody>
-          <a:bodyPr wrap="square" lIns="0" tIns="0" rIns="0" bIns="0" rtlCol="0" anchor="ctr"/>
-          <a:lstStyle/>
-          <a:p>
-            <a:pPr indent="0" marL="0">
-              <a:buNone/>
-            </a:pPr>
-            <a:r>
-              <a:rPr lang="en-US" sz="1600" b="1" dirty="0">
-                <a:solidFill>
-                  <a:srgbClr val="223548"/>
-                </a:solidFill>
-              </a:rPr>
-              <a:t>S/4HANA Cloud, ABAP environment</a:t>
-            </a:r>
-            <a:endParaRPr lang="en-US" sz="1600" dirty="0"/>
-          </a:p>
-        </p:txBody>
-      </p:sp>
-      <p:sp>
-        <p:nvSpPr>
-          <p:cNvPr id="8" name="Text 6"/>
-          <p:cNvSpPr txBox="1"/>
-          <p:nvPr/>
-        </p:nvSpPr>
-        <p:spPr>
-          <a:xfrm>
-            <a:off x="777240" y="3697319"/>
-            <a:ext cx="4952848" cy="1200722"/>
+            <a:off x="749808" y="3271647"/>
+            <a:ext cx="3143402" cy="1219962"/>
           </a:xfrm>
           <a:prstGeom prst="rect">
             <a:avLst/>
@@ -7979,131 +9777,87 @@
           <a:bodyPr wrap="square" lIns="0" tIns="0" rIns="0" bIns="0" rtlCol="0" anchor="t"/>
           <a:lstStyle/>
           <a:p>
-            <a:pPr marL="177800" indent="-177800">
+            <a:pPr indent="0" marL="0">
               <a:spcAft>
-                <a:spcPts val="800"/>
+                <a:spcPts val="500"/>
               </a:spcAft>
-              <a:buSzPct val="100000"/>
-              <a:buChar char="•"/>
-            </a:pPr>
-            <a:r>
-              <a:rPr lang="en-US" sz="1350" dirty="0">
+              <a:buNone/>
+            </a:pPr>
+            <a:r>
+              <a:rPr lang="en-US" sz="1500" b="1" dirty="0">
                 <a:solidFill>
                   <a:srgbClr val="1D2D3E"/>
                 </a:solidFill>
               </a:rPr>
-              <a:t>Usa </a:t>
-            </a:r>
-            <a:r>
-              <a:rPr lang="en-US" sz="1350" b="1" dirty="0">
-                <a:solidFill>
-                  <a:srgbClr val="1D2D3E"/>
-                </a:solidFill>
-              </a:rPr>
-              <a:t>local APIs</a:t>
-            </a:r>
-            <a:r>
-              <a:rPr lang="en-US" sz="1350" dirty="0">
-                <a:solidFill>
-                  <a:srgbClr val="1D2D3E"/>
-                </a:solidFill>
-              </a:rPr>
-              <a:t> do S/4HANA e da plataforma</a:t>
+              <a:t>Local APIs</a:t>
             </a:r>
             <a:endParaRPr lang="en-US" sz="1400" dirty="0"/>
           </a:p>
           <a:p>
-            <a:pPr marL="177800" indent="-177800">
-              <a:spcAft>
-                <a:spcPts val="800"/>
-              </a:spcAft>
-              <a:buSzPct val="100000"/>
-              <a:buChar char="•"/>
-            </a:pPr>
-            <a:r>
-              <a:rPr lang="en-US" sz="1350" dirty="0">
-                <a:solidFill>
-                  <a:srgbClr val="1D2D3E"/>
-                </a:solidFill>
-              </a:rPr>
-              <a:t>Implementa extensões de </a:t>
-            </a:r>
-            <a:r>
-              <a:rPr lang="en-US" sz="1350" b="1" dirty="0">
-                <a:solidFill>
-                  <a:srgbClr val="1D2D3E"/>
-                </a:solidFill>
-              </a:rPr>
-              <a:t>key user</a:t>
-            </a:r>
-            <a:r>
-              <a:rPr lang="en-US" sz="1350" dirty="0">
-                <a:solidFill>
-                  <a:srgbClr val="1D2D3E"/>
-                </a:solidFill>
-              </a:rPr>
-              <a:t> e </a:t>
-            </a:r>
-            <a:r>
-              <a:rPr lang="en-US" sz="1350" b="1" dirty="0">
-                <a:solidFill>
-                  <a:srgbClr val="1D2D3E"/>
-                </a:solidFill>
-              </a:rPr>
-              <a:t>developer</a:t>
+            <a:pPr indent="0" marL="0">
+              <a:buNone/>
+            </a:pPr>
+            <a:r>
+              <a:rPr lang="en-US" sz="1300" dirty="0">
+                <a:solidFill>
+                  <a:srgbClr val="556B82"/>
+                </a:solidFill>
+              </a:rPr>
+              <a:t>Classes e CDS views usadas </a:t>
+            </a:r>
+            <a:r>
+              <a:rPr lang="en-US" sz="1300" b="1" dirty="0">
+                <a:solidFill>
+                  <a:srgbClr val="556B82"/>
+                </a:solidFill>
+              </a:rPr>
+              <a:t>dentro</a:t>
+            </a:r>
+            <a:r>
+              <a:rPr lang="en-US" sz="1300" dirty="0">
+                <a:solidFill>
+                  <a:srgbClr val="556B82"/>
+                </a:solidFill>
+              </a:rPr>
+              <a:t> do S/4HANA, como </a:t>
+            </a:r>
+            <a:r>
+              <a:rPr lang="en-US" sz="1300" dirty="0">
+                <a:solidFill>
+                  <a:srgbClr val="0064D9"/>
+                </a:solidFill>
+                <a:latin typeface="Courier New" pitchFamily="34" charset="0"/>
+                <a:ea typeface="Courier New" pitchFamily="34" charset="-122"/>
+                <a:cs typeface="Courier New" pitchFamily="34" charset="-120"/>
+              </a:rPr>
+              <a:t>I_Country</a:t>
+            </a:r>
+            <a:r>
+              <a:rPr lang="en-US" sz="1300" dirty="0">
+                <a:solidFill>
+                  <a:srgbClr val="556B82"/>
+                </a:solidFill>
+              </a:rPr>
+              <a:t>, em apps RAP ou BAdIs.</a:t>
             </a:r>
             <a:endParaRPr lang="en-US" sz="1400" dirty="0"/>
           </a:p>
-          <a:p>
-            <a:pPr marL="177800" indent="-177800">
-              <a:spcAft>
-                <a:spcPts val="800"/>
-              </a:spcAft>
-              <a:buSzPct val="100000"/>
-              <a:buChar char="•"/>
-            </a:pPr>
-            <a:r>
-              <a:rPr lang="en-US" sz="1350" dirty="0">
-                <a:solidFill>
-                  <a:srgbClr val="1D2D3E"/>
-                </a:solidFill>
-              </a:rPr>
-              <a:t>Extensão </a:t>
-            </a:r>
-            <a:r>
-              <a:rPr lang="en-US" sz="1350" b="1" dirty="0">
-                <a:solidFill>
-                  <a:srgbClr val="1D2D3E"/>
-                </a:solidFill>
-              </a:rPr>
-              <a:t>on-stack</a:t>
-            </a:r>
-            <a:r>
-              <a:rPr lang="en-US" sz="1350" dirty="0">
-                <a:solidFill>
-                  <a:srgbClr val="1D2D3E"/>
-                </a:solidFill>
-              </a:rPr>
-              <a:t>, perto dos dados</a:t>
-            </a:r>
-            <a:endParaRPr lang="en-US" sz="1400" dirty="0"/>
-          </a:p>
-        </p:txBody>
-      </p:sp>
-      <p:sp>
-        <p:nvSpPr>
-          <p:cNvPr id="9" name="Shape 7"/>
+        </p:txBody>
+      </p:sp>
+      <p:sp>
+        <p:nvSpPr>
+          <p:cNvPr id="7" name="Shape 5"/>
           <p:cNvSpPr/>
           <p:nvPr/>
         </p:nvSpPr>
         <p:spPr>
           <a:xfrm>
-            <a:off x="6233008" y="2782919"/>
-            <a:ext cx="5410048" cy="2252282"/>
+            <a:off x="4322978" y="2466975"/>
+            <a:ext cx="3545738" cy="2134362"/>
           </a:xfrm>
           <a:prstGeom prst="roundRect">
             <a:avLst>
-              <a:gd name="adj" fmla="val 4060"/>
+              <a:gd name="adj" fmla="val 4284"/>
             </a:avLst>
           </a:prstGeom>
           <a:solidFill>
@@ -8126,33 +9880,13 @@
       </p:sp>
       <p:sp>
         <p:nvSpPr>
-          <p:cNvPr id="10" name="Shape 8"/>
+          <p:cNvPr id="8" name="Shape 6"/>
           <p:cNvSpPr/>
           <p:nvPr/>
         </p:nvSpPr>
         <p:spPr>
           <a:xfrm>
-            <a:off x="6233008" y="2782919"/>
-            <a:ext cx="5410048" cy="73152"/>
-          </a:xfrm>
-          <a:prstGeom prst="rect">
-            <a:avLst/>
-          </a:prstGeom>
-          <a:solidFill>
-            <a:srgbClr val="556B82"/>
-          </a:solidFill>
-          <a:ln/>
-        </p:spPr>
-      </p:sp>
-      <p:sp>
-        <p:nvSpPr>
-          <p:cNvPr id="11" name="Shape 9"/>
-          <p:cNvSpPr/>
-          <p:nvPr/>
-        </p:nvSpPr>
-        <p:spPr>
-          <a:xfrm>
-            <a:off x="6461608" y="3057239"/>
+            <a:off x="4524146" y="2668143"/>
             <a:ext cx="457200" cy="457200"/>
           </a:xfrm>
           <a:prstGeom prst="roundRect">
@@ -8161,7 +9895,116 @@
             </a:avLst>
           </a:prstGeom>
           <a:solidFill>
-            <a:srgbClr val="EFF1F2"/>
+            <a:srgbClr val="E1F4FF"/>
+          </a:solidFill>
+          <a:ln/>
+        </p:spPr>
+      </p:sp>
+      <p:sp>
+        <p:nvSpPr>
+          <p:cNvPr id="9" name="Text 7"/>
+          <p:cNvSpPr txBox="1"/>
+          <p:nvPr/>
+        </p:nvSpPr>
+        <p:spPr>
+          <a:xfrm>
+            <a:off x="4524146" y="3271647"/>
+            <a:ext cx="3143402" cy="1219962"/>
+          </a:xfrm>
+          <a:prstGeom prst="rect">
+            <a:avLst/>
+          </a:prstGeom>
+          <a:noFill/>
+          <a:ln/>
+        </p:spPr>
+        <p:txBody>
+          <a:bodyPr wrap="square" lIns="0" tIns="0" rIns="0" bIns="0" rtlCol="0" anchor="t"/>
+          <a:lstStyle/>
+          <a:p>
+            <a:pPr indent="0" marL="0">
+              <a:spcAft>
+                <a:spcPts val="500"/>
+              </a:spcAft>
+              <a:buNone/>
+            </a:pPr>
+            <a:r>
+              <a:rPr lang="en-US" sz="1500" b="1" dirty="0">
+                <a:solidFill>
+                  <a:srgbClr val="1D2D3E"/>
+                </a:solidFill>
+              </a:rPr>
+              <a:t>Remote APIs</a:t>
+            </a:r>
+            <a:endParaRPr lang="en-US" sz="1400" dirty="0"/>
+          </a:p>
+          <a:p>
+            <a:pPr indent="0" marL="0">
+              <a:buNone/>
+            </a:pPr>
+            <a:r>
+              <a:rPr lang="en-US" sz="1300" dirty="0">
+                <a:solidFill>
+                  <a:srgbClr val="556B82"/>
+                </a:solidFill>
+              </a:rPr>
+              <a:t>OData e SOAP para apps no BTP, Cloud Integration (assíncrono) e eventos.</a:t>
+            </a:r>
+            <a:endParaRPr lang="en-US" sz="1400" dirty="0"/>
+          </a:p>
+        </p:txBody>
+      </p:sp>
+      <p:sp>
+        <p:nvSpPr>
+          <p:cNvPr id="10" name="Shape 8"/>
+          <p:cNvSpPr/>
+          <p:nvPr/>
+        </p:nvSpPr>
+        <p:spPr>
+          <a:xfrm>
+            <a:off x="8097317" y="2466975"/>
+            <a:ext cx="3545738" cy="2134362"/>
+          </a:xfrm>
+          <a:prstGeom prst="roundRect">
+            <a:avLst>
+              <a:gd name="adj" fmla="val 4284"/>
+            </a:avLst>
+          </a:prstGeom>
+          <a:solidFill>
+            <a:srgbClr val="FFFFFF"/>
+          </a:solidFill>
+          <a:ln w="9525">
+            <a:solidFill>
+              <a:srgbClr val="E5E5E5"/>
+            </a:solidFill>
+            <a:prstDash val="solid"/>
+          </a:ln>
+          <a:effectLst>
+            <a:outerShdw sx="100000" sy="100000" kx="0" ky="0" algn="bl" rotWithShape="0" blurRad="63500" dist="12700" dir="5400000">
+              <a:srgbClr val="1D2D3E">
+                <a:alpha val="8000"/>
+              </a:srgbClr>
+            </a:outerShdw>
+          </a:effectLst>
+        </p:spPr>
+      </p:sp>
+      <p:sp>
+        <p:nvSpPr>
+          <p:cNvPr id="11" name="Shape 9"/>
+          <p:cNvSpPr/>
+          <p:nvPr/>
+        </p:nvSpPr>
+        <p:spPr>
+          <a:xfrm>
+            <a:off x="8298485" y="2668143"/>
+            <a:ext cx="457200" cy="457200"/>
+          </a:xfrm>
+          <a:prstGeom prst="roundRect">
+            <a:avLst>
+              <a:gd name="adj" fmla="val 22000"/>
+            </a:avLst>
+          </a:prstGeom>
+          <a:solidFill>
+            <a:srgbClr val="E1F4FF"/>
           </a:solidFill>
           <a:ln/>
         </p:spPr>
@@ -8174,8 +10017,83 @@
         </p:nvSpPr>
         <p:spPr>
           <a:xfrm>
-            <a:off x="7055968" y="3057239"/>
-            <a:ext cx="4404208" cy="457200"/>
+            <a:off x="8298485" y="3271647"/>
+            <a:ext cx="3143402" cy="1219962"/>
+          </a:xfrm>
+          <a:prstGeom prst="rect">
+            <a:avLst/>
+          </a:prstGeom>
+          <a:noFill/>
+          <a:ln/>
+        </p:spPr>
+        <p:txBody>
+          <a:bodyPr wrap="square" lIns="0" tIns="0" rIns="0" bIns="0" rtlCol="0" anchor="t"/>
+          <a:lstStyle/>
+          <a:p>
+            <a:pPr indent="0" marL="0">
+              <a:spcAft>
+                <a:spcPts val="500"/>
+              </a:spcAft>
+              <a:buNone/>
+            </a:pPr>
+            <a:r>
+              <a:rPr lang="en-US" sz="1500" b="1" dirty="0">
+                <a:solidFill>
+                  <a:srgbClr val="1D2D3E"/>
+                </a:solidFill>
+              </a:rPr>
+              <a:t>Extension points</a:t>
+            </a:r>
+            <a:endParaRPr lang="en-US" sz="1400" dirty="0"/>
+          </a:p>
+          <a:p>
+            <a:pPr indent="0" marL="0">
+              <a:buNone/>
+            </a:pPr>
+            <a:r>
+              <a:rPr lang="en-US" sz="1300" dirty="0">
+                <a:solidFill>
+                  <a:srgbClr val="556B82"/>
+                </a:solidFill>
+              </a:rPr>
+              <a:t>BAdIs e extensibilidade de BOs RAP, implementados no próprio sistema.</a:t>
+            </a:r>
+            <a:endParaRPr lang="en-US" sz="1400" dirty="0"/>
+          </a:p>
+        </p:txBody>
+      </p:sp>
+      <p:sp>
+        <p:nvSpPr>
+          <p:cNvPr id="13" name="Shape 11"/>
+          <p:cNvSpPr/>
+          <p:nvPr/>
+        </p:nvSpPr>
+        <p:spPr>
+          <a:xfrm>
+            <a:off x="548640" y="4784217"/>
+            <a:ext cx="11094415" cy="566928"/>
+          </a:xfrm>
+          <a:prstGeom prst="roundRect">
+            <a:avLst>
+              <a:gd name="adj" fmla="val 12903"/>
+            </a:avLst>
+          </a:prstGeom>
+          <a:solidFill>
+            <a:srgbClr val="E1F4FF"/>
+          </a:solidFill>
+          <a:ln/>
+        </p:spPr>
+      </p:sp>
+      <p:sp>
+        <p:nvSpPr>
+          <p:cNvPr id="14" name="Text 12"/>
+          <p:cNvSpPr txBox="1"/>
+          <p:nvPr/>
+        </p:nvSpPr>
+        <p:spPr>
+          <a:xfrm>
+            <a:off x="1207008" y="4784217"/>
+            <a:ext cx="10225735" cy="566928"/>
           </a:xfrm>
           <a:prstGeom prst="rect">
             <a:avLst/>
@@ -8191,128 +10109,52 @@
               <a:buNone/>
             </a:pPr>
             <a:r>
-              <a:rPr lang="en-US" sz="1600" b="1" dirty="0">
-                <a:solidFill>
-                  <a:srgbClr val="223548"/>
-                </a:solidFill>
-              </a:rPr>
-              <a:t>SAP BTP, ABAP environment</a:t>
-            </a:r>
-            <a:endParaRPr lang="en-US" sz="1600" dirty="0"/>
-          </a:p>
-        </p:txBody>
-      </p:sp>
-      <p:sp>
-        <p:nvSpPr>
-          <p:cNvPr id="13" name="Text 11"/>
-          <p:cNvSpPr txBox="1"/>
-          <p:nvPr/>
-        </p:nvSpPr>
-        <p:spPr>
-          <a:xfrm>
-            <a:off x="6461608" y="3697319"/>
-            <a:ext cx="4952848" cy="1200722"/>
-          </a:xfrm>
-          <a:prstGeom prst="rect">
-            <a:avLst/>
-          </a:prstGeom>
-          <a:noFill/>
-          <a:ln/>
-        </p:spPr>
-        <p:txBody>
-          <a:bodyPr wrap="square" lIns="0" tIns="0" rIns="0" bIns="0" rtlCol="0" anchor="t"/>
-          <a:lstStyle/>
-          <a:p>
-            <a:pPr marL="177800" indent="-177800">
-              <a:spcAft>
-                <a:spcPts val="800"/>
-              </a:spcAft>
-              <a:buSzPct val="100000"/>
-              <a:buChar char="•"/>
-            </a:pPr>
-            <a:r>
-              <a:rPr lang="en-US" sz="1350" dirty="0">
+              <a:rPr lang="en-US" sz="1200" b="1" dirty="0">
+                <a:solidFill>
+                  <a:srgbClr val="0064D9"/>
+                </a:solidFill>
+              </a:rPr>
+              <a:t>Descoberta  </a:t>
+            </a:r>
+            <a:r>
+              <a:rPr lang="en-US" sz="1200" dirty="0">
                 <a:solidFill>
                   <a:srgbClr val="1D2D3E"/>
                 </a:solidFill>
               </a:rPr>
-              <a:t>Usa local APIs </a:t>
-            </a:r>
-            <a:r>
-              <a:rPr lang="en-US" sz="1350" b="1" dirty="0">
+              <a:t>o </a:t>
+            </a:r>
+            <a:r>
+              <a:rPr lang="en-US" sz="1200" b="1" dirty="0">
                 <a:solidFill>
                   <a:srgbClr val="1D2D3E"/>
                 </a:solidFill>
               </a:rPr>
-              <a:t>só da plataforma</a:t>
-            </a:r>
-            <a:r>
-              <a:rPr lang="en-US" sz="1350" dirty="0">
+              <a:t>SAP Business Accelerator Hub</a:t>
+            </a:r>
+            <a:r>
+              <a:rPr lang="en-US" sz="1200" dirty="0">
                 <a:solidFill>
                   <a:srgbClr val="1D2D3E"/>
                 </a:solidFill>
               </a:rPr>
-              <a:t> ABAP</a:t>
-            </a:r>
-            <a:endParaRPr lang="en-US" sz="1400" dirty="0"/>
-          </a:p>
-          <a:p>
-            <a:pPr marL="177800" indent="-177800">
-              <a:spcAft>
-                <a:spcPts val="800"/>
-              </a:spcAft>
-              <a:buSzPct val="100000"/>
-              <a:buChar char="•"/>
-            </a:pPr>
-            <a:r>
-              <a:rPr lang="en-US" sz="1350" dirty="0">
+              <a:t> lista APIs, eventos e BAdIs; a view </a:t>
+            </a:r>
+            <a:r>
+              <a:rPr lang="en-US" sz="1200" b="1" dirty="0">
                 <a:solidFill>
                   <a:srgbClr val="1D2D3E"/>
                 </a:solidFill>
               </a:rPr>
-              <a:t>Acessa o S/4HANA por </a:t>
-            </a:r>
-            <a:r>
-              <a:rPr lang="en-US" sz="1350" b="1" dirty="0">
+              <a:t>Released Objects</a:t>
+            </a:r>
+            <a:r>
+              <a:rPr lang="en-US" sz="1200" dirty="0">
                 <a:solidFill>
                   <a:srgbClr val="1D2D3E"/>
                 </a:solidFill>
               </a:rPr>
-              <a:t>remote APIs</a:t>
-            </a:r>
-            <a:endParaRPr lang="en-US" sz="1400" dirty="0"/>
-          </a:p>
-          <a:p>
-            <a:pPr marL="177800" indent="-177800">
-              <a:spcAft>
-                <a:spcPts val="800"/>
-              </a:spcAft>
-              <a:buSzPct val="100000"/>
-              <a:buChar char="•"/>
-            </a:pPr>
-            <a:r>
-              <a:rPr lang="en-US" sz="1350" dirty="0">
-                <a:solidFill>
-                  <a:srgbClr val="1D2D3E"/>
-                </a:solidFill>
-              </a:rPr>
-              <a:t>Extensão </a:t>
-            </a:r>
-            <a:r>
-              <a:rPr lang="en-US" sz="1350" b="1" dirty="0">
-                <a:solidFill>
-                  <a:srgbClr val="1D2D3E"/>
-                </a:solidFill>
-              </a:rPr>
-              <a:t>side-by-side</a:t>
-            </a:r>
-            <a:r>
-              <a:rPr lang="en-US" sz="1350" dirty="0">
-                <a:solidFill>
-                  <a:srgbClr val="1D2D3E"/>
-                </a:solidFill>
-              </a:rPr>
-              <a:t>, desacoplada</a:t>
+              <a:t> do ADT também mostra elementos de dados, objetos de autorização e mais.</a:t>
             </a:r>
             <a:endParaRPr lang="en-US" sz="1400" dirty="0"/>
           </a:p>
@@ -8320,7 +10162,7 @@
       </p:sp>
       <p:pic>
         <p:nvPicPr>
-          <p:cNvPr id="14" name="Image 0" descr="preencoded.png">    </p:cNvPr>
+          <p:cNvPr id="15" name="Image 0" descr="preencoded.png">    </p:cNvPr>
           <p:cNvPicPr>
             <a:picLocks noChangeAspect="1"/>
           </p:cNvPicPr>
@@ -8334,7 +10176,7 @@
         </p:blipFill>
         <p:spPr>
           <a:xfrm>
-            <a:off x="6562192" y="3157823"/>
+            <a:off x="850392" y="2768727"/>
             <a:ext cx="256032" cy="256032"/>
           </a:xfrm>
           <a:prstGeom prst="rect">
@@ -8344,7 +10186,7 @@
       </p:pic>
       <p:pic>
         <p:nvPicPr>
-          <p:cNvPr id="15" name="Image 1" descr="preencoded.png">    </p:cNvPr>
+          <p:cNvPr id="16" name="Image 1" descr="preencoded.png">    </p:cNvPr>
           <p:cNvPicPr>
             <a:picLocks noChangeAspect="1"/>
           </p:cNvPicPr>
@@ -8358,8 +10200,56 @@
         </p:blipFill>
         <p:spPr>
           <a:xfrm>
-            <a:off x="877824" y="3157823"/>
+            <a:off x="4624730" y="2768727"/>
             <a:ext cx="256032" cy="256032"/>
+          </a:xfrm>
+          <a:prstGeom prst="rect">
+            <a:avLst/>
+          </a:prstGeom>
+        </p:spPr>
+      </p:pic>
+      <p:pic>
+        <p:nvPicPr>
+          <p:cNvPr id="17" name="Image 2" descr="preencoded.png">    </p:cNvPr>
+          <p:cNvPicPr>
+            <a:picLocks noChangeAspect="1"/>
+          </p:cNvPicPr>
+          <p:nvPr/>
+        </p:nvPicPr>
+        <p:blipFill>
+          <a:blip r:embed="rId3"/>
+          <a:stretch>
+            <a:fillRect/>
+          </a:stretch>
+        </p:blipFill>
+        <p:spPr>
+          <a:xfrm>
+            <a:off x="8399069" y="2768727"/>
+            <a:ext cx="256032" cy="256032"/>
+          </a:xfrm>
+          <a:prstGeom prst="rect">
+            <a:avLst/>
+          </a:prstGeom>
+        </p:spPr>
+      </p:pic>
+      <p:pic>
+        <p:nvPicPr>
+          <p:cNvPr id="18" name="Image 3" descr="preencoded.png">    </p:cNvPr>
+          <p:cNvPicPr>
+            <a:picLocks noChangeAspect="1"/>
+          </p:cNvPicPr>
+          <p:nvPr/>
+        </p:nvPicPr>
+        <p:blipFill>
+          <a:blip r:embed="rId4"/>
+          <a:stretch>
+            <a:fillRect/>
+          </a:stretch>
+        </p:blipFill>
+        <p:spPr>
+          <a:xfrm>
+            <a:off x="749808" y="4912233"/>
+            <a:ext cx="310896" cy="310896"/>
           </a:xfrm>
           <a:prstGeom prst="rect">
             <a:avLst/>
@@ -8468,7 +10358,7 @@
                   <a:srgbClr val="0064D9"/>
                 </a:solidFill>
               </a:rPr>
-              <a:t>APIS · REUSO</a:t>
+              <a:t>APIS · QUEM VÊ O QUÊ</a:t>
             </a:r>
             <a:endParaRPr lang="en-US" sz="1100" dirty="0"/>
           </a:p>
@@ -8506,7 +10396,7 @@
                   <a:srgbClr val="1D2D3E"/>
                 </a:solidFill>
               </a:rPr>
-              <a:t>Serviços técnicos que continuam disponíveis</a:t>
+              <a:t>Local APIs só existem dentro do S/4HANA</a:t>
             </a:r>
             <a:endParaRPr lang="en-US" sz="2800" dirty="0"/>
           </a:p>
@@ -8520,12 +10410,12 @@
         </p:nvSpPr>
         <p:spPr>
           <a:xfrm>
-            <a:off x="548640" y="1645920"/>
-            <a:ext cx="5410048" cy="3794760"/>
+            <a:off x="548640" y="2782919"/>
+            <a:ext cx="5410048" cy="2252282"/>
           </a:xfrm>
           <a:prstGeom prst="roundRect">
             <a:avLst>
-              <a:gd name="adj" fmla="val 2410"/>
+              <a:gd name="adj" fmla="val 4060"/>
             </a:avLst>
           </a:prstGeom>
           <a:solidFill>
@@ -8548,14 +10438,56 @@
       </p:sp>
       <p:sp>
         <p:nvSpPr>
-          <p:cNvPr id="5" name="Text 3"/>
+          <p:cNvPr id="5" name="Shape 3"/>
+          <p:cNvSpPr/>
+          <p:nvPr/>
+        </p:nvSpPr>
+        <p:spPr>
+          <a:xfrm>
+            <a:off x="548640" y="2782919"/>
+            <a:ext cx="5410048" cy="73152"/>
+          </a:xfrm>
+          <a:prstGeom prst="rect">
+            <a:avLst/>
+          </a:prstGeom>
+          <a:solidFill>
+            <a:srgbClr val="556B82"/>
+          </a:solidFill>
+          <a:ln/>
+        </p:spPr>
+      </p:sp>
+      <p:sp>
+        <p:nvSpPr>
+          <p:cNvPr id="6" name="Shape 4"/>
+          <p:cNvSpPr/>
+          <p:nvPr/>
+        </p:nvSpPr>
+        <p:spPr>
+          <a:xfrm>
+            <a:off x="777240" y="3057239"/>
+            <a:ext cx="457200" cy="457200"/>
+          </a:xfrm>
+          <a:prstGeom prst="roundRect">
+            <a:avLst>
+              <a:gd name="adj" fmla="val 22000"/>
+            </a:avLst>
+          </a:prstGeom>
+          <a:solidFill>
+            <a:srgbClr val="EFF1F2"/>
+          </a:solidFill>
+          <a:ln/>
+        </p:spPr>
+      </p:sp>
+      <p:sp>
+        <p:nvSpPr>
+          <p:cNvPr id="7" name="Text 5"/>
           <p:cNvSpPr txBox="1"/>
           <p:nvPr/>
         </p:nvSpPr>
         <p:spPr>
           <a:xfrm>
-            <a:off x="822960" y="1874520"/>
-            <a:ext cx="4861408" cy="365760"/>
+            <a:off x="1371600" y="3057239"/>
+            <a:ext cx="4404208" cy="457200"/>
           </a:xfrm>
           <a:prstGeom prst="rect">
             <a:avLst/>
@@ -8564,34 +10496,34 @@
           <a:ln/>
         </p:spPr>
         <p:txBody>
-          <a:bodyPr wrap="square" lIns="0" tIns="0" rIns="0" bIns="0" rtlCol="0" anchor="t"/>
+          <a:bodyPr wrap="square" lIns="0" tIns="0" rIns="0" bIns="0" rtlCol="0" anchor="ctr"/>
           <a:lstStyle/>
           <a:p>
             <a:pPr indent="0" marL="0">
               <a:buNone/>
             </a:pPr>
             <a:r>
-              <a:rPr lang="en-US" sz="1500" b="1" dirty="0">
-                <a:solidFill>
-                  <a:srgbClr val="0064D9"/>
-                </a:solidFill>
-              </a:rPr>
-              <a:t>ABAP platform</a:t>
-            </a:r>
-            <a:endParaRPr lang="en-US" sz="1500" dirty="0"/>
-          </a:p>
-        </p:txBody>
-      </p:sp>
-      <p:sp>
-        <p:nvSpPr>
-          <p:cNvPr id="6" name="Text 4"/>
+              <a:rPr lang="en-US" sz="1600" b="1" dirty="0">
+                <a:solidFill>
+                  <a:srgbClr val="223548"/>
+                </a:solidFill>
+              </a:rPr>
+              <a:t>S/4HANA Cloud, ABAP environment</a:t>
+            </a:r>
+            <a:endParaRPr lang="en-US" sz="1600" dirty="0"/>
+          </a:p>
+        </p:txBody>
+      </p:sp>
+      <p:sp>
+        <p:nvSpPr>
+          <p:cNvPr id="8" name="Text 6"/>
           <p:cNvSpPr txBox="1"/>
           <p:nvPr/>
         </p:nvSpPr>
         <p:spPr>
           <a:xfrm>
-            <a:off x="822960" y="2331720"/>
-            <a:ext cx="4861408" cy="2971800"/>
+            <a:off x="777240" y="3697319"/>
+            <a:ext cx="4952848" cy="1200722"/>
           </a:xfrm>
           <a:prstGeom prst="rect">
             <a:avLst/>
@@ -8611,12 +10543,28 @@
               <a:buChar char="•"/>
             </a:pPr>
             <a:r>
-              <a:rPr lang="en-US" sz="1300" dirty="0">
+              <a:rPr lang="en-US" sz="1350" dirty="0">
                 <a:solidFill>
                   <a:srgbClr val="1D2D3E"/>
                 </a:solidFill>
               </a:rPr>
-              <a:t>Email</a:t>
+              <a:t>Usa </a:t>
+            </a:r>
+            <a:r>
+              <a:rPr lang="en-US" sz="1350" b="1" dirty="0">
+                <a:solidFill>
+                  <a:srgbClr val="1D2D3E"/>
+                </a:solidFill>
+              </a:rPr>
+              <a:t>local APIs</a:t>
+            </a:r>
+            <a:r>
+              <a:rPr lang="en-US" sz="1350" dirty="0">
+                <a:solidFill>
+                  <a:srgbClr val="1D2D3E"/>
+                </a:solidFill>
+              </a:rPr>
+              <a:t> do S/4HANA e da plataforma</a:t>
             </a:r>
             <a:endParaRPr lang="en-US" sz="1400" dirty="0"/>
           </a:p>
@@ -8629,12 +10577,36 @@
               <a:buChar char="•"/>
             </a:pPr>
             <a:r>
-              <a:rPr lang="en-US" sz="1300" dirty="0">
+              <a:rPr lang="en-US" sz="1350" dirty="0">
                 <a:solidFill>
                   <a:srgbClr val="1D2D3E"/>
                 </a:solidFill>
               </a:rPr>
-              <a:t>Number ranges e change documents</a:t>
+              <a:t>Implementa extensões de </a:t>
+            </a:r>
+            <a:r>
+              <a:rPr lang="en-US" sz="1350" b="1" dirty="0">
+                <a:solidFill>
+                  <a:srgbClr val="1D2D3E"/>
+                </a:solidFill>
+              </a:rPr>
+              <a:t>key user</a:t>
+            </a:r>
+            <a:r>
+              <a:rPr lang="en-US" sz="1350" dirty="0">
+                <a:solidFill>
+                  <a:srgbClr val="1D2D3E"/>
+                </a:solidFill>
+              </a:rPr>
+              <a:t> e </a:t>
+            </a:r>
+            <a:r>
+              <a:rPr lang="en-US" sz="1350" b="1" dirty="0">
+                <a:solidFill>
+                  <a:srgbClr val="1D2D3E"/>
+                </a:solidFill>
+              </a:rPr>
+              <a:t>developer</a:t>
             </a:r>
             <a:endParaRPr lang="en-US" sz="1400" dirty="0"/>
           </a:p>
@@ -8647,85 +10619,47 @@
               <a:buChar char="•"/>
             </a:pPr>
             <a:r>
-              <a:rPr lang="en-US" sz="1300" dirty="0">
+              <a:rPr lang="en-US" sz="1350" dirty="0">
                 <a:solidFill>
                   <a:srgbClr val="1D2D3E"/>
                 </a:solidFill>
               </a:rPr>
-              <a:t>Fila de impressão</a:t>
+              <a:t>Extensão </a:t>
+            </a:r>
+            <a:r>
+              <a:rPr lang="en-US" sz="1350" b="1" dirty="0">
+                <a:solidFill>
+                  <a:srgbClr val="1D2D3E"/>
+                </a:solidFill>
+              </a:rPr>
+              <a:t>on-stack</a:t>
+            </a:r>
+            <a:r>
+              <a:rPr lang="en-US" sz="1350" dirty="0">
+                <a:solidFill>
+                  <a:srgbClr val="1D2D3E"/>
+                </a:solidFill>
+              </a:rPr>
+              <a:t>, perto dos dados</a:t>
             </a:r>
             <a:endParaRPr lang="en-US" sz="1400" dirty="0"/>
           </a:p>
-          <a:p>
-            <a:pPr marL="177800" indent="-177800">
-              <a:spcAft>
-                <a:spcPts val="800"/>
-              </a:spcAft>
-              <a:buSzPct val="100000"/>
-              <a:buChar char="•"/>
-            </a:pPr>
-            <a:r>
-              <a:rPr lang="en-US" sz="1300" dirty="0">
-                <a:solidFill>
-                  <a:srgbClr val="1D2D3E"/>
-                </a:solidFill>
-              </a:rPr>
-              <a:t>Application jobs e logs</a:t>
-            </a:r>
-            <a:endParaRPr lang="en-US" sz="1400" dirty="0"/>
-          </a:p>
-          <a:p>
-            <a:pPr marL="177800" indent="-177800">
-              <a:spcAft>
-                <a:spcPts val="800"/>
-              </a:spcAft>
-              <a:buSzPct val="100000"/>
-              <a:buChar char="•"/>
-            </a:pPr>
-            <a:r>
-              <a:rPr lang="en-US" sz="1300" dirty="0">
-                <a:solidFill>
-                  <a:srgbClr val="1D2D3E"/>
-                </a:solidFill>
-              </a:rPr>
-              <a:t>Tradução</a:t>
-            </a:r>
-            <a:endParaRPr lang="en-US" sz="1400" dirty="0"/>
-          </a:p>
-          <a:p>
-            <a:pPr marL="177800" indent="-177800">
-              <a:spcAft>
-                <a:spcPts val="800"/>
-              </a:spcAft>
-              <a:buSzPct val="100000"/>
-              <a:buChar char="•"/>
-            </a:pPr>
-            <a:r>
-              <a:rPr lang="en-US" sz="1300" dirty="0">
-                <a:solidFill>
-                  <a:srgbClr val="1D2D3E"/>
-                </a:solidFill>
-              </a:rPr>
-              <a:t>Unidades, fusos e câmbio</a:t>
-            </a:r>
-            <a:endParaRPr lang="en-US" sz="1400" dirty="0"/>
-          </a:p>
-        </p:txBody>
-      </p:sp>
-      <p:sp>
-        <p:nvSpPr>
-          <p:cNvPr id="7" name="Shape 5"/>
+        </p:txBody>
+      </p:sp>
+      <p:sp>
+        <p:nvSpPr>
+          <p:cNvPr id="9" name="Shape 7"/>
           <p:cNvSpPr/>
           <p:nvPr/>
         </p:nvSpPr>
         <p:spPr>
           <a:xfrm>
-            <a:off x="6233008" y="1645920"/>
-            <a:ext cx="5410048" cy="3794760"/>
+            <a:off x="6233008" y="2782919"/>
+            <a:ext cx="5410048" cy="2252282"/>
           </a:xfrm>
           <a:prstGeom prst="roundRect">
             <a:avLst>
-              <a:gd name="adj" fmla="val 2410"/>
+              <a:gd name="adj" fmla="val 4060"/>
             </a:avLst>
           </a:prstGeom>
           <a:solidFill>
@@ -8748,14 +10682,56 @@
       </p:sp>
       <p:sp>
         <p:nvSpPr>
-          <p:cNvPr id="8" name="Text 6"/>
+          <p:cNvPr id="10" name="Shape 8"/>
+          <p:cNvSpPr/>
+          <p:nvPr/>
+        </p:nvSpPr>
+        <p:spPr>
+          <a:xfrm>
+            <a:off x="6233008" y="2782919"/>
+            <a:ext cx="5410048" cy="73152"/>
+          </a:xfrm>
+          <a:prstGeom prst="rect">
+            <a:avLst/>
+          </a:prstGeom>
+          <a:solidFill>
+            <a:srgbClr val="556B82"/>
+          </a:solidFill>
+          <a:ln/>
+        </p:spPr>
+      </p:sp>
+      <p:sp>
+        <p:nvSpPr>
+          <p:cNvPr id="11" name="Shape 9"/>
+          <p:cNvSpPr/>
+          <p:nvPr/>
+        </p:nvSpPr>
+        <p:spPr>
+          <a:xfrm>
+            <a:off x="6461608" y="3057239"/>
+            <a:ext cx="457200" cy="457200"/>
+          </a:xfrm>
+          <a:prstGeom prst="roundRect">
+            <a:avLst>
+              <a:gd name="adj" fmla="val 22000"/>
+            </a:avLst>
+          </a:prstGeom>
+          <a:solidFill>
+            <a:srgbClr val="EFF1F2"/>
+          </a:solidFill>
+          <a:ln/>
+        </p:spPr>
+      </p:sp>
+      <p:sp>
+        <p:nvSpPr>
+          <p:cNvPr id="12" name="Text 10"/>
           <p:cNvSpPr txBox="1"/>
           <p:nvPr/>
         </p:nvSpPr>
         <p:spPr>
           <a:xfrm>
-            <a:off x="6507328" y="1874520"/>
-            <a:ext cx="4861408" cy="365760"/>
+            <a:off x="7055968" y="3057239"/>
+            <a:ext cx="4404208" cy="457200"/>
           </a:xfrm>
           <a:prstGeom prst="rect">
             <a:avLst/>
@@ -8764,34 +10740,34 @@
           <a:ln/>
         </p:spPr>
         <p:txBody>
-          <a:bodyPr wrap="square" lIns="0" tIns="0" rIns="0" bIns="0" rtlCol="0" anchor="t"/>
+          <a:bodyPr wrap="square" lIns="0" tIns="0" rIns="0" bIns="0" rtlCol="0" anchor="ctr"/>
           <a:lstStyle/>
           <a:p>
             <a:pPr indent="0" marL="0">
               <a:buNone/>
             </a:pPr>
             <a:r>
-              <a:rPr lang="en-US" sz="1500" b="1" dirty="0">
-                <a:solidFill>
-                  <a:srgbClr val="0064D9"/>
-                </a:solidFill>
-              </a:rPr>
-              <a:t>SAP BTP</a:t>
-            </a:r>
-            <a:endParaRPr lang="en-US" sz="1500" dirty="0"/>
-          </a:p>
-        </p:txBody>
-      </p:sp>
-      <p:sp>
-        <p:nvSpPr>
-          <p:cNvPr id="9" name="Text 7"/>
+              <a:rPr lang="en-US" sz="1600" b="1" dirty="0">
+                <a:solidFill>
+                  <a:srgbClr val="223548"/>
+                </a:solidFill>
+              </a:rPr>
+              <a:t>SAP BTP, ABAP environment</a:t>
+            </a:r>
+            <a:endParaRPr lang="en-US" sz="1600" dirty="0"/>
+          </a:p>
+        </p:txBody>
+      </p:sp>
+      <p:sp>
+        <p:nvSpPr>
+          <p:cNvPr id="13" name="Text 11"/>
           <p:cNvSpPr txBox="1"/>
           <p:nvPr/>
         </p:nvSpPr>
         <p:spPr>
           <a:xfrm>
-            <a:off x="6507328" y="2331720"/>
-            <a:ext cx="4861408" cy="2971800"/>
+            <a:off x="6461608" y="3697319"/>
+            <a:ext cx="4952848" cy="1200722"/>
           </a:xfrm>
           <a:prstGeom prst="rect">
             <a:avLst/>
@@ -8811,12 +10787,28 @@
               <a:buChar char="•"/>
             </a:pPr>
             <a:r>
-              <a:rPr lang="en-US" sz="1300" dirty="0">
+              <a:rPr lang="en-US" sz="1350" dirty="0">
                 <a:solidFill>
                   <a:srgbClr val="1D2D3E"/>
                 </a:solidFill>
               </a:rPr>
-              <a:t>Forms by Adobe</a:t>
+              <a:t>Usa local APIs </a:t>
+            </a:r>
+            <a:r>
+              <a:rPr lang="en-US" sz="1350" b="1" dirty="0">
+                <a:solidFill>
+                  <a:srgbClr val="1D2D3E"/>
+                </a:solidFill>
+              </a:rPr>
+              <a:t>só da plataforma</a:t>
+            </a:r>
+            <a:r>
+              <a:rPr lang="en-US" sz="1350" dirty="0">
+                <a:solidFill>
+                  <a:srgbClr val="1D2D3E"/>
+                </a:solidFill>
+              </a:rPr>
+              <a:t> ABAP</a:t>
             </a:r>
             <a:endParaRPr lang="en-US" sz="1400" dirty="0"/>
           </a:p>
@@ -8829,12 +10821,20 @@
               <a:buChar char="•"/>
             </a:pPr>
             <a:r>
-              <a:rPr lang="en-US" sz="1300" dirty="0">
+              <a:rPr lang="en-US" sz="1350" dirty="0">
                 <a:solidFill>
                   <a:srgbClr val="1D2D3E"/>
                 </a:solidFill>
               </a:rPr>
-              <a:t>Document Management Service</a:t>
+              <a:t>Acessa o S/4HANA por </a:t>
+            </a:r>
+            <a:r>
+              <a:rPr lang="en-US" sz="1350" b="1" dirty="0">
+                <a:solidFill>
+                  <a:srgbClr val="1D2D3E"/>
+                </a:solidFill>
+              </a:rPr>
+              <a:t>remote APIs</a:t>
             </a:r>
             <a:endParaRPr lang="en-US" sz="1400" dirty="0"/>
           </a:p>
@@ -8847,112 +10847,28 @@
               <a:buChar char="•"/>
             </a:pPr>
             <a:r>
-              <a:rPr lang="en-US" sz="1300" dirty="0">
+              <a:rPr lang="en-US" sz="1350" dirty="0">
                 <a:solidFill>
                   <a:srgbClr val="1D2D3E"/>
                 </a:solidFill>
               </a:rPr>
-              <a:t>Workflow Management</a:t>
-            </a:r>
-            <a:endParaRPr lang="en-US" sz="1400" dirty="0"/>
-          </a:p>
-          <a:p>
-            <a:pPr marL="177800" indent="-177800">
-              <a:spcAft>
-                <a:spcPts val="800"/>
-              </a:spcAft>
-              <a:buSzPct val="100000"/>
-              <a:buChar char="•"/>
-            </a:pPr>
-            <a:r>
-              <a:rPr lang="en-US" sz="1300" dirty="0">
+              <a:t>Extensão </a:t>
+            </a:r>
+            <a:r>
+              <a:rPr lang="en-US" sz="1350" b="1" dirty="0">
                 <a:solidFill>
                   <a:srgbClr val="1D2D3E"/>
                 </a:solidFill>
               </a:rPr>
-              <a:t>Business Rules</a:t>
-            </a:r>
-            <a:endParaRPr lang="en-US" sz="1400" dirty="0"/>
-          </a:p>
-        </p:txBody>
-      </p:sp>
-      <p:sp>
-        <p:nvSpPr>
-          <p:cNvPr id="10" name="Shape 8"/>
-          <p:cNvSpPr/>
-          <p:nvPr/>
-        </p:nvSpPr>
-        <p:spPr>
-          <a:xfrm>
-            <a:off x="548640" y="5605272"/>
-            <a:ext cx="11094415" cy="566928"/>
-          </a:xfrm>
-          <a:prstGeom prst="roundRect">
-            <a:avLst>
-              <a:gd name="adj" fmla="val 12903"/>
-            </a:avLst>
-          </a:prstGeom>
-          <a:solidFill>
-            <a:srgbClr val="E1F4FF"/>
-          </a:solidFill>
-          <a:ln/>
-        </p:spPr>
-      </p:sp>
-      <p:sp>
-        <p:nvSpPr>
-          <p:cNvPr id="11" name="Text 9"/>
-          <p:cNvSpPr txBox="1"/>
-          <p:nvPr/>
-        </p:nvSpPr>
-        <p:spPr>
-          <a:xfrm>
-            <a:off x="1207008" y="5605272"/>
-            <a:ext cx="10225735" cy="566928"/>
-          </a:xfrm>
-          <a:prstGeom prst="rect">
-            <a:avLst/>
-          </a:prstGeom>
-          <a:noFill/>
-          <a:ln/>
-        </p:spPr>
-        <p:txBody>
-          <a:bodyPr wrap="square" lIns="0" tIns="0" rIns="0" bIns="0" rtlCol="0" anchor="ctr"/>
-          <a:lstStyle/>
-          <a:p>
-            <a:pPr indent="0" marL="0">
-              <a:buNone/>
-            </a:pPr>
-            <a:r>
-              <a:rPr lang="en-US" sz="1200" b="1" dirty="0">
-                <a:solidFill>
-                  <a:srgbClr val="0064D9"/>
-                </a:solidFill>
-              </a:rPr>
-              <a:t>Wrappers  </a:t>
-            </a:r>
-            <a:r>
-              <a:rPr lang="en-US" sz="1200" dirty="0">
+              <a:t>side-by-side</a:t>
+            </a:r>
+            <a:r>
+              <a:rPr lang="en-US" sz="1350" dirty="0">
                 <a:solidFill>
                   <a:srgbClr val="1D2D3E"/>
                 </a:solidFill>
               </a:rPr>
-              <a:t>quando falta uma API liberada no Private Edition ou on-premise, um </a:t>
-            </a:r>
-            <a:r>
-              <a:rPr lang="en-US" sz="1200" b="1" dirty="0">
-                <a:solidFill>
-                  <a:srgbClr val="1D2D3E"/>
-                </a:solidFill>
-              </a:rPr>
-              <a:t>wrapper</a:t>
-            </a:r>
-            <a:r>
-              <a:rPr lang="en-US" sz="1200" dirty="0">
-                <a:solidFill>
-                  <a:srgbClr val="1D2D3E"/>
-                </a:solidFill>
-              </a:rPr>
-              <a:t> (Tier 2) a expõe. Detalhes na aula 05.05.</a:t>
+              <a:t>, desacoplada</a:t>
             </a:r>
             <a:endParaRPr lang="en-US" sz="1400" dirty="0"/>
           </a:p>
@@ -8960,7 +10876,7 @@
       </p:sp>
       <p:pic>
         <p:nvPicPr>
-          <p:cNvPr id="12" name="Image 0" descr="preencoded.png">    </p:cNvPr>
+          <p:cNvPr id="14" name="Image 0" descr="preencoded.png">    </p:cNvPr>
           <p:cNvPicPr>
             <a:picLocks noChangeAspect="1"/>
           </p:cNvPicPr>
@@ -8974,8 +10890,32 @@
         </p:blipFill>
         <p:spPr>
           <a:xfrm>
-            <a:off x="749808" y="5733288"/>
-            <a:ext cx="310896" cy="310896"/>
+            <a:off x="877824" y="3157823"/>
+            <a:ext cx="256032" cy="256032"/>
+          </a:xfrm>
+          <a:prstGeom prst="rect">
+            <a:avLst/>
+          </a:prstGeom>
+        </p:spPr>
+      </p:pic>
+      <p:pic>
+        <p:nvPicPr>
+          <p:cNvPr id="15" name="Image 1" descr="preencoded.png">    </p:cNvPr>
+          <p:cNvPicPr>
+            <a:picLocks noChangeAspect="1"/>
+          </p:cNvPicPr>
+          <p:nvPr/>
+        </p:nvPicPr>
+        <p:blipFill>
+          <a:blip r:embed="rId2"/>
+          <a:stretch>
+            <a:fillRect/>
+          </a:stretch>
+        </p:blipFill>
+        <p:spPr>
+          <a:xfrm>
+            <a:off x="6562192" y="3157823"/>
+            <a:ext cx="256032" cy="256032"/>
           </a:xfrm>
           <a:prstGeom prst="rect">
             <a:avLst/>
@@ -9055,13 +10995,123 @@
       <p:sp>
         <p:nvSpPr>
           <p:cNvPr id="2" name="Text 0"/>
+          <p:cNvSpPr/>
+          <p:nvPr>
+            <p:ph idx="100" type="body" hasCustomPrompt="1"/>
+          </p:nvPr>
+        </p:nvSpPr>
+        <p:spPr>
+          <a:xfrm>
+            <a:off x="548640" y="411480"/>
+            <a:ext cx="11094415" cy="274320"/>
+          </a:xfrm>
+          <a:prstGeom prst="rect">
+            <a:avLst/>
+          </a:prstGeom>
+          <a:noFill/>
+          <a:ln/>
+        </p:spPr>
+        <p:txBody>
+          <a:bodyPr wrap="square" lIns="0" tIns="0" rIns="0" bIns="0" rtlCol="0" anchor="ctr"/>
+          <a:lstStyle/>
+          <a:p>
+            <a:pPr algn="l" indent="0" marL="0">
+              <a:buNone/>
+            </a:pPr>
+            <a:r>
+              <a:rPr lang="en-US" sz="1100" b="1" spc="150" kern="0" dirty="0">
+                <a:solidFill>
+                  <a:srgbClr val="0064D9"/>
+                </a:solidFill>
+              </a:rPr>
+              <a:t>APIS · REUSO</a:t>
+            </a:r>
+            <a:endParaRPr lang="en-US" sz="1100" dirty="0"/>
+          </a:p>
+        </p:txBody>
+      </p:sp>
+      <p:sp>
+        <p:nvSpPr>
+          <p:cNvPr id="3" name="Text 0"/>
+          <p:cNvSpPr/>
+          <p:nvPr>
+            <p:ph idx="101" type="title" hasCustomPrompt="1"/>
+          </p:nvPr>
+        </p:nvSpPr>
+        <p:spPr>
+          <a:xfrm>
+            <a:off x="548640" y="731520"/>
+            <a:ext cx="11094415" cy="640080"/>
+          </a:xfrm>
+          <a:prstGeom prst="rect">
+            <a:avLst/>
+          </a:prstGeom>
+          <a:noFill/>
+          <a:ln/>
+        </p:spPr>
+        <p:txBody>
+          <a:bodyPr wrap="square" lIns="0" tIns="0" rIns="0" bIns="0" rtlCol="0" anchor="ctr"/>
+          <a:lstStyle/>
+          <a:p>
+            <a:pPr algn="l" indent="0" marL="0">
+              <a:buNone/>
+            </a:pPr>
+            <a:r>
+              <a:rPr lang="en-US" sz="2800" b="1" dirty="0">
+                <a:solidFill>
+                  <a:srgbClr val="1D2D3E"/>
+                </a:solidFill>
+              </a:rPr>
+              <a:t>Serviços técnicos que continuam disponíveis</a:t>
+            </a:r>
+            <a:endParaRPr lang="en-US" sz="2800" dirty="0"/>
+          </a:p>
+        </p:txBody>
+      </p:sp>
+      <p:sp>
+        <p:nvSpPr>
+          <p:cNvPr id="4" name="Shape 2"/>
+          <p:cNvSpPr/>
+          <p:nvPr/>
+        </p:nvSpPr>
+        <p:spPr>
+          <a:xfrm>
+            <a:off x="548640" y="1645920"/>
+            <a:ext cx="5410048" cy="3794760"/>
+          </a:xfrm>
+          <a:prstGeom prst="roundRect">
+            <a:avLst>
+              <a:gd name="adj" fmla="val 2410"/>
+            </a:avLst>
+          </a:prstGeom>
+          <a:solidFill>
+            <a:srgbClr val="FFFFFF"/>
+          </a:solidFill>
+          <a:ln w="9525">
+            <a:solidFill>
+              <a:srgbClr val="E5E5E5"/>
+            </a:solidFill>
+            <a:prstDash val="solid"/>
+          </a:ln>
+          <a:effectLst>
+            <a:outerShdw sx="100000" sy="100000" kx="0" ky="0" algn="bl" rotWithShape="0" blurRad="63500" dist="12700" dir="5400000">
+              <a:srgbClr val="1D2D3E">
+                <a:alpha val="8000"/>
+              </a:srgbClr>
+            </a:outerShdw>
+          </a:effectLst>
+        </p:spPr>
+      </p:sp>
+      <p:sp>
+        <p:nvSpPr>
+          <p:cNvPr id="5" name="Text 3"/>
           <p:cNvSpPr txBox="1"/>
           <p:nvPr/>
         </p:nvSpPr>
         <p:spPr>
           <a:xfrm>
-            <a:off x="731520" y="502920"/>
-            <a:ext cx="7315200" cy="320040"/>
+            <a:off x="822960" y="1874520"/>
+            <a:ext cx="4861408" cy="365760"/>
           </a:xfrm>
           <a:prstGeom prst="rect">
             <a:avLst/>
@@ -9077,27 +11127,343 @@
               <a:buNone/>
             </a:pPr>
             <a:r>
-              <a:rPr lang="en-US" sz="1300" b="1" spc="200" kern="0" dirty="0">
-                <a:solidFill>
-                  <a:srgbClr val="89D1FF"/>
-                </a:solidFill>
-              </a:rPr>
-              <a:t>RESUMO DA AULA</a:t>
-            </a:r>
-            <a:endParaRPr lang="en-US" sz="1300" dirty="0"/>
-          </a:p>
-        </p:txBody>
-      </p:sp>
-      <p:sp>
-        <p:nvSpPr>
-          <p:cNvPr id="3" name="Text 1"/>
+              <a:rPr lang="en-US" sz="1500" b="1" dirty="0">
+                <a:solidFill>
+                  <a:srgbClr val="0064D9"/>
+                </a:solidFill>
+              </a:rPr>
+              <a:t>ABAP platform</a:t>
+            </a:r>
+            <a:endParaRPr lang="en-US" sz="1500" dirty="0"/>
+          </a:p>
+        </p:txBody>
+      </p:sp>
+      <p:sp>
+        <p:nvSpPr>
+          <p:cNvPr id="6" name="Text 4"/>
           <p:cNvSpPr txBox="1"/>
           <p:nvPr/>
         </p:nvSpPr>
         <p:spPr>
           <a:xfrm>
-            <a:off x="731520" y="868680"/>
-            <a:ext cx="10698480" cy="731520"/>
+            <a:off x="822960" y="2331720"/>
+            <a:ext cx="4861408" cy="2971800"/>
+          </a:xfrm>
+          <a:prstGeom prst="rect">
+            <a:avLst/>
+          </a:prstGeom>
+          <a:noFill/>
+          <a:ln/>
+        </p:spPr>
+        <p:txBody>
+          <a:bodyPr wrap="square" lIns="0" tIns="0" rIns="0" bIns="0" rtlCol="0" anchor="t"/>
+          <a:lstStyle/>
+          <a:p>
+            <a:pPr marL="177800" indent="-177800">
+              <a:spcAft>
+                <a:spcPts val="800"/>
+              </a:spcAft>
+              <a:buSzPct val="100000"/>
+              <a:buChar char="•"/>
+            </a:pPr>
+            <a:r>
+              <a:rPr lang="en-US" sz="1300" dirty="0">
+                <a:solidFill>
+                  <a:srgbClr val="1D2D3E"/>
+                </a:solidFill>
+              </a:rPr>
+              <a:t>Email</a:t>
+            </a:r>
+            <a:endParaRPr lang="en-US" sz="1400" dirty="0"/>
+          </a:p>
+          <a:p>
+            <a:pPr marL="177800" indent="-177800">
+              <a:spcAft>
+                <a:spcPts val="800"/>
+              </a:spcAft>
+              <a:buSzPct val="100000"/>
+              <a:buChar char="•"/>
+            </a:pPr>
+            <a:r>
+              <a:rPr lang="en-US" sz="1300" dirty="0">
+                <a:solidFill>
+                  <a:srgbClr val="1D2D3E"/>
+                </a:solidFill>
+              </a:rPr>
+              <a:t>Number ranges e change documents</a:t>
+            </a:r>
+            <a:endParaRPr lang="en-US" sz="1400" dirty="0"/>
+          </a:p>
+          <a:p>
+            <a:pPr marL="177800" indent="-177800">
+              <a:spcAft>
+                <a:spcPts val="800"/>
+              </a:spcAft>
+              <a:buSzPct val="100000"/>
+              <a:buChar char="•"/>
+            </a:pPr>
+            <a:r>
+              <a:rPr lang="en-US" sz="1300" dirty="0">
+                <a:solidFill>
+                  <a:srgbClr val="1D2D3E"/>
+                </a:solidFill>
+              </a:rPr>
+              <a:t>Fila de impressão</a:t>
+            </a:r>
+            <a:endParaRPr lang="en-US" sz="1400" dirty="0"/>
+          </a:p>
+          <a:p>
+            <a:pPr marL="177800" indent="-177800">
+              <a:spcAft>
+                <a:spcPts val="800"/>
+              </a:spcAft>
+              <a:buSzPct val="100000"/>
+              <a:buChar char="•"/>
+            </a:pPr>
+            <a:r>
+              <a:rPr lang="en-US" sz="1300" dirty="0">
+                <a:solidFill>
+                  <a:srgbClr val="1D2D3E"/>
+                </a:solidFill>
+              </a:rPr>
+              <a:t>Application jobs e logs</a:t>
+            </a:r>
+            <a:endParaRPr lang="en-US" sz="1400" dirty="0"/>
+          </a:p>
+          <a:p>
+            <a:pPr marL="177800" indent="-177800">
+              <a:spcAft>
+                <a:spcPts val="800"/>
+              </a:spcAft>
+              <a:buSzPct val="100000"/>
+              <a:buChar char="•"/>
+            </a:pPr>
+            <a:r>
+              <a:rPr lang="en-US" sz="1300" dirty="0">
+                <a:solidFill>
+                  <a:srgbClr val="1D2D3E"/>
+                </a:solidFill>
+              </a:rPr>
+              <a:t>Tradução</a:t>
+            </a:r>
+            <a:endParaRPr lang="en-US" sz="1400" dirty="0"/>
+          </a:p>
+          <a:p>
+            <a:pPr marL="177800" indent="-177800">
+              <a:spcAft>
+                <a:spcPts val="800"/>
+              </a:spcAft>
+              <a:buSzPct val="100000"/>
+              <a:buChar char="•"/>
+            </a:pPr>
+            <a:r>
+              <a:rPr lang="en-US" sz="1300" dirty="0">
+                <a:solidFill>
+                  <a:srgbClr val="1D2D3E"/>
+                </a:solidFill>
+              </a:rPr>
+              <a:t>Unidades, fusos e câmbio</a:t>
+            </a:r>
+            <a:endParaRPr lang="en-US" sz="1400" dirty="0"/>
+          </a:p>
+        </p:txBody>
+      </p:sp>
+      <p:sp>
+        <p:nvSpPr>
+          <p:cNvPr id="7" name="Shape 5"/>
+          <p:cNvSpPr/>
+          <p:nvPr/>
+        </p:nvSpPr>
+        <p:spPr>
+          <a:xfrm>
+            <a:off x="6233008" y="1645920"/>
+            <a:ext cx="5410048" cy="3794760"/>
+          </a:xfrm>
+          <a:prstGeom prst="roundRect">
+            <a:avLst>
+              <a:gd name="adj" fmla="val 2410"/>
+            </a:avLst>
+          </a:prstGeom>
+          <a:solidFill>
+            <a:srgbClr val="FFFFFF"/>
+          </a:solidFill>
+          <a:ln w="9525">
+            <a:solidFill>
+              <a:srgbClr val="E5E5E5"/>
+            </a:solidFill>
+            <a:prstDash val="solid"/>
+          </a:ln>
+          <a:effectLst>
+            <a:outerShdw sx="100000" sy="100000" kx="0" ky="0" algn="bl" rotWithShape="0" blurRad="63500" dist="12700" dir="5400000">
+              <a:srgbClr val="1D2D3E">
+                <a:alpha val="8000"/>
+              </a:srgbClr>
+            </a:outerShdw>
+          </a:effectLst>
+        </p:spPr>
+      </p:sp>
+      <p:sp>
+        <p:nvSpPr>
+          <p:cNvPr id="8" name="Text 6"/>
+          <p:cNvSpPr txBox="1"/>
+          <p:nvPr/>
+        </p:nvSpPr>
+        <p:spPr>
+          <a:xfrm>
+            <a:off x="6507328" y="1874520"/>
+            <a:ext cx="4861408" cy="365760"/>
+          </a:xfrm>
+          <a:prstGeom prst="rect">
+            <a:avLst/>
+          </a:prstGeom>
+          <a:noFill/>
+          <a:ln/>
+        </p:spPr>
+        <p:txBody>
+          <a:bodyPr wrap="square" lIns="0" tIns="0" rIns="0" bIns="0" rtlCol="0" anchor="t"/>
+          <a:lstStyle/>
+          <a:p>
+            <a:pPr indent="0" marL="0">
+              <a:buNone/>
+            </a:pPr>
+            <a:r>
+              <a:rPr lang="en-US" sz="1500" b="1" dirty="0">
+                <a:solidFill>
+                  <a:srgbClr val="0064D9"/>
+                </a:solidFill>
+              </a:rPr>
+              <a:t>SAP BTP</a:t>
+            </a:r>
+            <a:endParaRPr lang="en-US" sz="1500" dirty="0"/>
+          </a:p>
+        </p:txBody>
+      </p:sp>
+      <p:sp>
+        <p:nvSpPr>
+          <p:cNvPr id="9" name="Text 7"/>
+          <p:cNvSpPr txBox="1"/>
+          <p:nvPr/>
+        </p:nvSpPr>
+        <p:spPr>
+          <a:xfrm>
+            <a:off x="6507328" y="2331720"/>
+            <a:ext cx="4861408" cy="2971800"/>
+          </a:xfrm>
+          <a:prstGeom prst="rect">
+            <a:avLst/>
+          </a:prstGeom>
+          <a:noFill/>
+          <a:ln/>
+        </p:spPr>
+        <p:txBody>
+          <a:bodyPr wrap="square" lIns="0" tIns="0" rIns="0" bIns="0" rtlCol="0" anchor="t"/>
+          <a:lstStyle/>
+          <a:p>
+            <a:pPr marL="177800" indent="-177800">
+              <a:spcAft>
+                <a:spcPts val="800"/>
+              </a:spcAft>
+              <a:buSzPct val="100000"/>
+              <a:buChar char="•"/>
+            </a:pPr>
+            <a:r>
+              <a:rPr lang="en-US" sz="1300" dirty="0">
+                <a:solidFill>
+                  <a:srgbClr val="1D2D3E"/>
+                </a:solidFill>
+              </a:rPr>
+              <a:t>Forms by Adobe</a:t>
+            </a:r>
+            <a:endParaRPr lang="en-US" sz="1400" dirty="0"/>
+          </a:p>
+          <a:p>
+            <a:pPr marL="177800" indent="-177800">
+              <a:spcAft>
+                <a:spcPts val="800"/>
+              </a:spcAft>
+              <a:buSzPct val="100000"/>
+              <a:buChar char="•"/>
+            </a:pPr>
+            <a:r>
+              <a:rPr lang="en-US" sz="1300" dirty="0">
+                <a:solidFill>
+                  <a:srgbClr val="1D2D3E"/>
+                </a:solidFill>
+              </a:rPr>
+              <a:t>Document Management Service</a:t>
+            </a:r>
+            <a:endParaRPr lang="en-US" sz="1400" dirty="0"/>
+          </a:p>
+          <a:p>
+            <a:pPr marL="177800" indent="-177800">
+              <a:spcAft>
+                <a:spcPts val="800"/>
+              </a:spcAft>
+              <a:buSzPct val="100000"/>
+              <a:buChar char="•"/>
+            </a:pPr>
+            <a:r>
+              <a:rPr lang="en-US" sz="1300" dirty="0">
+                <a:solidFill>
+                  <a:srgbClr val="1D2D3E"/>
+                </a:solidFill>
+              </a:rPr>
+              <a:t>Workflow Management</a:t>
+            </a:r>
+            <a:endParaRPr lang="en-US" sz="1400" dirty="0"/>
+          </a:p>
+          <a:p>
+            <a:pPr marL="177800" indent="-177800">
+              <a:spcAft>
+                <a:spcPts val="800"/>
+              </a:spcAft>
+              <a:buSzPct val="100000"/>
+              <a:buChar char="•"/>
+            </a:pPr>
+            <a:r>
+              <a:rPr lang="en-US" sz="1300" dirty="0">
+                <a:solidFill>
+                  <a:srgbClr val="1D2D3E"/>
+                </a:solidFill>
+              </a:rPr>
+              <a:t>Business Rules</a:t>
+            </a:r>
+            <a:endParaRPr lang="en-US" sz="1400" dirty="0"/>
+          </a:p>
+        </p:txBody>
+      </p:sp>
+      <p:sp>
+        <p:nvSpPr>
+          <p:cNvPr id="10" name="Shape 8"/>
+          <p:cNvSpPr/>
+          <p:nvPr/>
+        </p:nvSpPr>
+        <p:spPr>
+          <a:xfrm>
+            <a:off x="548640" y="5605272"/>
+            <a:ext cx="11094415" cy="566928"/>
+          </a:xfrm>
+          <a:prstGeom prst="roundRect">
+            <a:avLst>
+              <a:gd name="adj" fmla="val 12903"/>
+            </a:avLst>
+          </a:prstGeom>
+          <a:solidFill>
+            <a:srgbClr val="E1F4FF"/>
+          </a:solidFill>
+          <a:ln/>
+        </p:spPr>
+      </p:sp>
+      <p:sp>
+        <p:nvSpPr>
+          <p:cNvPr id="11" name="Text 9"/>
+          <p:cNvSpPr txBox="1"/>
+          <p:nvPr/>
+        </p:nvSpPr>
+        <p:spPr>
+          <a:xfrm>
+            <a:off x="1207008" y="5605272"/>
+            <a:ext cx="10225735" cy="566928"/>
           </a:xfrm>
           <a:prstGeom prst="rect">
             <a:avLst/>
@@ -9113,504 +11479,44 @@
               <a:buNone/>
             </a:pPr>
             <a:r>
-              <a:rPr lang="en-US" sz="3200" b="1" dirty="0">
-                <a:solidFill>
-                  <a:srgbClr val="FFFFFF"/>
-                </a:solidFill>
-              </a:rPr>
-              <a:t>O que aprendemos na aula 05.03</a:t>
-            </a:r>
-            <a:endParaRPr lang="en-US" sz="3200" dirty="0"/>
-          </a:p>
-        </p:txBody>
-      </p:sp>
-      <p:sp>
-        <p:nvSpPr>
-          <p:cNvPr id="4" name="Shape 2"/>
-          <p:cNvSpPr/>
-          <p:nvPr/>
-        </p:nvSpPr>
-        <p:spPr>
-          <a:xfrm>
-            <a:off x="731520" y="1874520"/>
-            <a:ext cx="438912" cy="438912"/>
-          </a:xfrm>
-          <a:prstGeom prst="roundRect">
-            <a:avLst>
-              <a:gd name="adj" fmla="val 20833"/>
-            </a:avLst>
-          </a:prstGeom>
-          <a:solidFill>
-            <a:srgbClr val="0070F2"/>
-          </a:solidFill>
-          <a:ln/>
-        </p:spPr>
-      </p:sp>
-      <p:sp>
-        <p:nvSpPr>
-          <p:cNvPr id="5" name="Text 3"/>
-          <p:cNvSpPr txBox="1"/>
-          <p:nvPr/>
-        </p:nvSpPr>
-        <p:spPr>
-          <a:xfrm>
-            <a:off x="1353312" y="1819656"/>
-            <a:ext cx="4663440" cy="868680"/>
-          </a:xfrm>
-          <a:prstGeom prst="rect">
-            <a:avLst/>
-          </a:prstGeom>
-          <a:noFill/>
-          <a:ln/>
-        </p:spPr>
-        <p:txBody>
-          <a:bodyPr wrap="square" lIns="0" tIns="0" rIns="0" bIns="0" rtlCol="0" anchor="t"/>
-          <a:lstStyle/>
-          <a:p>
-            <a:pPr indent="0" marL="0">
-              <a:buNone/>
-            </a:pPr>
-            <a:r>
-              <a:rPr lang="en-US" sz="1400" b="1" dirty="0">
-                <a:solidFill>
-                  <a:srgbClr val="FFFFFF"/>
-                </a:solidFill>
-              </a:rPr>
-              <a:t>ABAP Cloud</a:t>
-            </a:r>
-            <a:r>
-              <a:rPr lang="en-US" sz="1400" dirty="0">
-                <a:solidFill>
-                  <a:srgbClr val="FFFFFF"/>
-                </a:solidFill>
-              </a:rPr>
-              <a:t> é o modelo completo; o </a:t>
-            </a:r>
-            <a:r>
-              <a:rPr lang="en-US" sz="1400" b="1" dirty="0">
-                <a:solidFill>
-                  <a:srgbClr val="FFFFFF"/>
-                </a:solidFill>
-              </a:rPr>
-              <a:t>RAP</a:t>
-            </a:r>
-            <a:r>
-              <a:rPr lang="en-US" sz="1400" dirty="0">
-                <a:solidFill>
-                  <a:srgbClr val="FFFFFF"/>
-                </a:solidFill>
-              </a:rPr>
-              <a:t> é um de seus programming models</a:t>
+              <a:rPr lang="en-US" sz="1200" b="1" dirty="0">
+                <a:solidFill>
+                  <a:srgbClr val="0064D9"/>
+                </a:solidFill>
+              </a:rPr>
+              <a:t>Wrappers  </a:t>
+            </a:r>
+            <a:r>
+              <a:rPr lang="en-US" sz="1200" dirty="0">
+                <a:solidFill>
+                  <a:srgbClr val="1D2D3E"/>
+                </a:solidFill>
+              </a:rPr>
+              <a:t>quando falta uma API liberada no Private Edition ou on-premise, um </a:t>
+            </a:r>
+            <a:r>
+              <a:rPr lang="en-US" sz="1200" b="1" dirty="0">
+                <a:solidFill>
+                  <a:srgbClr val="1D2D3E"/>
+                </a:solidFill>
+              </a:rPr>
+              <a:t>wrapper</a:t>
+            </a:r>
+            <a:r>
+              <a:rPr lang="en-US" sz="1200" dirty="0">
+                <a:solidFill>
+                  <a:srgbClr val="1D2D3E"/>
+                </a:solidFill>
+              </a:rPr>
+              <a:t> (Tier 2) a expõe. Detalhes na aula 04.05.</a:t>
             </a:r>
             <a:endParaRPr lang="en-US" sz="1400" dirty="0"/>
-          </a:p>
-        </p:txBody>
-      </p:sp>
-      <p:sp>
-        <p:nvSpPr>
-          <p:cNvPr id="6" name="Shape 4"/>
-          <p:cNvSpPr/>
-          <p:nvPr/>
-        </p:nvSpPr>
-        <p:spPr>
-          <a:xfrm>
-            <a:off x="6263640" y="1874520"/>
-            <a:ext cx="438912" cy="438912"/>
-          </a:xfrm>
-          <a:prstGeom prst="roundRect">
-            <a:avLst>
-              <a:gd name="adj" fmla="val 20833"/>
-            </a:avLst>
-          </a:prstGeom>
-          <a:solidFill>
-            <a:srgbClr val="0070F2"/>
-          </a:solidFill>
-          <a:ln/>
-        </p:spPr>
-      </p:sp>
-      <p:sp>
-        <p:nvSpPr>
-          <p:cNvPr id="7" name="Text 5"/>
-          <p:cNvSpPr txBox="1"/>
-          <p:nvPr/>
-        </p:nvSpPr>
-        <p:spPr>
-          <a:xfrm>
-            <a:off x="6885432" y="1819656"/>
-            <a:ext cx="4663440" cy="868680"/>
-          </a:xfrm>
-          <a:prstGeom prst="rect">
-            <a:avLst/>
-          </a:prstGeom>
-          <a:noFill/>
-          <a:ln/>
-        </p:spPr>
-        <p:txBody>
-          <a:bodyPr wrap="square" lIns="0" tIns="0" rIns="0" bIns="0" rtlCol="0" anchor="t"/>
-          <a:lstStyle/>
-          <a:p>
-            <a:pPr indent="0" marL="0">
-              <a:buNone/>
-            </a:pPr>
-            <a:r>
-              <a:rPr lang="en-US" sz="1400" dirty="0">
-                <a:solidFill>
-                  <a:srgbClr val="FFFFFF"/>
-                </a:solidFill>
-              </a:rPr>
-              <a:t>Só modelo no BTP ABAP environment e no Public Edition; coexiste no Private e on-premise</a:t>
-            </a:r>
-            <a:endParaRPr lang="en-US" sz="1400" dirty="0"/>
-          </a:p>
-        </p:txBody>
-      </p:sp>
-      <p:sp>
-        <p:nvSpPr>
-          <p:cNvPr id="8" name="Shape 6"/>
-          <p:cNvSpPr/>
-          <p:nvPr/>
-        </p:nvSpPr>
-        <p:spPr>
-          <a:xfrm>
-            <a:off x="731520" y="2834640"/>
-            <a:ext cx="438912" cy="438912"/>
-          </a:xfrm>
-          <a:prstGeom prst="roundRect">
-            <a:avLst>
-              <a:gd name="adj" fmla="val 20833"/>
-            </a:avLst>
-          </a:prstGeom>
-          <a:solidFill>
-            <a:srgbClr val="0070F2"/>
-          </a:solidFill>
-          <a:ln/>
-        </p:spPr>
-      </p:sp>
-      <p:sp>
-        <p:nvSpPr>
-          <p:cNvPr id="9" name="Text 7"/>
-          <p:cNvSpPr txBox="1"/>
-          <p:nvPr/>
-        </p:nvSpPr>
-        <p:spPr>
-          <a:xfrm>
-            <a:off x="1353312" y="2779776"/>
-            <a:ext cx="4663440" cy="868680"/>
-          </a:xfrm>
-          <a:prstGeom prst="rect">
-            <a:avLst/>
-          </a:prstGeom>
-          <a:noFill/>
-          <a:ln/>
-        </p:spPr>
-        <p:txBody>
-          <a:bodyPr wrap="square" lIns="0" tIns="0" rIns="0" bIns="0" rtlCol="0" anchor="t"/>
-          <a:lstStyle/>
-          <a:p>
-            <a:pPr indent="0" marL="0">
-              <a:buNone/>
-            </a:pPr>
-            <a:r>
-              <a:rPr lang="en-US" sz="1400" b="1" dirty="0">
-                <a:solidFill>
-                  <a:srgbClr val="FFFFFF"/>
-                </a:solidFill>
-              </a:rPr>
-              <a:t>ABAP for Cloud Development</a:t>
-            </a:r>
-            <a:r>
-              <a:rPr lang="en-US" sz="1400" dirty="0">
-                <a:solidFill>
-                  <a:srgbClr val="FFFFFF"/>
-                </a:solidFill>
-              </a:rPr>
-              <a:t> proíbe obsoletos, Dynpro e acesso a objetos não liberados</a:t>
-            </a:r>
-            <a:endParaRPr lang="en-US" sz="1400" dirty="0"/>
-          </a:p>
-        </p:txBody>
-      </p:sp>
-      <p:sp>
-        <p:nvSpPr>
-          <p:cNvPr id="10" name="Shape 8"/>
-          <p:cNvSpPr/>
-          <p:nvPr/>
-        </p:nvSpPr>
-        <p:spPr>
-          <a:xfrm>
-            <a:off x="6263640" y="2834640"/>
-            <a:ext cx="438912" cy="438912"/>
-          </a:xfrm>
-          <a:prstGeom prst="roundRect">
-            <a:avLst>
-              <a:gd name="adj" fmla="val 20833"/>
-            </a:avLst>
-          </a:prstGeom>
-          <a:solidFill>
-            <a:srgbClr val="0070F2"/>
-          </a:solidFill>
-          <a:ln/>
-        </p:spPr>
-      </p:sp>
-      <p:sp>
-        <p:nvSpPr>
-          <p:cNvPr id="11" name="Text 9"/>
-          <p:cNvSpPr txBox="1"/>
-          <p:nvPr/>
-        </p:nvSpPr>
-        <p:spPr>
-          <a:xfrm>
-            <a:off x="6885432" y="2779776"/>
-            <a:ext cx="4663440" cy="868680"/>
-          </a:xfrm>
-          <a:prstGeom prst="rect">
-            <a:avLst/>
-          </a:prstGeom>
-          <a:noFill/>
-          <a:ln/>
-        </p:spPr>
-        <p:txBody>
-          <a:bodyPr wrap="square" lIns="0" tIns="0" rIns="0" bIns="0" rtlCol="0" anchor="t"/>
-          <a:lstStyle/>
-          <a:p>
-            <a:pPr indent="0" marL="0">
-              <a:buNone/>
-            </a:pPr>
-            <a:r>
-              <a:rPr lang="en-US" sz="1400" dirty="0">
-                <a:solidFill>
-                  <a:srgbClr val="FFFFFF"/>
-                </a:solidFill>
-              </a:rPr>
-              <a:t>O compilador sugere o substituto liberado, como </a:t>
-            </a:r>
-            <a:r>
-              <a:rPr lang="en-US" sz="1400" dirty="0">
-                <a:solidFill>
-                  <a:srgbClr val="89D1FF"/>
-                </a:solidFill>
-                <a:latin typeface="Courier New" pitchFamily="34" charset="0"/>
-                <a:ea typeface="Courier New" pitchFamily="34" charset="-122"/>
-                <a:cs typeface="Courier New" pitchFamily="34" charset="-120"/>
-              </a:rPr>
-              <a:t>I_Country</a:t>
-            </a:r>
-            <a:r>
-              <a:rPr lang="en-US" sz="1400" dirty="0">
-                <a:solidFill>
-                  <a:srgbClr val="FFFFFF"/>
-                </a:solidFill>
-              </a:rPr>
-              <a:t> no lugar de </a:t>
-            </a:r>
-            <a:r>
-              <a:rPr lang="en-US" sz="1400" dirty="0">
-                <a:solidFill>
-                  <a:srgbClr val="89D1FF"/>
-                </a:solidFill>
-                <a:latin typeface="Courier New" pitchFamily="34" charset="0"/>
-                <a:ea typeface="Courier New" pitchFamily="34" charset="-122"/>
-                <a:cs typeface="Courier New" pitchFamily="34" charset="-120"/>
-              </a:rPr>
-              <a:t>T005</a:t>
-            </a:r>
-            <a:endParaRPr lang="en-US" sz="1400" dirty="0"/>
-          </a:p>
-        </p:txBody>
-      </p:sp>
-      <p:sp>
-        <p:nvSpPr>
-          <p:cNvPr id="12" name="Shape 10"/>
-          <p:cNvSpPr/>
-          <p:nvPr/>
-        </p:nvSpPr>
-        <p:spPr>
-          <a:xfrm>
-            <a:off x="731520" y="3794760"/>
-            <a:ext cx="438912" cy="438912"/>
-          </a:xfrm>
-          <a:prstGeom prst="roundRect">
-            <a:avLst>
-              <a:gd name="adj" fmla="val 20833"/>
-            </a:avLst>
-          </a:prstGeom>
-          <a:solidFill>
-            <a:srgbClr val="0070F2"/>
-          </a:solidFill>
-          <a:ln/>
-        </p:spPr>
-      </p:sp>
-      <p:sp>
-        <p:nvSpPr>
-          <p:cNvPr id="13" name="Text 11"/>
-          <p:cNvSpPr txBox="1"/>
-          <p:nvPr/>
-        </p:nvSpPr>
-        <p:spPr>
-          <a:xfrm>
-            <a:off x="1353312" y="3739896"/>
-            <a:ext cx="4663440" cy="868680"/>
-          </a:xfrm>
-          <a:prstGeom prst="rect">
-            <a:avLst/>
-          </a:prstGeom>
-          <a:noFill/>
-          <a:ln/>
-        </p:spPr>
-        <p:txBody>
-          <a:bodyPr wrap="square" lIns="0" tIns="0" rIns="0" bIns="0" rtlCol="0" anchor="t"/>
-          <a:lstStyle/>
-          <a:p>
-            <a:pPr indent="0" marL="0">
-              <a:buNone/>
-            </a:pPr>
-            <a:r>
-              <a:rPr lang="en-US" sz="1400" dirty="0">
-                <a:solidFill>
-                  <a:srgbClr val="FFFFFF"/>
-                </a:solidFill>
-              </a:rPr>
-              <a:t>RAP, ABAP analytics e frameworks liberados cobrem transação, análise e integração</a:t>
-            </a:r>
-            <a:endParaRPr lang="en-US" sz="1400" dirty="0"/>
-          </a:p>
-        </p:txBody>
-      </p:sp>
-      <p:sp>
-        <p:nvSpPr>
-          <p:cNvPr id="14" name="Shape 12"/>
-          <p:cNvSpPr/>
-          <p:nvPr/>
-        </p:nvSpPr>
-        <p:spPr>
-          <a:xfrm>
-            <a:off x="6263640" y="3794760"/>
-            <a:ext cx="438912" cy="438912"/>
-          </a:xfrm>
-          <a:prstGeom prst="roundRect">
-            <a:avLst>
-              <a:gd name="adj" fmla="val 20833"/>
-            </a:avLst>
-          </a:prstGeom>
-          <a:solidFill>
-            <a:srgbClr val="0070F2"/>
-          </a:solidFill>
-          <a:ln/>
-        </p:spPr>
-      </p:sp>
-      <p:sp>
-        <p:nvSpPr>
-          <p:cNvPr id="15" name="Text 13"/>
-          <p:cNvSpPr txBox="1"/>
-          <p:nvPr/>
-        </p:nvSpPr>
-        <p:spPr>
-          <a:xfrm>
-            <a:off x="6885432" y="3739896"/>
-            <a:ext cx="4663440" cy="868680"/>
-          </a:xfrm>
-          <a:prstGeom prst="rect">
-            <a:avLst/>
-          </a:prstGeom>
-          <a:noFill/>
-          <a:ln/>
-        </p:spPr>
-        <p:txBody>
-          <a:bodyPr wrap="square" lIns="0" tIns="0" rIns="0" bIns="0" rtlCol="0" anchor="t"/>
-          <a:lstStyle/>
-          <a:p>
-            <a:pPr indent="0" marL="0">
-              <a:buNone/>
-            </a:pPr>
-            <a:r>
-              <a:rPr lang="en-US" sz="1400" b="1" dirty="0">
-                <a:solidFill>
-                  <a:srgbClr val="FFFFFF"/>
-                </a:solidFill>
-              </a:rPr>
-              <a:t>Released APIs</a:t>
-            </a:r>
-            <a:r>
-              <a:rPr lang="en-US" sz="1400" dirty="0">
-                <a:solidFill>
-                  <a:srgbClr val="FFFFFF"/>
-                </a:solidFill>
-              </a:rPr>
-              <a:t> (local, remote, extension points) e serviços de reuso dão estabilidade</a:t>
-            </a:r>
-            <a:endParaRPr lang="en-US" sz="1400" dirty="0"/>
-          </a:p>
-        </p:txBody>
-      </p:sp>
-      <p:sp>
-        <p:nvSpPr>
-          <p:cNvPr id="16" name="Shape 14"/>
-          <p:cNvSpPr/>
-          <p:nvPr/>
-        </p:nvSpPr>
-        <p:spPr>
-          <a:xfrm>
-            <a:off x="731520" y="5349240"/>
-            <a:ext cx="10698480" cy="749808"/>
-          </a:xfrm>
-          <a:prstGeom prst="roundRect">
-            <a:avLst>
-              <a:gd name="adj" fmla="val 12195"/>
-            </a:avLst>
-          </a:prstGeom>
-          <a:solidFill>
-            <a:srgbClr val="1B3A7A"/>
-          </a:solidFill>
-          <a:ln/>
-        </p:spPr>
-      </p:sp>
-      <p:sp>
-        <p:nvSpPr>
-          <p:cNvPr id="17" name="Text 15"/>
-          <p:cNvSpPr txBox="1"/>
-          <p:nvPr/>
-        </p:nvSpPr>
-        <p:spPr>
-          <a:xfrm>
-            <a:off x="1508760" y="5349240"/>
-            <a:ext cx="9692640" cy="749808"/>
-          </a:xfrm>
-          <a:prstGeom prst="rect">
-            <a:avLst/>
-          </a:prstGeom>
-          <a:noFill/>
-          <a:ln/>
-        </p:spPr>
-        <p:txBody>
-          <a:bodyPr wrap="square" lIns="0" tIns="0" rIns="0" bIns="0" rtlCol="0" anchor="ctr"/>
-          <a:lstStyle/>
-          <a:p>
-            <a:pPr indent="0" marL="0">
-              <a:buNone/>
-            </a:pPr>
-            <a:r>
-              <a:rPr lang="en-US" sz="1500" b="1" dirty="0">
-                <a:solidFill>
-                  <a:srgbClr val="89D1FF"/>
-                </a:solidFill>
-              </a:rPr>
-              <a:t>Próxima aula · 05.04  </a:t>
-            </a:r>
-            <a:r>
-              <a:rPr lang="en-US" sz="1500" dirty="0">
-                <a:solidFill>
-                  <a:srgbClr val="FFFFFF"/>
-                </a:solidFill>
-              </a:rPr>
-              <a:t>Modelo de extensibilidade: Key user, developer e side-by-side.</a:t>
-            </a:r>
-            <a:endParaRPr lang="en-US" sz="1500" dirty="0"/>
           </a:p>
         </p:txBody>
       </p:sp>
       <p:pic>
         <p:nvPicPr>
-          <p:cNvPr id="18" name="Image 0" descr="preencoded.png">    </p:cNvPr>
+          <p:cNvPr id="12" name="Image 0" descr="preencoded.png">    </p:cNvPr>
           <p:cNvPicPr>
             <a:picLocks noChangeAspect="1"/>
           </p:cNvPicPr>
@@ -9624,6 +11530,656 @@
         </p:blipFill>
         <p:spPr>
           <a:xfrm>
+            <a:off x="749808" y="5733288"/>
+            <a:ext cx="310896" cy="310896"/>
+          </a:xfrm>
+          <a:prstGeom prst="rect">
+            <a:avLst/>
+          </a:prstGeom>
+        </p:spPr>
+      </p:pic>
+      <p:sp>
+        <p:nvSpPr>
+          <p:cNvPr id="25" name="Slide Number Placeholder 0"/>
+          <p:cNvSpPr>
+            <a:spLocks noGrp="1"/>
+          </p:cNvSpPr>
+          <p:nvPr>
+            <p:ph type="sldNum" sz="quarter" idx="4294967295"/>
+          </p:nvPr>
+        </p:nvSpPr>
+        <p:spPr>
+          <a:xfrm>
+            <a:off x="11094415" y="6473952"/>
+            <a:ext cx="548640" cy="228600"/>
+          </a:xfrm>
+          <a:prstGeom prst="rect">
+            <a:avLst/>
+          </a:prstGeom>
+          <a:extLst>
+            <a:ext uri="{C572A759-6A51-4108-AA02-DFA0A04FC94B}">
+              <ma14:wrappingTextBoxFlag xmlns:ma14="http://schemas.microsoft.com/office/mac/drawingml/2011/main" val="0"/>
+            </a:ext>
+          </a:extLst>
+        </p:spPr>
+        <p:txBody>
+          <a:bodyPr lIns="0" tIns="0" rIns="0" bIns="0"/>
+          <a:lstStyle>
+            <a:lvl1pPr>
+              <a:defRPr sz="900">
+                <a:solidFill>
+                  <a:srgbClr val="556B82"/>
+                </a:solidFill>
+              </a:defRPr>
+            </a:lvl1pPr>
+          </a:lstStyle>
+          <a:p>
+            <a:pPr algn="r"/>
+            <a:fld id="{F7021451-1387-4CA6-816F-3879F97B5CBC}" type="slidenum">
+              <a:rPr b="0" lang="en-US"/>
+              <a:t>18</a:t>
+            </a:fld>
+            <a:endParaRPr lang="en-US"/>
+          </a:p>
+        </p:txBody>
+      </p:sp>
+    </p:spTree>
+  </p:cSld>
+  <p:clrMapOvr>
+    <a:masterClrMapping/>
+  </p:clrMapOvr>
+</p:sld>
+</file>
+
+<file path=ppt/slides/slide19.xml><?xml version="1.0" encoding="utf-8"?>
+<p:sld xmlns:a="http://schemas.openxmlformats.org/drawingml/2006/main" xmlns:r="http://schemas.openxmlformats.org/officeDocument/2006/relationships" xmlns:p="http://schemas.openxmlformats.org/presentationml/2006/main">
+  <p:cSld name="Slide 19">
+    <p:spTree>
+      <p:nvGrpSpPr>
+        <p:cNvPr id="1" name=""/>
+        <p:cNvGrpSpPr/>
+        <p:nvPr/>
+      </p:nvGrpSpPr>
+      <p:grpSpPr>
+        <a:xfrm>
+          <a:off x="0" y="0"/>
+          <a:ext cx="0" cy="0"/>
+          <a:chOff x="0" y="0"/>
+          <a:chExt cx="0" cy="0"/>
+        </a:xfrm>
+      </p:grpSpPr>
+      <p:sp>
+        <p:nvSpPr>
+          <p:cNvPr id="2" name="Text 0"/>
+          <p:cNvSpPr txBox="1"/>
+          <p:nvPr/>
+        </p:nvSpPr>
+        <p:spPr>
+          <a:xfrm>
+            <a:off x="731520" y="502920"/>
+            <a:ext cx="7315200" cy="320040"/>
+          </a:xfrm>
+          <a:prstGeom prst="rect">
+            <a:avLst/>
+          </a:prstGeom>
+          <a:noFill/>
+          <a:ln/>
+        </p:spPr>
+        <p:txBody>
+          <a:bodyPr wrap="square" lIns="0" tIns="0" rIns="0" bIns="0" rtlCol="0" anchor="t"/>
+          <a:lstStyle/>
+          <a:p>
+            <a:pPr indent="0" marL="0">
+              <a:buNone/>
+            </a:pPr>
+            <a:r>
+              <a:rPr lang="en-US" sz="1300" b="1" spc="200" kern="0" dirty="0">
+                <a:solidFill>
+                  <a:srgbClr val="89D1FF"/>
+                </a:solidFill>
+              </a:rPr>
+              <a:t>RESUMO DA AULA</a:t>
+            </a:r>
+            <a:endParaRPr lang="en-US" sz="1300" dirty="0"/>
+          </a:p>
+        </p:txBody>
+      </p:sp>
+      <p:sp>
+        <p:nvSpPr>
+          <p:cNvPr id="3" name="Text 1"/>
+          <p:cNvSpPr txBox="1"/>
+          <p:nvPr/>
+        </p:nvSpPr>
+        <p:spPr>
+          <a:xfrm>
+            <a:off x="731520" y="868680"/>
+            <a:ext cx="10698480" cy="731520"/>
+          </a:xfrm>
+          <a:prstGeom prst="rect">
+            <a:avLst/>
+          </a:prstGeom>
+          <a:noFill/>
+          <a:ln/>
+        </p:spPr>
+        <p:txBody>
+          <a:bodyPr wrap="square" lIns="0" tIns="0" rIns="0" bIns="0" rtlCol="0" anchor="ctr"/>
+          <a:lstStyle/>
+          <a:p>
+            <a:pPr indent="0" marL="0">
+              <a:buNone/>
+            </a:pPr>
+            <a:r>
+              <a:rPr lang="en-US" sz="3200" b="1" dirty="0">
+                <a:solidFill>
+                  <a:srgbClr val="FFFFFF"/>
+                </a:solidFill>
+              </a:rPr>
+              <a:t>O que aprendemos na aula 04.03</a:t>
+            </a:r>
+            <a:endParaRPr lang="en-US" sz="3200" dirty="0"/>
+          </a:p>
+        </p:txBody>
+      </p:sp>
+      <p:sp>
+        <p:nvSpPr>
+          <p:cNvPr id="4" name="Shape 2"/>
+          <p:cNvSpPr/>
+          <p:nvPr/>
+        </p:nvSpPr>
+        <p:spPr>
+          <a:xfrm>
+            <a:off x="731520" y="1874520"/>
+            <a:ext cx="438912" cy="438912"/>
+          </a:xfrm>
+          <a:prstGeom prst="roundRect">
+            <a:avLst>
+              <a:gd name="adj" fmla="val 20833"/>
+            </a:avLst>
+          </a:prstGeom>
+          <a:solidFill>
+            <a:srgbClr val="0070F2"/>
+          </a:solidFill>
+          <a:ln/>
+        </p:spPr>
+      </p:sp>
+      <p:sp>
+        <p:nvSpPr>
+          <p:cNvPr id="5" name="Text 3"/>
+          <p:cNvSpPr txBox="1"/>
+          <p:nvPr/>
+        </p:nvSpPr>
+        <p:spPr>
+          <a:xfrm>
+            <a:off x="1353312" y="1819656"/>
+            <a:ext cx="4663440" cy="868680"/>
+          </a:xfrm>
+          <a:prstGeom prst="rect">
+            <a:avLst/>
+          </a:prstGeom>
+          <a:noFill/>
+          <a:ln/>
+        </p:spPr>
+        <p:txBody>
+          <a:bodyPr wrap="square" lIns="0" tIns="0" rIns="0" bIns="0" rtlCol="0" anchor="t"/>
+          <a:lstStyle/>
+          <a:p>
+            <a:pPr indent="0" marL="0">
+              <a:buNone/>
+            </a:pPr>
+            <a:r>
+              <a:rPr lang="en-US" sz="1400" b="1" dirty="0">
+                <a:solidFill>
+                  <a:srgbClr val="FFFFFF"/>
+                </a:solidFill>
+              </a:rPr>
+              <a:t>ABAP Cloud</a:t>
+            </a:r>
+            <a:r>
+              <a:rPr lang="en-US" sz="1400" dirty="0">
+                <a:solidFill>
+                  <a:srgbClr val="FFFFFF"/>
+                </a:solidFill>
+              </a:rPr>
+              <a:t> é o modelo completo; o </a:t>
+            </a:r>
+            <a:r>
+              <a:rPr lang="en-US" sz="1400" b="1" dirty="0">
+                <a:solidFill>
+                  <a:srgbClr val="FFFFFF"/>
+                </a:solidFill>
+              </a:rPr>
+              <a:t>RAP</a:t>
+            </a:r>
+            <a:r>
+              <a:rPr lang="en-US" sz="1400" dirty="0">
+                <a:solidFill>
+                  <a:srgbClr val="FFFFFF"/>
+                </a:solidFill>
+              </a:rPr>
+              <a:t> é um de seus programming models</a:t>
+            </a:r>
+            <a:endParaRPr lang="en-US" sz="1400" dirty="0"/>
+          </a:p>
+        </p:txBody>
+      </p:sp>
+      <p:sp>
+        <p:nvSpPr>
+          <p:cNvPr id="6" name="Shape 4"/>
+          <p:cNvSpPr/>
+          <p:nvPr/>
+        </p:nvSpPr>
+        <p:spPr>
+          <a:xfrm>
+            <a:off x="6263640" y="1874520"/>
+            <a:ext cx="438912" cy="438912"/>
+          </a:xfrm>
+          <a:prstGeom prst="roundRect">
+            <a:avLst>
+              <a:gd name="adj" fmla="val 20833"/>
+            </a:avLst>
+          </a:prstGeom>
+          <a:solidFill>
+            <a:srgbClr val="0070F2"/>
+          </a:solidFill>
+          <a:ln/>
+        </p:spPr>
+      </p:sp>
+      <p:sp>
+        <p:nvSpPr>
+          <p:cNvPr id="7" name="Text 5"/>
+          <p:cNvSpPr txBox="1"/>
+          <p:nvPr/>
+        </p:nvSpPr>
+        <p:spPr>
+          <a:xfrm>
+            <a:off x="6885432" y="1819656"/>
+            <a:ext cx="4663440" cy="868680"/>
+          </a:xfrm>
+          <a:prstGeom prst="rect">
+            <a:avLst/>
+          </a:prstGeom>
+          <a:noFill/>
+          <a:ln/>
+        </p:spPr>
+        <p:txBody>
+          <a:bodyPr wrap="square" lIns="0" tIns="0" rIns="0" bIns="0" rtlCol="0" anchor="t"/>
+          <a:lstStyle/>
+          <a:p>
+            <a:pPr indent="0" marL="0">
+              <a:buNone/>
+            </a:pPr>
+            <a:r>
+              <a:rPr lang="en-US" sz="1400" dirty="0">
+                <a:solidFill>
+                  <a:srgbClr val="FFFFFF"/>
+                </a:solidFill>
+              </a:rPr>
+              <a:t>Só modelo no BTP ABAP environment e no Public Edition; coexiste no Private e on-premise</a:t>
+            </a:r>
+            <a:endParaRPr lang="en-US" sz="1400" dirty="0"/>
+          </a:p>
+        </p:txBody>
+      </p:sp>
+      <p:sp>
+        <p:nvSpPr>
+          <p:cNvPr id="8" name="Shape 6"/>
+          <p:cNvSpPr/>
+          <p:nvPr/>
+        </p:nvSpPr>
+        <p:spPr>
+          <a:xfrm>
+            <a:off x="731520" y="2834640"/>
+            <a:ext cx="438912" cy="438912"/>
+          </a:xfrm>
+          <a:prstGeom prst="roundRect">
+            <a:avLst>
+              <a:gd name="adj" fmla="val 20833"/>
+            </a:avLst>
+          </a:prstGeom>
+          <a:solidFill>
+            <a:srgbClr val="0070F2"/>
+          </a:solidFill>
+          <a:ln/>
+        </p:spPr>
+      </p:sp>
+      <p:sp>
+        <p:nvSpPr>
+          <p:cNvPr id="9" name="Text 7"/>
+          <p:cNvSpPr txBox="1"/>
+          <p:nvPr/>
+        </p:nvSpPr>
+        <p:spPr>
+          <a:xfrm>
+            <a:off x="1353312" y="2779776"/>
+            <a:ext cx="4663440" cy="868680"/>
+          </a:xfrm>
+          <a:prstGeom prst="rect">
+            <a:avLst/>
+          </a:prstGeom>
+          <a:noFill/>
+          <a:ln/>
+        </p:spPr>
+        <p:txBody>
+          <a:bodyPr wrap="square" lIns="0" tIns="0" rIns="0" bIns="0" rtlCol="0" anchor="t"/>
+          <a:lstStyle/>
+          <a:p>
+            <a:pPr indent="0" marL="0">
+              <a:buNone/>
+            </a:pPr>
+            <a:r>
+              <a:rPr lang="en-US" sz="1400" b="1" dirty="0">
+                <a:solidFill>
+                  <a:srgbClr val="FFFFFF"/>
+                </a:solidFill>
+              </a:rPr>
+              <a:t>ABAP for Cloud Development</a:t>
+            </a:r>
+            <a:r>
+              <a:rPr lang="en-US" sz="1400" dirty="0">
+                <a:solidFill>
+                  <a:srgbClr val="FFFFFF"/>
+                </a:solidFill>
+              </a:rPr>
+              <a:t> proíbe obsoletos, Dynpro e acesso a objetos não liberados</a:t>
+            </a:r>
+            <a:endParaRPr lang="en-US" sz="1400" dirty="0"/>
+          </a:p>
+        </p:txBody>
+      </p:sp>
+      <p:sp>
+        <p:nvSpPr>
+          <p:cNvPr id="10" name="Shape 8"/>
+          <p:cNvSpPr/>
+          <p:nvPr/>
+        </p:nvSpPr>
+        <p:spPr>
+          <a:xfrm>
+            <a:off x="6263640" y="2834640"/>
+            <a:ext cx="438912" cy="438912"/>
+          </a:xfrm>
+          <a:prstGeom prst="roundRect">
+            <a:avLst>
+              <a:gd name="adj" fmla="val 20833"/>
+            </a:avLst>
+          </a:prstGeom>
+          <a:solidFill>
+            <a:srgbClr val="0070F2"/>
+          </a:solidFill>
+          <a:ln/>
+        </p:spPr>
+      </p:sp>
+      <p:sp>
+        <p:nvSpPr>
+          <p:cNvPr id="11" name="Text 9"/>
+          <p:cNvSpPr txBox="1"/>
+          <p:nvPr/>
+        </p:nvSpPr>
+        <p:spPr>
+          <a:xfrm>
+            <a:off x="6885432" y="2779776"/>
+            <a:ext cx="4663440" cy="868680"/>
+          </a:xfrm>
+          <a:prstGeom prst="rect">
+            <a:avLst/>
+          </a:prstGeom>
+          <a:noFill/>
+          <a:ln/>
+        </p:spPr>
+        <p:txBody>
+          <a:bodyPr wrap="square" lIns="0" tIns="0" rIns="0" bIns="0" rtlCol="0" anchor="t"/>
+          <a:lstStyle/>
+          <a:p>
+            <a:pPr indent="0" marL="0">
+              <a:buNone/>
+            </a:pPr>
+            <a:r>
+              <a:rPr lang="en-US" sz="1400" dirty="0">
+                <a:solidFill>
+                  <a:srgbClr val="FFFFFF"/>
+                </a:solidFill>
+              </a:rPr>
+              <a:t>O compilador sugere o substituto liberado, como </a:t>
+            </a:r>
+            <a:r>
+              <a:rPr lang="en-US" sz="1400" dirty="0">
+                <a:solidFill>
+                  <a:srgbClr val="89D1FF"/>
+                </a:solidFill>
+                <a:latin typeface="Courier New" pitchFamily="34" charset="0"/>
+                <a:ea typeface="Courier New" pitchFamily="34" charset="-122"/>
+                <a:cs typeface="Courier New" pitchFamily="34" charset="-120"/>
+              </a:rPr>
+              <a:t>I_Country</a:t>
+            </a:r>
+            <a:r>
+              <a:rPr lang="en-US" sz="1400" dirty="0">
+                <a:solidFill>
+                  <a:srgbClr val="FFFFFF"/>
+                </a:solidFill>
+              </a:rPr>
+              <a:t> no lugar de </a:t>
+            </a:r>
+            <a:r>
+              <a:rPr lang="en-US" sz="1400" dirty="0">
+                <a:solidFill>
+                  <a:srgbClr val="89D1FF"/>
+                </a:solidFill>
+                <a:latin typeface="Courier New" pitchFamily="34" charset="0"/>
+                <a:ea typeface="Courier New" pitchFamily="34" charset="-122"/>
+                <a:cs typeface="Courier New" pitchFamily="34" charset="-120"/>
+              </a:rPr>
+              <a:t>T005</a:t>
+            </a:r>
+            <a:endParaRPr lang="en-US" sz="1400" dirty="0"/>
+          </a:p>
+        </p:txBody>
+      </p:sp>
+      <p:sp>
+        <p:nvSpPr>
+          <p:cNvPr id="12" name="Shape 10"/>
+          <p:cNvSpPr/>
+          <p:nvPr/>
+        </p:nvSpPr>
+        <p:spPr>
+          <a:xfrm>
+            <a:off x="731520" y="3794760"/>
+            <a:ext cx="438912" cy="438912"/>
+          </a:xfrm>
+          <a:prstGeom prst="roundRect">
+            <a:avLst>
+              <a:gd name="adj" fmla="val 20833"/>
+            </a:avLst>
+          </a:prstGeom>
+          <a:solidFill>
+            <a:srgbClr val="0070F2"/>
+          </a:solidFill>
+          <a:ln/>
+        </p:spPr>
+      </p:sp>
+      <p:sp>
+        <p:nvSpPr>
+          <p:cNvPr id="13" name="Text 11"/>
+          <p:cNvSpPr txBox="1"/>
+          <p:nvPr/>
+        </p:nvSpPr>
+        <p:spPr>
+          <a:xfrm>
+            <a:off x="1353312" y="3739896"/>
+            <a:ext cx="4663440" cy="868680"/>
+          </a:xfrm>
+          <a:prstGeom prst="rect">
+            <a:avLst/>
+          </a:prstGeom>
+          <a:noFill/>
+          <a:ln/>
+        </p:spPr>
+        <p:txBody>
+          <a:bodyPr wrap="square" lIns="0" tIns="0" rIns="0" bIns="0" rtlCol="0" anchor="t"/>
+          <a:lstStyle/>
+          <a:p>
+            <a:pPr indent="0" marL="0">
+              <a:buNone/>
+            </a:pPr>
+            <a:r>
+              <a:rPr lang="en-US" sz="1400" dirty="0">
+                <a:solidFill>
+                  <a:srgbClr val="FFFFFF"/>
+                </a:solidFill>
+              </a:rPr>
+              <a:t>RAP, ABAP analytics e frameworks liberados cobrem transação, análise e integração</a:t>
+            </a:r>
+            <a:endParaRPr lang="en-US" sz="1400" dirty="0"/>
+          </a:p>
+        </p:txBody>
+      </p:sp>
+      <p:sp>
+        <p:nvSpPr>
+          <p:cNvPr id="14" name="Shape 12"/>
+          <p:cNvSpPr/>
+          <p:nvPr/>
+        </p:nvSpPr>
+        <p:spPr>
+          <a:xfrm>
+            <a:off x="6263640" y="3794760"/>
+            <a:ext cx="438912" cy="438912"/>
+          </a:xfrm>
+          <a:prstGeom prst="roundRect">
+            <a:avLst>
+              <a:gd name="adj" fmla="val 20833"/>
+            </a:avLst>
+          </a:prstGeom>
+          <a:solidFill>
+            <a:srgbClr val="0070F2"/>
+          </a:solidFill>
+          <a:ln/>
+        </p:spPr>
+      </p:sp>
+      <p:sp>
+        <p:nvSpPr>
+          <p:cNvPr id="15" name="Text 13"/>
+          <p:cNvSpPr txBox="1"/>
+          <p:nvPr/>
+        </p:nvSpPr>
+        <p:spPr>
+          <a:xfrm>
+            <a:off x="6885432" y="3739896"/>
+            <a:ext cx="4663440" cy="868680"/>
+          </a:xfrm>
+          <a:prstGeom prst="rect">
+            <a:avLst/>
+          </a:prstGeom>
+          <a:noFill/>
+          <a:ln/>
+        </p:spPr>
+        <p:txBody>
+          <a:bodyPr wrap="square" lIns="0" tIns="0" rIns="0" bIns="0" rtlCol="0" anchor="t"/>
+          <a:lstStyle/>
+          <a:p>
+            <a:pPr indent="0" marL="0">
+              <a:buNone/>
+            </a:pPr>
+            <a:r>
+              <a:rPr lang="en-US" sz="1400" b="1" dirty="0">
+                <a:solidFill>
+                  <a:srgbClr val="FFFFFF"/>
+                </a:solidFill>
+              </a:rPr>
+              <a:t>Released APIs</a:t>
+            </a:r>
+            <a:r>
+              <a:rPr lang="en-US" sz="1400" dirty="0">
+                <a:solidFill>
+                  <a:srgbClr val="FFFFFF"/>
+                </a:solidFill>
+              </a:rPr>
+              <a:t> (local, remote, extension points) e serviços de reuso dão estabilidade</a:t>
+            </a:r>
+            <a:endParaRPr lang="en-US" sz="1400" dirty="0"/>
+          </a:p>
+        </p:txBody>
+      </p:sp>
+      <p:sp>
+        <p:nvSpPr>
+          <p:cNvPr id="16" name="Shape 14"/>
+          <p:cNvSpPr/>
+          <p:nvPr/>
+        </p:nvSpPr>
+        <p:spPr>
+          <a:xfrm>
+            <a:off x="731520" y="5349240"/>
+            <a:ext cx="10698480" cy="749808"/>
+          </a:xfrm>
+          <a:prstGeom prst="roundRect">
+            <a:avLst>
+              <a:gd name="adj" fmla="val 12195"/>
+            </a:avLst>
+          </a:prstGeom>
+          <a:solidFill>
+            <a:srgbClr val="1B3A7A"/>
+          </a:solidFill>
+          <a:ln/>
+        </p:spPr>
+      </p:sp>
+      <p:sp>
+        <p:nvSpPr>
+          <p:cNvPr id="17" name="Text 15"/>
+          <p:cNvSpPr txBox="1"/>
+          <p:nvPr/>
+        </p:nvSpPr>
+        <p:spPr>
+          <a:xfrm>
+            <a:off x="1508760" y="5349240"/>
+            <a:ext cx="9692640" cy="749808"/>
+          </a:xfrm>
+          <a:prstGeom prst="rect">
+            <a:avLst/>
+          </a:prstGeom>
+          <a:noFill/>
+          <a:ln/>
+        </p:spPr>
+        <p:txBody>
+          <a:bodyPr wrap="square" lIns="0" tIns="0" rIns="0" bIns="0" rtlCol="0" anchor="ctr"/>
+          <a:lstStyle/>
+          <a:p>
+            <a:pPr indent="0" marL="0">
+              <a:buNone/>
+            </a:pPr>
+            <a:r>
+              <a:rPr lang="en-US" sz="1500" b="1" dirty="0">
+                <a:solidFill>
+                  <a:srgbClr val="89D1FF"/>
+                </a:solidFill>
+              </a:rPr>
+              <a:t>Próxima aula · 04.04  </a:t>
+            </a:r>
+            <a:r>
+              <a:rPr lang="en-US" sz="1500" dirty="0">
+                <a:solidFill>
+                  <a:srgbClr val="FFFFFF"/>
+                </a:solidFill>
+              </a:rPr>
+              <a:t>Modelo de extensibilidade: Key user, developer e side-by-side.</a:t>
+            </a:r>
+            <a:endParaRPr lang="en-US" sz="1500" dirty="0"/>
+          </a:p>
+        </p:txBody>
+      </p:sp>
+      <p:pic>
+        <p:nvPicPr>
+          <p:cNvPr id="18" name="Image 0" descr="preencoded.png">    </p:cNvPr>
+          <p:cNvPicPr>
+            <a:picLocks noChangeAspect="1"/>
+          </p:cNvPicPr>
+          <p:nvPr/>
+        </p:nvPicPr>
+        <p:blipFill>
+          <a:blip r:embed="rId1"/>
+          <a:stretch>
+            <a:fillRect/>
+          </a:stretch>
+        </p:blipFill>
+        <p:spPr>
+          <a:xfrm>
             <a:off x="822960" y="1965960"/>
             <a:ext cx="256032" cy="256032"/>
           </a:xfrm>
@@ -9648,7 +12204,7 @@
         </p:blipFill>
         <p:spPr>
           <a:xfrm>
-            <a:off x="822960" y="2926080"/>
+            <a:off x="6355080" y="1965960"/>
             <a:ext cx="256032" cy="256032"/>
           </a:xfrm>
           <a:prstGeom prst="rect">
@@ -9672,7 +12228,7 @@
         </p:blipFill>
         <p:spPr>
           <a:xfrm>
-            <a:off x="6355080" y="1965960"/>
+            <a:off x="822960" y="2926080"/>
             <a:ext cx="256032" cy="256032"/>
           </a:xfrm>
           <a:prstGeom prst="rect">
@@ -9871,7 +12427,7 @@
                   <a:srgbClr val="1D2D3E"/>
                 </a:solidFill>
               </a:rPr>
-              <a:t>Módulo 05 em 5 aulas: Clean Core e extensibilidade</a:t>
+              <a:t>Módulo 04 em 5 aulas: Clean Core e extensibilidade</a:t>
             </a:r>
             <a:endParaRPr lang="en-US" sz="2800" dirty="0"/>
           </a:p>
@@ -10827,7 +13383,7 @@
         </p:blipFill>
         <p:spPr>
           <a:xfrm>
-            <a:off x="4328038" y="1847088"/>
+            <a:off x="6583497" y="1847088"/>
             <a:ext cx="347472" cy="347472"/>
           </a:xfrm>
           <a:prstGeom prst="rect">
@@ -10875,7 +13431,7 @@
         </p:blipFill>
         <p:spPr>
           <a:xfrm>
-            <a:off x="6583497" y="1847088"/>
+            <a:off x="11094415" y="1847088"/>
             <a:ext cx="347472" cy="347472"/>
           </a:xfrm>
           <a:prstGeom prst="rect">
@@ -10923,7 +13479,7 @@
         </p:blipFill>
         <p:spPr>
           <a:xfrm>
-            <a:off x="11094415" y="1847088"/>
+            <a:off x="4328038" y="1847088"/>
             <a:ext cx="347472" cy="347472"/>
           </a:xfrm>
           <a:prstGeom prst="rect">
@@ -11885,7 +14441,7 @@
         </p:blipFill>
         <p:spPr>
           <a:xfrm>
-            <a:off x="6511900" y="3541776"/>
+            <a:off x="9342653" y="3541776"/>
             <a:ext cx="256032" cy="256032"/>
           </a:xfrm>
           <a:prstGeom prst="rect">
@@ -11909,7 +14465,7 @@
         </p:blipFill>
         <p:spPr>
           <a:xfrm>
-            <a:off x="9342653" y="3541776"/>
+            <a:off x="6511900" y="3541776"/>
             <a:ext cx="256032" cy="256032"/>
           </a:xfrm>
           <a:prstGeom prst="rect">
@@ -12039,7 +14595,7 @@
                   <a:srgbClr val="89D1FF"/>
                 </a:solidFill>
               </a:rPr>
-              <a:t>AULA 05.03 · SEÇÃO 1</a:t>
+              <a:t>AULA 04.03 · SEÇÃO 1</a:t>
             </a:r>
             <a:endParaRPr lang="en-US" sz="1300" dirty="0"/>
           </a:p>
@@ -13195,8 +15751,8 @@
         </p:blipFill>
         <p:spPr>
           <a:xfrm>
-            <a:off x="850392" y="2818257"/>
-            <a:ext cx="256032" cy="256032"/>
+            <a:off x="749808" y="4862703"/>
+            <a:ext cx="310896" cy="310896"/>
           </a:xfrm>
           <a:prstGeom prst="rect">
             <a:avLst/>
@@ -13219,7 +15775,7 @@
         </p:blipFill>
         <p:spPr>
           <a:xfrm>
-            <a:off x="3114995" y="2818257"/>
+            <a:off x="850392" y="2818257"/>
             <a:ext cx="256032" cy="256032"/>
           </a:xfrm>
           <a:prstGeom prst="rect">
@@ -13243,7 +15799,7 @@
         </p:blipFill>
         <p:spPr>
           <a:xfrm>
-            <a:off x="9908804" y="2818257"/>
+            <a:off x="7644201" y="2818257"/>
             <a:ext cx="256032" cy="256032"/>
           </a:xfrm>
           <a:prstGeom prst="rect">
@@ -13267,7 +15823,7 @@
         </p:blipFill>
         <p:spPr>
           <a:xfrm>
-            <a:off x="5379598" y="2818257"/>
+            <a:off x="3114995" y="2818257"/>
             <a:ext cx="256032" cy="256032"/>
           </a:xfrm>
           <a:prstGeom prst="rect">
@@ -13291,7 +15847,7 @@
         </p:blipFill>
         <p:spPr>
           <a:xfrm>
-            <a:off x="7644201" y="2818257"/>
+            <a:off x="5379598" y="2818257"/>
             <a:ext cx="256032" cy="256032"/>
           </a:xfrm>
           <a:prstGeom prst="rect">
@@ -13315,8 +15871,8 @@
         </p:blipFill>
         <p:spPr>
           <a:xfrm>
-            <a:off x="749808" y="4862703"/>
-            <a:ext cx="310896" cy="310896"/>
+            <a:off x="9908804" y="2818257"/>
+            <a:ext cx="256032" cy="256032"/>
           </a:xfrm>
           <a:prstGeom prst="rect">
             <a:avLst/>
@@ -14401,7 +16957,7 @@
                   <a:srgbClr val="89D1FF"/>
                 </a:solidFill>
               </a:rPr>
-              <a:t>AULA 05.03 · SEÇÃO 2</a:t>
+              <a:t>AULA 04.03 · SEÇÃO 2</a:t>
             </a:r>
             <a:endParaRPr lang="en-US" sz="1300" dirty="0"/>
           </a:p>
@@ -15513,8 +18069,8 @@
         </p:blipFill>
         <p:spPr>
           <a:xfrm>
-            <a:off x="6562192" y="2630043"/>
-            <a:ext cx="256032" cy="256032"/>
+            <a:off x="749808" y="5124069"/>
+            <a:ext cx="310896" cy="310896"/>
           </a:xfrm>
           <a:prstGeom prst="rect">
             <a:avLst/>
@@ -15537,8 +18093,8 @@
         </p:blipFill>
         <p:spPr>
           <a:xfrm>
-            <a:off x="749808" y="5124069"/>
-            <a:ext cx="310896" cy="310896"/>
+            <a:off x="6562192" y="2630043"/>
+            <a:ext cx="256032" cy="256032"/>
           </a:xfrm>
           <a:prstGeom prst="rect">
             <a:avLst/>
